--- a/docs/deck.pptx
+++ b/docs/deck.pptx
@@ -5619,7 +5619,7 @@
               </a:defRPr>
             </a:pPr>
             <a:r>
-              <a:t>Two predeclared task scopes of the excluded Mercy House incident. LLM-ranked baseline versus frozen source-trained selector;40 choices per arm.</a:t>
+              <a:t>Two predeclared task scopes of the excluded Mercy House incident. LLM-ranked baseline versus frozen source-trained selector; 40 choices per arm.</a:t>
             </a:r>
           </a:p>
         </p:txBody>
@@ -6263,7 +6263,7 @@
               </a:defRPr>
             </a:pPr>
             <a:r>
-              <a:t>The same grounded response bank controls NPC variation. After branches diverge, later LLM proposals may differ.</a:t>
+              <a:t>The same grounded response bank controls character variation. After branches diverge, later LLM proposals may differ.</a:t>
             </a:r>
           </a:p>
         </p:txBody>
@@ -9345,7 +9345,7 @@
               </a:defRPr>
             </a:pPr>
             <a:r>
-              <a:t>Beginner: one witnessed assault. Intermediate: two casualties and an intended target. Advanced: fabrication, custody, historical records and divided loyalties.</a:t>
+              <a:t>In the flagship case, physician Mira Sen dies while exposing old institutional records. The detective’s sister, former partner and trusted constable connect him to the inquiry, putting loyalty in conflict with proof.</a:t>
             </a:r>
           </a:p>
         </p:txBody>
@@ -15169,7 +15169,7 @@
               </a:defRPr>
             </a:pPr>
             <a:r>
-              <a:t>Earlier prototype:20,000 episodes /460 weights. Fresh source curriculum:6,000 episodes /132 weights. Language-model weights stay fixed.</a:t>
+              <a:t>Earlier prototype: 20,000 episodes / 460 weights. Fresh source curriculum: 6,000 episodes / 132 weights. Language-model weights stay fixed.</a:t>
             </a:r>
           </a:p>
         </p:txBody>

--- a/docs/deck.pptx
+++ b/docs/deck.pptx
@@ -515,7 +515,7 @@
           <a:lstStyle/>
           <a:p>
             <a:r>
-              <a:t>Sources: The Mentalist S1E7 Seeing Red https://www.tvmaze.com/episodes/8884/the-mentalist-1x07-seeing-red ; S1E8 The Thin Red Line https://tv.apple.com/nz/episode/thin-red-line/umc.cmc.343dcf9kznkxsuz2rx6jcazs9 ; His &amp; Hers official ending https://www.netflix.com/tudum/articles/his-hers-episode-6-recap-ending-explained . Broad mechanisms only; no episode transcript training or original-plot generalization claim.</a:t>
+              <a:t>Broad story inspiration only. Sources: https://tv.apple.com/nz/episode/thin-red-line/umc.cmc.343dcf9kznkxsuz2rx6jcazs9 ; https://www.tvmaze.com/episodes/8884/the-mentalist-1x07-seeing-red ; https://www.netflix.com/tudum/articles/his-hers-episode-6-recap-ending-explained . Full details and limits: SOURCE_TRAINING_REPORT.md.</a:t>
             </a:r>
           </a:p>
         </p:txBody>
@@ -935,7 +935,7 @@
           <a:lstStyle/>
           <a:p>
             <a:r>
-              <a:t>Repository: https://github.com/Abhishek-Punhani/mercy-house . Live demo: https://mercyhouse.abhi07.xyz . QR codes encode only these HTTPS URLs. The repository is private and the demo requires authentication; no credentials appear in the presentation.</a:t>
+              <a:t>Public repository: https://github.com/Abhishek-Punhani/mercy-house . Public demo: https://mercyhouse.abhi07.xyz . QR codes contain only these URLs. Watching needs no login or key; a new public live run uses a visitor key for the configured provider.</a:t>
             </a:r>
           </a:p>
         </p:txBody>
@@ -4766,7 +4766,7 @@
               </a:defRPr>
             </a:pPr>
             <a:r>
-              <a:t>An evidence-grounded investigation environment for language agents.</a:t>
+              <a:t>A detective game that checks the evidence behind every conclusion.</a:t>
             </a:r>
           </a:p>
         </p:txBody>
@@ -4900,8 +4900,8 @@
         </p:nvSpPr>
         <p:spPr>
           <a:xfrm>
-            <a:off x="630936" y="2377440"/>
-            <a:ext cx="10515600" cy="658368"/>
+            <a:off x="640080" y="2423160"/>
+            <a:ext cx="10607040" cy="640080"/>
           </a:xfrm>
           <a:prstGeom prst="rect">
             <a:avLst/>
@@ -4918,7 +4918,7 @@
               <a:spcAft>
                 <a:spcPts val="800"/>
               </a:spcAft>
-              <a:defRPr sz="2600" b="1">
+              <a:defRPr sz="3200" b="1">
                 <a:solidFill>
                   <a:srgbClr val="66E6CD"/>
                 </a:solidFill>
@@ -4926,7 +4926,7 @@
               </a:defRPr>
             </a:pPr>
             <a:r>
-              <a:t>Private memories. Conflicting accounts. Verifiable conclusions.</a:t>
+              <a:t>Find the truth. Show the proof.</a:t>
             </a:r>
           </a:p>
         </p:txBody>
@@ -5542,7 +5542,7 @@
               </a:defRPr>
             </a:pPr>
             <a:r>
-              <a:t>MERCY HOUSE  /  NEW CPU TRAINING AND HELD-OUT EVALUATION</a:t>
+              <a:t>MERCY HOUSE  /  HOW SCORING WORKS</a:t>
             </a:r>
           </a:p>
         </p:txBody>
@@ -5581,7 +5581,7 @@
               </a:defRPr>
             </a:pPr>
             <a:r>
-              <a:t>Reward supported inference, not activity.</a:t>
+              <a:t>Reward proof, not a confident accusation.</a:t>
             </a:r>
           </a:p>
         </p:txBody>
@@ -5709,53 +5709,14 @@
       </p:sp>
       <p:sp>
         <p:nvSpPr>
-          <p:cNvPr id="12" name="TextBox 11"/>
-          <p:cNvSpPr txBox="1"/>
-          <p:nvPr/>
-        </p:nvSpPr>
-        <p:spPr>
-          <a:xfrm>
-            <a:off x="640080" y="1993392"/>
-            <a:ext cx="10789920" cy="566928"/>
-          </a:xfrm>
-          <a:prstGeom prst="rect">
-            <a:avLst/>
-          </a:prstGeom>
-          <a:noFill/>
-        </p:spPr>
-        <p:txBody>
-          <a:bodyPr wrap="square" lIns="13716" rIns="13716" tIns="0" bIns="0">
-            <a:spAutoFit/>
-          </a:bodyPr>
-          <a:lstStyle/>
-          <a:p>
-            <a:pPr>
-              <a:spcAft>
-                <a:spcPts val="800"/>
-              </a:spcAft>
-              <a:defRPr sz="2000" b="1">
-                <a:solidFill>
-                  <a:srgbClr val="66E6CD"/>
-                </a:solidFill>
-                <a:latin typeface="DejaVu Sans"/>
-              </a:defRPr>
-            </a:pPr>
-            <a:r>
-              <a:t>6000 episodes  /  48 training checkpoints  /  48 disjoint held-out checkpoints  /  CPU only</a:t>
-            </a:r>
-          </a:p>
-        </p:txBody>
-      </p:sp>
-      <p:sp>
-        <p:nvSpPr>
-          <p:cNvPr id="13" name="Rounded Rectangle 12"/>
+          <p:cNvPr id="12" name="Rounded Rectangle 11"/>
           <p:cNvSpPr/>
           <p:nvPr/>
         </p:nvSpPr>
         <p:spPr>
           <a:xfrm>
-            <a:off x="594360" y="2743200"/>
-            <a:ext cx="4800600" cy="2441448"/>
+            <a:off x="594360" y="2560320"/>
+            <a:ext cx="5285232" cy="2615184"/>
           </a:xfrm>
           <a:prstGeom prst="roundRect">
             <a:avLst>
@@ -5795,13 +5756,13 @@
       </p:sp>
       <p:sp>
         <p:nvSpPr>
-          <p:cNvPr id="14" name="Rectangle 13"/>
+          <p:cNvPr id="13" name="Rectangle 12"/>
           <p:cNvSpPr/>
           <p:nvPr/>
         </p:nvSpPr>
         <p:spPr>
           <a:xfrm>
-            <a:off x="758952" y="2926080"/>
+            <a:off x="758952" y="2743200"/>
             <a:ext cx="45720" cy="310896"/>
           </a:xfrm>
           <a:prstGeom prst="rect">
@@ -5838,14 +5799,14 @@
       </p:sp>
       <p:sp>
         <p:nvSpPr>
-          <p:cNvPr id="15" name="TextBox 14"/>
+          <p:cNvPr id="14" name="TextBox 13"/>
           <p:cNvSpPr txBox="1"/>
           <p:nvPr/>
         </p:nvSpPr>
         <p:spPr>
           <a:xfrm>
-            <a:off x="923544" y="2953512"/>
-            <a:ext cx="4297680" cy="411480"/>
+            <a:off x="923544" y="2770632"/>
+            <a:ext cx="4782312" cy="411480"/>
           </a:xfrm>
           <a:prstGeom prst="rect">
             <a:avLst/>
@@ -5870,21 +5831,21 @@
               </a:defRPr>
             </a:pPr>
             <a:r>
-              <a:t>TERMINAL EXERCISE REWARD</a:t>
-            </a:r>
-          </a:p>
-        </p:txBody>
-      </p:sp>
-      <p:sp>
-        <p:nvSpPr>
-          <p:cNvPr id="16" name="TextBox 15"/>
+              <a:t>DURING PRACTICE</a:t>
+            </a:r>
+          </a:p>
+        </p:txBody>
+      </p:sp>
+      <p:sp>
+        <p:nvSpPr>
+          <p:cNvPr id="15" name="TextBox 14"/>
           <p:cNvSpPr txBox="1"/>
           <p:nvPr/>
         </p:nvSpPr>
         <p:spPr>
           <a:xfrm>
-            <a:off x="804672" y="3584448"/>
-            <a:ext cx="4379976" cy="1481328"/>
+            <a:off x="804672" y="3401568"/>
+            <a:ext cx="4864608" cy="1655063"/>
           </a:xfrm>
           <a:prstGeom prst="rect">
             <a:avLst/>
@@ -5901,7 +5862,7 @@
               <a:spcAft>
                 <a:spcPts val="800"/>
               </a:spcAft>
-              <a:defRPr sz="1700" b="0">
+              <a:defRPr sz="1900" b="0">
                 <a:solidFill>
                   <a:srgbClr val="EDF4FF"/>
                 </a:solidFill>
@@ -5909,7 +5870,7 @@
               </a:defRPr>
             </a:pPr>
             <a:r>
-              <a:t>1: the scoped material finding has acquired proof and no false or unsupported conclusions.</a:t>
+              <a:t>1 point: the requested conclusion has valid acquired evidence, with no false or unsupported claims.</a:t>
             </a:r>
           </a:p>
           <a:p>
@@ -5917,7 +5878,7 @@
               <a:spcAft>
                 <a:spcPts val="800"/>
               </a:spcAft>
-              <a:defRPr sz="1700" b="0">
+              <a:defRPr sz="1900" b="0">
                 <a:solidFill>
                   <a:srgbClr val="EDF4FF"/>
                 </a:solidFill>
@@ -5925,69 +5886,34 @@
               </a:defRPr>
             </a:pPr>
             <a:r>
-              <a:t>0: incomplete, guessed, wrong or unsupported.</a:t>
-            </a:r>
-          </a:p>
-        </p:txBody>
-      </p:sp>
-      <p:sp>
-        <p:nvSpPr>
-          <p:cNvPr id="17" name="TextBox 16"/>
-          <p:cNvSpPr txBox="1"/>
-          <p:nvPr/>
-        </p:nvSpPr>
-        <p:spPr>
-          <a:xfrm>
-            <a:off x="5806440" y="2788920"/>
-            <a:ext cx="4297680" cy="274320"/>
-          </a:xfrm>
-          <a:prstGeom prst="rect">
-            <a:avLst/>
-          </a:prstGeom>
-          <a:noFill/>
-        </p:spPr>
-        <p:txBody>
-          <a:bodyPr wrap="square" lIns="13716" rIns="13716" tIns="0" bIns="0">
-            <a:spAutoFit/>
-          </a:bodyPr>
-          <a:lstStyle/>
-          <a:p>
-            <a:pPr>
-              <a:spcAft>
-                <a:spcPts val="800"/>
-              </a:spcAft>
-              <a:defRPr sz="1600" b="0">
-                <a:solidFill>
-                  <a:srgbClr val="A4B6CD"/>
-                </a:solidFill>
-                <a:latin typeface="DejaVu Sans"/>
-              </a:defRPr>
-            </a:pPr>
-            <a:r>
-              <a:t>Untrained</a:t>
-            </a:r>
-          </a:p>
-        </p:txBody>
-      </p:sp>
-      <p:sp>
-        <p:nvSpPr>
-          <p:cNvPr id="18" name="Rectangle 17"/>
+              <a:t>0 points: otherwise.</a:t>
+            </a:r>
+          </a:p>
+        </p:txBody>
+      </p:sp>
+      <p:sp>
+        <p:nvSpPr>
+          <p:cNvPr id="16" name="Rounded Rectangle 15"/>
           <p:cNvSpPr/>
           <p:nvPr/>
         </p:nvSpPr>
         <p:spPr>
           <a:xfrm>
-            <a:off x="5806440" y="3172968"/>
-            <a:ext cx="4389120" cy="164592"/>
-          </a:xfrm>
-          <a:prstGeom prst="rect">
-            <a:avLst/>
+            <a:off x="6181344" y="2560320"/>
+            <a:ext cx="5285232" cy="2615184"/>
+          </a:xfrm>
+          <a:prstGeom prst="roundRect">
+            <a:avLst>
+              <a:gd name="adj" fmla="val 8000"/>
+            </a:avLst>
           </a:prstGeom>
           <a:solidFill>
-            <a:srgbClr val="24354B"/>
+            <a:srgbClr val="111D30"/>
           </a:solidFill>
           <a:ln>
-            <a:noFill/>
+            <a:solidFill>
+              <a:srgbClr val="24354B"/>
+            </a:solidFill>
           </a:ln>
         </p:spPr>
         <p:style>
@@ -6014,14 +5940,14 @@
       </p:sp>
       <p:sp>
         <p:nvSpPr>
-          <p:cNvPr id="19" name="Rectangle 18"/>
+          <p:cNvPr id="17" name="Rectangle 16"/>
           <p:cNvSpPr/>
           <p:nvPr/>
         </p:nvSpPr>
         <p:spPr>
           <a:xfrm>
-            <a:off x="5806440" y="3172968"/>
-            <a:ext cx="137160" cy="164592"/>
+            <a:off x="6345936" y="2743200"/>
+            <a:ext cx="45720" cy="310896"/>
           </a:xfrm>
           <a:prstGeom prst="rect">
             <a:avLst/>
@@ -6057,14 +5983,14 @@
       </p:sp>
       <p:sp>
         <p:nvSpPr>
-          <p:cNvPr id="20" name="TextBox 19"/>
+          <p:cNvPr id="18" name="TextBox 17"/>
           <p:cNvSpPr txBox="1"/>
           <p:nvPr/>
         </p:nvSpPr>
         <p:spPr>
           <a:xfrm>
-            <a:off x="10378440" y="2999232"/>
-            <a:ext cx="1097280" cy="347472"/>
+            <a:off x="6510528" y="2770632"/>
+            <a:ext cx="4782312" cy="411480"/>
           </a:xfrm>
           <a:prstGeom prst="rect">
             <a:avLst/>
@@ -6081,29 +6007,29 @@
               <a:spcAft>
                 <a:spcPts val="800"/>
               </a:spcAft>
-              <a:defRPr sz="1700" b="1">
-                <a:solidFill>
-                  <a:srgbClr val="EDF4FF"/>
+              <a:defRPr sz="1600" b="1">
+                <a:solidFill>
+                  <a:srgbClr val="FFC177"/>
                 </a:solidFill>
                 <a:latin typeface="DejaVu Sans"/>
               </a:defRPr>
             </a:pPr>
             <a:r>
-              <a:t>3.1%</a:t>
-            </a:r>
-          </a:p>
-        </p:txBody>
-      </p:sp>
-      <p:sp>
-        <p:nvSpPr>
-          <p:cNvPr id="21" name="TextBox 20"/>
+              <a:t>DURING A FULL CASE</a:t>
+            </a:r>
+          </a:p>
+        </p:txBody>
+      </p:sp>
+      <p:sp>
+        <p:nvSpPr>
+          <p:cNvPr id="19" name="TextBox 18"/>
           <p:cNvSpPr txBox="1"/>
           <p:nvPr/>
         </p:nvSpPr>
         <p:spPr>
           <a:xfrm>
-            <a:off x="5806440" y="3703320"/>
-            <a:ext cx="4297680" cy="274320"/>
+            <a:off x="6391656" y="3401568"/>
+            <a:ext cx="4864608" cy="1655063"/>
           </a:xfrm>
           <a:prstGeom prst="rect">
             <a:avLst/>
@@ -6120,132 +6046,23 @@
               <a:spcAft>
                 <a:spcPts val="800"/>
               </a:spcAft>
-              <a:defRPr sz="1600" b="0">
-                <a:solidFill>
-                  <a:srgbClr val="A4B6CD"/>
+              <a:defRPr sz="1800" b="0">
+                <a:solidFill>
+                  <a:srgbClr val="EDF4FF"/>
                 </a:solidFill>
                 <a:latin typeface="DejaVu Sans"/>
               </a:defRPr>
             </a:pPr>
             <a:r>
-              <a:t>Trained sampling</a:t>
-            </a:r>
-          </a:p>
-        </p:txBody>
-      </p:sp>
-      <p:sp>
-        <p:nvSpPr>
-          <p:cNvPr id="22" name="Rectangle 21"/>
-          <p:cNvSpPr/>
-          <p:nvPr/>
-        </p:nvSpPr>
-        <p:spPr>
-          <a:xfrm>
-            <a:off x="5806440" y="4087368"/>
-            <a:ext cx="4389120" cy="164592"/>
-          </a:xfrm>
-          <a:prstGeom prst="rect">
-            <a:avLst/>
-          </a:prstGeom>
-          <a:solidFill>
-            <a:srgbClr val="24354B"/>
-          </a:solidFill>
-          <a:ln>
-            <a:noFill/>
-          </a:ln>
-        </p:spPr>
-        <p:style>
-          <a:lnRef idx="1">
-            <a:schemeClr val="accent1"/>
-          </a:lnRef>
-          <a:fillRef idx="3">
-            <a:schemeClr val="accent1"/>
-          </a:fillRef>
-          <a:effectRef idx="2">
-            <a:schemeClr val="accent1"/>
-          </a:effectRef>
-          <a:fontRef idx="minor">
-            <a:schemeClr val="lt1"/>
-          </a:fontRef>
-        </p:style>
-        <p:txBody>
-          <a:bodyPr rtlCol="0" anchor="ctr"/>
-          <a:lstStyle/>
-          <a:p>
-            <a:pPr algn="ctr"/>
-          </a:p>
-        </p:txBody>
-      </p:sp>
-      <p:sp>
-        <p:nvSpPr>
-          <p:cNvPr id="23" name="Rectangle 22"/>
-          <p:cNvSpPr/>
-          <p:nvPr/>
-        </p:nvSpPr>
-        <p:spPr>
-          <a:xfrm>
-            <a:off x="5806440" y="4087368"/>
-            <a:ext cx="4069080" cy="164592"/>
-          </a:xfrm>
-          <a:prstGeom prst="rect">
-            <a:avLst/>
-          </a:prstGeom>
-          <a:solidFill>
-            <a:srgbClr val="66E6CD"/>
-          </a:solidFill>
-          <a:ln>
-            <a:noFill/>
-          </a:ln>
-        </p:spPr>
-        <p:style>
-          <a:lnRef idx="1">
-            <a:schemeClr val="accent1"/>
-          </a:lnRef>
-          <a:fillRef idx="3">
-            <a:schemeClr val="accent1"/>
-          </a:fillRef>
-          <a:effectRef idx="2">
-            <a:schemeClr val="accent1"/>
-          </a:effectRef>
-          <a:fontRef idx="minor">
-            <a:schemeClr val="lt1"/>
-          </a:fontRef>
-        </p:style>
-        <p:txBody>
-          <a:bodyPr rtlCol="0" anchor="ctr"/>
-          <a:lstStyle/>
-          <a:p>
-            <a:pPr algn="ctr"/>
-          </a:p>
-        </p:txBody>
-      </p:sp>
-      <p:sp>
-        <p:nvSpPr>
-          <p:cNvPr id="24" name="TextBox 23"/>
-          <p:cNvSpPr txBox="1"/>
-          <p:nvPr/>
-        </p:nvSpPr>
-        <p:spPr>
-          <a:xfrm>
-            <a:off x="10378440" y="3913632"/>
-            <a:ext cx="1097280" cy="347472"/>
-          </a:xfrm>
-          <a:prstGeom prst="rect">
-            <a:avLst/>
-          </a:prstGeom>
-          <a:noFill/>
-        </p:spPr>
-        <p:txBody>
-          <a:bodyPr wrap="square" lIns="13716" rIns="13716" tIns="0" bIns="0">
-            <a:spAutoFit/>
-          </a:bodyPr>
-          <a:lstStyle/>
+              <a:t>Credit for supported required findings.</a:t>
+            </a:r>
+          </a:p>
           <a:p>
             <a:pPr>
               <a:spcAft>
                 <a:spcPts val="800"/>
               </a:spcAft>
-              <a:defRPr sz="1700" b="1">
+              <a:defRPr sz="1800" b="0">
                 <a:solidFill>
                   <a:srgbClr val="EDF4FF"/>
                 </a:solidFill>
@@ -6253,163 +6070,31 @@
               </a:defRPr>
             </a:pPr>
             <a:r>
-              <a:t>92.7%</a:t>
-            </a:r>
-          </a:p>
-        </p:txBody>
-      </p:sp>
-      <p:sp>
-        <p:nvSpPr>
-          <p:cNvPr id="25" name="TextBox 24"/>
-          <p:cNvSpPr txBox="1"/>
-          <p:nvPr/>
-        </p:nvSpPr>
-        <p:spPr>
-          <a:xfrm>
-            <a:off x="5806440" y="4617720"/>
-            <a:ext cx="4297680" cy="274320"/>
-          </a:xfrm>
-          <a:prstGeom prst="rect">
-            <a:avLst/>
-          </a:prstGeom>
-          <a:noFill/>
-        </p:spPr>
-        <p:txBody>
-          <a:bodyPr wrap="square" lIns="13716" rIns="13716" tIns="0" bIns="0">
-            <a:spAutoFit/>
-          </a:bodyPr>
-          <a:lstStyle/>
+              <a:t>−0.20 per distinct false finding.</a:t>
+            </a:r>
+          </a:p>
           <a:p>
             <a:pPr>
               <a:spcAft>
                 <a:spcPts val="800"/>
               </a:spcAft>
-              <a:defRPr sz="1600" b="0">
-                <a:solidFill>
-                  <a:srgbClr val="A4B6CD"/>
+              <a:defRPr sz="1800" b="0">
+                <a:solidFill>
+                  <a:srgbClr val="EDF4FF"/>
                 </a:solidFill>
                 <a:latin typeface="DejaVu Sans"/>
               </a:defRPr>
             </a:pPr>
             <a:r>
-              <a:t>Trained greedy</a:t>
-            </a:r>
-          </a:p>
-        </p:txBody>
-      </p:sp>
-      <p:sp>
-        <p:nvSpPr>
-          <p:cNvPr id="26" name="Rectangle 25"/>
-          <p:cNvSpPr/>
-          <p:nvPr/>
-        </p:nvSpPr>
-        <p:spPr>
-          <a:xfrm>
-            <a:off x="5806440" y="5001768"/>
-            <a:ext cx="4389120" cy="164592"/>
-          </a:xfrm>
-          <a:prstGeom prst="rect">
-            <a:avLst/>
-          </a:prstGeom>
-          <a:solidFill>
-            <a:srgbClr val="24354B"/>
-          </a:solidFill>
-          <a:ln>
-            <a:noFill/>
-          </a:ln>
-        </p:spPr>
-        <p:style>
-          <a:lnRef idx="1">
-            <a:schemeClr val="accent1"/>
-          </a:lnRef>
-          <a:fillRef idx="3">
-            <a:schemeClr val="accent1"/>
-          </a:fillRef>
-          <a:effectRef idx="2">
-            <a:schemeClr val="accent1"/>
-          </a:effectRef>
-          <a:fontRef idx="minor">
-            <a:schemeClr val="lt1"/>
-          </a:fontRef>
-        </p:style>
-        <p:txBody>
-          <a:bodyPr rtlCol="0" anchor="ctr"/>
-          <a:lstStyle/>
-          <a:p>
-            <a:pPr algn="ctr"/>
-          </a:p>
-        </p:txBody>
-      </p:sp>
-      <p:sp>
-        <p:nvSpPr>
-          <p:cNvPr id="27" name="Rectangle 26"/>
-          <p:cNvSpPr/>
-          <p:nvPr/>
-        </p:nvSpPr>
-        <p:spPr>
-          <a:xfrm>
-            <a:off x="5806440" y="5001768"/>
-            <a:ext cx="4389120" cy="164592"/>
-          </a:xfrm>
-          <a:prstGeom prst="rect">
-            <a:avLst/>
-          </a:prstGeom>
-          <a:solidFill>
-            <a:srgbClr val="66E6CD"/>
-          </a:solidFill>
-          <a:ln>
-            <a:noFill/>
-          </a:ln>
-        </p:spPr>
-        <p:style>
-          <a:lnRef idx="1">
-            <a:schemeClr val="accent1"/>
-          </a:lnRef>
-          <a:fillRef idx="3">
-            <a:schemeClr val="accent1"/>
-          </a:fillRef>
-          <a:effectRef idx="2">
-            <a:schemeClr val="accent1"/>
-          </a:effectRef>
-          <a:fontRef idx="minor">
-            <a:schemeClr val="lt1"/>
-          </a:fontRef>
-        </p:style>
-        <p:txBody>
-          <a:bodyPr rtlCol="0" anchor="ctr"/>
-          <a:lstStyle/>
-          <a:p>
-            <a:pPr algn="ctr"/>
-          </a:p>
-        </p:txBody>
-      </p:sp>
-      <p:sp>
-        <p:nvSpPr>
-          <p:cNvPr id="28" name="TextBox 27"/>
-          <p:cNvSpPr txBox="1"/>
-          <p:nvPr/>
-        </p:nvSpPr>
-        <p:spPr>
-          <a:xfrm>
-            <a:off x="10378440" y="4828032"/>
-            <a:ext cx="1097280" cy="347472"/>
-          </a:xfrm>
-          <a:prstGeom prst="rect">
-            <a:avLst/>
-          </a:prstGeom>
-          <a:noFill/>
-        </p:spPr>
-        <p:txBody>
-          <a:bodyPr wrap="square" lIns="13716" rIns="13716" tIns="0" bIns="0">
-            <a:spAutoFit/>
-          </a:bodyPr>
-          <a:lstStyle/>
+              <a:t>−0.10 per distinct unsupported finding.</a:t>
+            </a:r>
+          </a:p>
           <a:p>
             <a:pPr>
               <a:spcAft>
                 <a:spcPts val="800"/>
               </a:spcAft>
-              <a:defRPr sz="1700" b="1">
+              <a:defRPr sz="1800" b="0">
                 <a:solidFill>
                   <a:srgbClr val="EDF4FF"/>
                 </a:solidFill>
@@ -6417,14 +6102,14 @@
               </a:defRPr>
             </a:pPr>
             <a:r>
-              <a:t>100.0%</a:t>
-            </a:r>
-          </a:p>
-        </p:txBody>
-      </p:sp>
-      <p:sp>
-        <p:nvSpPr>
-          <p:cNvPr id="29" name="TextBox 28"/>
+              <a:t>Final score stays between 0 and 1.</a:t>
+            </a:r>
+          </a:p>
+        </p:txBody>
+      </p:sp>
+      <p:sp>
+        <p:nvSpPr>
+          <p:cNvPr id="20" name="TextBox 19"/>
           <p:cNvSpPr txBox="1"/>
           <p:nvPr/>
         </p:nvSpPr>
@@ -6456,7 +6141,7 @@
               </a:defRPr>
             </a:pPr>
             <a:r>
-              <a:t>96 trials per policy (48 checkpoints repeated twice). Prepared acquisitions + authored candidate rules. Same templates; not full-case success.</a:t>
+              <a:t>A correct guess without evidence earns no credit. A Python verifier assigns the score; a language model does not grade the investigation.</a:t>
             </a:r>
           </a:p>
         </p:txBody>
@@ -6736,7 +6421,7 @@
               </a:defRPr>
             </a:pPr>
             <a:r>
-              <a:t>MERCY HOUSE  /  FROZEN CHECKPOINT • MATCHED PROPOSAL CONTRACT</a:t>
+              <a:t>MERCY HOUSE  /  THE MEASURED RESULTS</a:t>
             </a:r>
           </a:p>
         </p:txBody>
@@ -6775,53 +6460,14 @@
               </a:defRPr>
             </a:pPr>
             <a:r>
-              <a:t>Test transfer on excluded elite cases.</a:t>
-            </a:r>
-          </a:p>
-        </p:txBody>
-      </p:sp>
-      <p:sp>
-        <p:nvSpPr>
-          <p:cNvPr id="9" name="TextBox 8"/>
-          <p:cNvSpPr txBox="1"/>
-          <p:nvPr/>
-        </p:nvSpPr>
-        <p:spPr>
-          <a:xfrm>
-            <a:off x="566928" y="1691640"/>
-            <a:ext cx="10972800" cy="594360"/>
-          </a:xfrm>
-          <a:prstGeom prst="rect">
-            <a:avLst/>
-          </a:prstGeom>
-          <a:noFill/>
-        </p:spPr>
-        <p:txBody>
-          <a:bodyPr wrap="square" lIns="13716" rIns="13716" tIns="0" bIns="0">
-            <a:spAutoFit/>
-          </a:bodyPr>
-          <a:lstStyle/>
-          <a:p>
-            <a:pPr>
-              <a:spcAft>
-                <a:spcPts val="800"/>
-              </a:spcAft>
-              <a:defRPr sz="1500" b="0">
-                <a:solidFill>
-                  <a:srgbClr val="A4B6CD"/>
-                </a:solidFill>
-                <a:latin typeface="DejaVu Sans"/>
-              </a:defRPr>
-            </a:pPr>
-            <a:r>
-              <a:t>Two predeclared task scopes of the excluded Mercy House incident. LLM-ranked baseline versus frozen source-trained selector; 40 choices per arm.</a:t>
-            </a:r>
-          </a:p>
-        </p:txBody>
-      </p:sp>
-      <p:sp>
-        <p:nvSpPr>
-          <p:cNvPr id="10" name="Rectangle 9"/>
+              <a:t>Practice improved. Full cases remain difficult.</a:t>
+            </a:r>
+          </a:p>
+        </p:txBody>
+      </p:sp>
+      <p:sp>
+        <p:nvSpPr>
+          <p:cNvPr id="9" name="Rectangle 8"/>
           <p:cNvSpPr/>
           <p:nvPr/>
         </p:nvSpPr>
@@ -6864,7 +6510,7 @@
       </p:sp>
       <p:sp>
         <p:nvSpPr>
-          <p:cNvPr id="11" name="TextBox 10"/>
+          <p:cNvPr id="10" name="TextBox 9"/>
           <p:cNvSpPr txBox="1"/>
           <p:nvPr/>
         </p:nvSpPr>
@@ -6903,7 +6549,7 @@
       </p:sp>
       <p:sp>
         <p:nvSpPr>
-          <p:cNvPr id="12" name="TextBox 11"/>
+          <p:cNvPr id="11" name="TextBox 10"/>
           <p:cNvSpPr txBox="1"/>
           <p:nvPr/>
         </p:nvSpPr>
@@ -6942,27 +6588,101 @@
       </p:sp>
       <p:sp>
         <p:nvSpPr>
-          <p:cNvPr id="13" name="Rounded Rectangle 12"/>
+          <p:cNvPr id="12" name="TextBox 11"/>
+          <p:cNvSpPr txBox="1"/>
+          <p:nvPr/>
+        </p:nvSpPr>
+        <p:spPr>
+          <a:xfrm>
+            <a:off x="667512" y="1920240"/>
+            <a:ext cx="10881360" cy="640080"/>
+          </a:xfrm>
+          <a:prstGeom prst="rect">
+            <a:avLst/>
+          </a:prstGeom>
+          <a:noFill/>
+        </p:spPr>
+        <p:txBody>
+          <a:bodyPr wrap="square" lIns="13716" rIns="13716" tIns="0" bIns="0">
+            <a:spAutoFit/>
+          </a:bodyPr>
+          <a:lstStyle/>
+          <a:p>
+            <a:pPr>
+              <a:spcAft>
+                <a:spcPts val="800"/>
+              </a:spcAft>
+              <a:defRPr sz="2000" b="1">
+                <a:solidFill>
+                  <a:srgbClr val="66E6CD"/>
+                </a:solidFill>
+                <a:latin typeface="DejaVu Sans"/>
+              </a:defRPr>
+            </a:pPr>
+            <a:r>
+              <a:t>6,000 practice runs · 132 learned weights · 48 seconds on a CPU · no training API calls</a:t>
+            </a:r>
+          </a:p>
+        </p:txBody>
+      </p:sp>
+      <p:sp>
+        <p:nvSpPr>
+          <p:cNvPr id="13" name="TextBox 12"/>
+          <p:cNvSpPr txBox="1"/>
+          <p:nvPr/>
+        </p:nvSpPr>
+        <p:spPr>
+          <a:xfrm>
+            <a:off x="749808" y="2880360"/>
+            <a:ext cx="5486400" cy="365760"/>
+          </a:xfrm>
+          <a:prstGeom prst="rect">
+            <a:avLst/>
+          </a:prstGeom>
+          <a:noFill/>
+        </p:spPr>
+        <p:txBody>
+          <a:bodyPr wrap="square" lIns="13716" rIns="13716" tIns="0" bIns="0">
+            <a:spAutoFit/>
+          </a:bodyPr>
+          <a:lstStyle/>
+          <a:p>
+            <a:pPr>
+              <a:spcAft>
+                <a:spcPts val="800"/>
+              </a:spcAft>
+              <a:defRPr sz="1900" b="0">
+                <a:solidFill>
+                  <a:srgbClr val="EDF4FF"/>
+                </a:solidFill>
+                <a:latin typeface="DejaVu Sans"/>
+              </a:defRPr>
+            </a:pPr>
+            <a:r>
+              <a:t>Before training</a:t>
+            </a:r>
+          </a:p>
+        </p:txBody>
+      </p:sp>
+      <p:sp>
+        <p:nvSpPr>
+          <p:cNvPr id="14" name="Rectangle 13"/>
           <p:cNvSpPr/>
           <p:nvPr/>
         </p:nvSpPr>
         <p:spPr>
           <a:xfrm>
-            <a:off x="594360" y="2560320"/>
-            <a:ext cx="11000232" cy="1097280"/>
-          </a:xfrm>
-          <a:prstGeom prst="roundRect">
-            <a:avLst>
-              <a:gd name="adj" fmla="val 8000"/>
-            </a:avLst>
+            <a:off x="5897880" y="2990088"/>
+            <a:ext cx="4343400" cy="201168"/>
+          </a:xfrm>
+          <a:prstGeom prst="rect">
+            <a:avLst/>
           </a:prstGeom>
           <a:solidFill>
-            <a:srgbClr val="111D30"/>
+            <a:srgbClr val="24354B"/>
           </a:solidFill>
           <a:ln>
-            <a:solidFill>
-              <a:srgbClr val="24354B"/>
-            </a:solidFill>
+            <a:noFill/>
           </a:ln>
         </p:spPr>
         <p:style>
@@ -6989,222 +6709,23 @@
       </p:sp>
       <p:sp>
         <p:nvSpPr>
-          <p:cNvPr id="14" name="TextBox 13"/>
-          <p:cNvSpPr txBox="1"/>
-          <p:nvPr/>
-        </p:nvSpPr>
-        <p:spPr>
-          <a:xfrm>
-            <a:off x="822960" y="2743200"/>
-            <a:ext cx="4114800" cy="365760"/>
-          </a:xfrm>
-          <a:prstGeom prst="rect">
-            <a:avLst/>
-          </a:prstGeom>
-          <a:noFill/>
-        </p:spPr>
-        <p:txBody>
-          <a:bodyPr wrap="square" lIns="13716" rIns="13716" tIns="0" bIns="0">
-            <a:spAutoFit/>
-          </a:bodyPr>
-          <a:lstStyle/>
-          <a:p>
-            <a:pPr>
-              <a:spcAft>
-                <a:spcPts val="800"/>
-              </a:spcAft>
-              <a:defRPr sz="2100" b="1">
-                <a:solidFill>
-                  <a:srgbClr val="EDF4FF"/>
-                </a:solidFill>
-                <a:latin typeface="DejaVu Sans"/>
-              </a:defRPr>
-            </a:pPr>
-            <a:r>
-              <a:t>Fatal assault</a:t>
-            </a:r>
-          </a:p>
-        </p:txBody>
-      </p:sp>
-      <p:sp>
-        <p:nvSpPr>
-          <p:cNvPr id="15" name="TextBox 14"/>
-          <p:cNvSpPr txBox="1"/>
-          <p:nvPr/>
-        </p:nvSpPr>
-        <p:spPr>
-          <a:xfrm>
-            <a:off x="5394960" y="2688336"/>
-            <a:ext cx="2788920" cy="246888"/>
-          </a:xfrm>
-          <a:prstGeom prst="rect">
-            <a:avLst/>
-          </a:prstGeom>
-          <a:noFill/>
-        </p:spPr>
-        <p:txBody>
-          <a:bodyPr wrap="square" lIns="13716" rIns="13716" tIns="0" bIns="0">
-            <a:spAutoFit/>
-          </a:bodyPr>
-          <a:lstStyle/>
-          <a:p>
-            <a:pPr>
-              <a:spcAft>
-                <a:spcPts val="800"/>
-              </a:spcAft>
-              <a:defRPr sz="1000" b="1">
-                <a:solidFill>
-                  <a:srgbClr val="A4B6CD"/>
-                </a:solidFill>
-                <a:latin typeface="DejaVu Sans"/>
-              </a:defRPr>
-            </a:pPr>
-            <a:r>
-              <a:t>LLM-RANKED</a:t>
-            </a:r>
-          </a:p>
-        </p:txBody>
-      </p:sp>
-      <p:sp>
-        <p:nvSpPr>
-          <p:cNvPr id="16" name="TextBox 15"/>
-          <p:cNvSpPr txBox="1"/>
-          <p:nvPr/>
-        </p:nvSpPr>
-        <p:spPr>
-          <a:xfrm>
-            <a:off x="5394960" y="3026663"/>
-            <a:ext cx="2788920" cy="438912"/>
-          </a:xfrm>
-          <a:prstGeom prst="rect">
-            <a:avLst/>
-          </a:prstGeom>
-          <a:noFill/>
-        </p:spPr>
-        <p:txBody>
-          <a:bodyPr wrap="square" lIns="13716" rIns="13716" tIns="0" bIns="0">
-            <a:spAutoFit/>
-          </a:bodyPr>
-          <a:lstStyle/>
-          <a:p>
-            <a:pPr>
-              <a:spcAft>
-                <a:spcPts val="800"/>
-              </a:spcAft>
-              <a:defRPr sz="2700" b="1">
-                <a:solidFill>
-                  <a:srgbClr val="FFC177"/>
-                </a:solidFill>
-                <a:latin typeface="DejaVu Sans"/>
-              </a:defRPr>
-            </a:pPr>
-            <a:r>
-              <a:t>0.0</a:t>
-            </a:r>
-          </a:p>
-        </p:txBody>
-      </p:sp>
-      <p:sp>
-        <p:nvSpPr>
-          <p:cNvPr id="17" name="TextBox 16"/>
-          <p:cNvSpPr txBox="1"/>
-          <p:nvPr/>
-        </p:nvSpPr>
-        <p:spPr>
-          <a:xfrm>
-            <a:off x="8366760" y="2688336"/>
-            <a:ext cx="2788920" cy="246888"/>
-          </a:xfrm>
-          <a:prstGeom prst="rect">
-            <a:avLst/>
-          </a:prstGeom>
-          <a:noFill/>
-        </p:spPr>
-        <p:txBody>
-          <a:bodyPr wrap="square" lIns="13716" rIns="13716" tIns="0" bIns="0">
-            <a:spAutoFit/>
-          </a:bodyPr>
-          <a:lstStyle/>
-          <a:p>
-            <a:pPr>
-              <a:spcAft>
-                <a:spcPts val="800"/>
-              </a:spcAft>
-              <a:defRPr sz="1000" b="1">
-                <a:solidFill>
-                  <a:srgbClr val="A4B6CD"/>
-                </a:solidFill>
-                <a:latin typeface="DejaVu Sans"/>
-              </a:defRPr>
-            </a:pPr>
-            <a:r>
-              <a:t>SOURCE-TRAINED SELECTOR</a:t>
-            </a:r>
-          </a:p>
-        </p:txBody>
-      </p:sp>
-      <p:sp>
-        <p:nvSpPr>
-          <p:cNvPr id="18" name="TextBox 17"/>
-          <p:cNvSpPr txBox="1"/>
-          <p:nvPr/>
-        </p:nvSpPr>
-        <p:spPr>
-          <a:xfrm>
-            <a:off x="8366760" y="3026663"/>
-            <a:ext cx="2788920" cy="438912"/>
-          </a:xfrm>
-          <a:prstGeom prst="rect">
-            <a:avLst/>
-          </a:prstGeom>
-          <a:noFill/>
-        </p:spPr>
-        <p:txBody>
-          <a:bodyPr wrap="square" lIns="13716" rIns="13716" tIns="0" bIns="0">
-            <a:spAutoFit/>
-          </a:bodyPr>
-          <a:lstStyle/>
-          <a:p>
-            <a:pPr>
-              <a:spcAft>
-                <a:spcPts val="800"/>
-              </a:spcAft>
-              <a:defRPr sz="2700" b="1">
-                <a:solidFill>
-                  <a:srgbClr val="FFC177"/>
-                </a:solidFill>
-                <a:latin typeface="DejaVu Sans"/>
-              </a:defRPr>
-            </a:pPr>
-            <a:r>
-              <a:t>0.0</a:t>
-            </a:r>
-          </a:p>
-        </p:txBody>
-      </p:sp>
-      <p:sp>
-        <p:nvSpPr>
-          <p:cNvPr id="19" name="Rounded Rectangle 18"/>
+          <p:cNvPr id="15" name="Rectangle 14"/>
           <p:cNvSpPr/>
           <p:nvPr/>
         </p:nvSpPr>
         <p:spPr>
           <a:xfrm>
-            <a:off x="594360" y="3913631"/>
-            <a:ext cx="11000232" cy="1097280"/>
-          </a:xfrm>
-          <a:prstGeom prst="roundRect">
-            <a:avLst>
-              <a:gd name="adj" fmla="val 8000"/>
-            </a:avLst>
+            <a:off x="5897880" y="2990088"/>
+            <a:ext cx="135731" cy="201168"/>
+          </a:xfrm>
+          <a:prstGeom prst="rect">
+            <a:avLst/>
           </a:prstGeom>
           <a:solidFill>
-            <a:srgbClr val="111D30"/>
+            <a:srgbClr val="FFC177"/>
           </a:solidFill>
           <a:ln>
-            <a:solidFill>
-              <a:srgbClr val="24354B"/>
-            </a:solidFill>
+            <a:noFill/>
           </a:ln>
         </p:spPr>
         <p:style>
@@ -7231,14 +6752,14 @@
       </p:sp>
       <p:sp>
         <p:nvSpPr>
-          <p:cNvPr id="20" name="TextBox 19"/>
+          <p:cNvPr id="16" name="TextBox 15"/>
           <p:cNvSpPr txBox="1"/>
           <p:nvPr/>
         </p:nvSpPr>
         <p:spPr>
           <a:xfrm>
-            <a:off x="822960" y="4096511"/>
-            <a:ext cx="4114800" cy="365760"/>
+            <a:off x="10469880" y="2880360"/>
+            <a:ext cx="1005840" cy="365760"/>
           </a:xfrm>
           <a:prstGeom prst="rect">
             <a:avLst/>
@@ -7255,29 +6776,29 @@
               <a:spcAft>
                 <a:spcPts val="800"/>
               </a:spcAft>
-              <a:defRPr sz="2100" b="1">
-                <a:solidFill>
-                  <a:srgbClr val="EDF4FF"/>
+              <a:defRPr sz="2200" b="1">
+                <a:solidFill>
+                  <a:srgbClr val="66E6CD"/>
                 </a:solidFill>
                 <a:latin typeface="DejaVu Sans"/>
               </a:defRPr>
             </a:pPr>
             <a:r>
-              <a:t>Seven-act full inquest</a:t>
-            </a:r>
-          </a:p>
-        </p:txBody>
-      </p:sp>
-      <p:sp>
-        <p:nvSpPr>
-          <p:cNvPr id="21" name="TextBox 20"/>
+              <a:t>3/96</a:t>
+            </a:r>
+          </a:p>
+        </p:txBody>
+      </p:sp>
+      <p:sp>
+        <p:nvSpPr>
+          <p:cNvPr id="17" name="TextBox 16"/>
           <p:cNvSpPr txBox="1"/>
           <p:nvPr/>
         </p:nvSpPr>
         <p:spPr>
           <a:xfrm>
-            <a:off x="5394960" y="4041647"/>
-            <a:ext cx="2788920" cy="246888"/>
+            <a:off x="749808" y="3703320"/>
+            <a:ext cx="5486400" cy="365760"/>
           </a:xfrm>
           <a:prstGeom prst="rect">
             <a:avLst/>
@@ -7294,29 +6815,115 @@
               <a:spcAft>
                 <a:spcPts val="800"/>
               </a:spcAft>
-              <a:defRPr sz="1000" b="1">
-                <a:solidFill>
-                  <a:srgbClr val="A4B6CD"/>
+              <a:defRPr sz="1900" b="0">
+                <a:solidFill>
+                  <a:srgbClr val="EDF4FF"/>
                 </a:solidFill>
                 <a:latin typeface="DejaVu Sans"/>
               </a:defRPr>
             </a:pPr>
             <a:r>
-              <a:t>LLM-RANKED</a:t>
-            </a:r>
-          </a:p>
-        </p:txBody>
-      </p:sp>
-      <p:sp>
-        <p:nvSpPr>
-          <p:cNvPr id="22" name="TextBox 21"/>
+              <a:t>After training: sampled choices</a:t>
+            </a:r>
+          </a:p>
+        </p:txBody>
+      </p:sp>
+      <p:sp>
+        <p:nvSpPr>
+          <p:cNvPr id="18" name="Rectangle 17"/>
+          <p:cNvSpPr/>
+          <p:nvPr/>
+        </p:nvSpPr>
+        <p:spPr>
+          <a:xfrm>
+            <a:off x="5897880" y="3813048"/>
+            <a:ext cx="4343400" cy="201168"/>
+          </a:xfrm>
+          <a:prstGeom prst="rect">
+            <a:avLst/>
+          </a:prstGeom>
+          <a:solidFill>
+            <a:srgbClr val="24354B"/>
+          </a:solidFill>
+          <a:ln>
+            <a:noFill/>
+          </a:ln>
+        </p:spPr>
+        <p:style>
+          <a:lnRef idx="1">
+            <a:schemeClr val="accent1"/>
+          </a:lnRef>
+          <a:fillRef idx="3">
+            <a:schemeClr val="accent1"/>
+          </a:fillRef>
+          <a:effectRef idx="2">
+            <a:schemeClr val="accent1"/>
+          </a:effectRef>
+          <a:fontRef idx="minor">
+            <a:schemeClr val="lt1"/>
+          </a:fontRef>
+        </p:style>
+        <p:txBody>
+          <a:bodyPr rtlCol="0" anchor="ctr"/>
+          <a:lstStyle/>
+          <a:p>
+            <a:pPr algn="ctr"/>
+          </a:p>
+        </p:txBody>
+      </p:sp>
+      <p:sp>
+        <p:nvSpPr>
+          <p:cNvPr id="19" name="Rectangle 18"/>
+          <p:cNvSpPr/>
+          <p:nvPr/>
+        </p:nvSpPr>
+        <p:spPr>
+          <a:xfrm>
+            <a:off x="5897880" y="3813048"/>
+            <a:ext cx="4026693" cy="201168"/>
+          </a:xfrm>
+          <a:prstGeom prst="rect">
+            <a:avLst/>
+          </a:prstGeom>
+          <a:solidFill>
+            <a:srgbClr val="66E6CD"/>
+          </a:solidFill>
+          <a:ln>
+            <a:noFill/>
+          </a:ln>
+        </p:spPr>
+        <p:style>
+          <a:lnRef idx="1">
+            <a:schemeClr val="accent1"/>
+          </a:lnRef>
+          <a:fillRef idx="3">
+            <a:schemeClr val="accent1"/>
+          </a:fillRef>
+          <a:effectRef idx="2">
+            <a:schemeClr val="accent1"/>
+          </a:effectRef>
+          <a:fontRef idx="minor">
+            <a:schemeClr val="lt1"/>
+          </a:fontRef>
+        </p:style>
+        <p:txBody>
+          <a:bodyPr rtlCol="0" anchor="ctr"/>
+          <a:lstStyle/>
+          <a:p>
+            <a:pPr algn="ctr"/>
+          </a:p>
+        </p:txBody>
+      </p:sp>
+      <p:sp>
+        <p:nvSpPr>
+          <p:cNvPr id="20" name="TextBox 19"/>
           <p:cNvSpPr txBox="1"/>
           <p:nvPr/>
         </p:nvSpPr>
         <p:spPr>
           <a:xfrm>
-            <a:off x="5394960" y="4379975"/>
-            <a:ext cx="2788920" cy="438912"/>
+            <a:off x="10469880" y="3703320"/>
+            <a:ext cx="1005840" cy="365760"/>
           </a:xfrm>
           <a:prstGeom prst="rect">
             <a:avLst/>
@@ -7333,29 +6940,29 @@
               <a:spcAft>
                 <a:spcPts val="800"/>
               </a:spcAft>
-              <a:defRPr sz="2700" b="1">
-                <a:solidFill>
-                  <a:srgbClr val="FFC177"/>
+              <a:defRPr sz="2200" b="1">
+                <a:solidFill>
+                  <a:srgbClr val="66E6CD"/>
                 </a:solidFill>
                 <a:latin typeface="DejaVu Sans"/>
               </a:defRPr>
             </a:pPr>
             <a:r>
-              <a:t>0.0</a:t>
-            </a:r>
-          </a:p>
-        </p:txBody>
-      </p:sp>
-      <p:sp>
-        <p:nvSpPr>
-          <p:cNvPr id="23" name="TextBox 22"/>
+              <a:t>89/96</a:t>
+            </a:r>
+          </a:p>
+        </p:txBody>
+      </p:sp>
+      <p:sp>
+        <p:nvSpPr>
+          <p:cNvPr id="21" name="TextBox 20"/>
           <p:cNvSpPr txBox="1"/>
           <p:nvPr/>
         </p:nvSpPr>
         <p:spPr>
           <a:xfrm>
-            <a:off x="8366760" y="4041647"/>
-            <a:ext cx="2788920" cy="246888"/>
+            <a:off x="749808" y="4526280"/>
+            <a:ext cx="5486400" cy="365760"/>
           </a:xfrm>
           <a:prstGeom prst="rect">
             <a:avLst/>
@@ -7372,16 +6979,102 @@
               <a:spcAft>
                 <a:spcPts val="800"/>
               </a:spcAft>
-              <a:defRPr sz="1000" b="1">
-                <a:solidFill>
-                  <a:srgbClr val="A4B6CD"/>
+              <a:defRPr sz="1900" b="0">
+                <a:solidFill>
+                  <a:srgbClr val="EDF4FF"/>
                 </a:solidFill>
                 <a:latin typeface="DejaVu Sans"/>
               </a:defRPr>
             </a:pPr>
             <a:r>
-              <a:t>SOURCE-TRAINED SELECTOR</a:t>
-            </a:r>
+              <a:t>After training: top choice</a:t>
+            </a:r>
+          </a:p>
+        </p:txBody>
+      </p:sp>
+      <p:sp>
+        <p:nvSpPr>
+          <p:cNvPr id="22" name="Rectangle 21"/>
+          <p:cNvSpPr/>
+          <p:nvPr/>
+        </p:nvSpPr>
+        <p:spPr>
+          <a:xfrm>
+            <a:off x="5897880" y="4636008"/>
+            <a:ext cx="4343400" cy="201168"/>
+          </a:xfrm>
+          <a:prstGeom prst="rect">
+            <a:avLst/>
+          </a:prstGeom>
+          <a:solidFill>
+            <a:srgbClr val="24354B"/>
+          </a:solidFill>
+          <a:ln>
+            <a:noFill/>
+          </a:ln>
+        </p:spPr>
+        <p:style>
+          <a:lnRef idx="1">
+            <a:schemeClr val="accent1"/>
+          </a:lnRef>
+          <a:fillRef idx="3">
+            <a:schemeClr val="accent1"/>
+          </a:fillRef>
+          <a:effectRef idx="2">
+            <a:schemeClr val="accent1"/>
+          </a:effectRef>
+          <a:fontRef idx="minor">
+            <a:schemeClr val="lt1"/>
+          </a:fontRef>
+        </p:style>
+        <p:txBody>
+          <a:bodyPr rtlCol="0" anchor="ctr"/>
+          <a:lstStyle/>
+          <a:p>
+            <a:pPr algn="ctr"/>
+          </a:p>
+        </p:txBody>
+      </p:sp>
+      <p:sp>
+        <p:nvSpPr>
+          <p:cNvPr id="23" name="Rectangle 22"/>
+          <p:cNvSpPr/>
+          <p:nvPr/>
+        </p:nvSpPr>
+        <p:spPr>
+          <a:xfrm>
+            <a:off x="5897880" y="4636008"/>
+            <a:ext cx="4343400" cy="201168"/>
+          </a:xfrm>
+          <a:prstGeom prst="rect">
+            <a:avLst/>
+          </a:prstGeom>
+          <a:solidFill>
+            <a:srgbClr val="66E6CD"/>
+          </a:solidFill>
+          <a:ln>
+            <a:noFill/>
+          </a:ln>
+        </p:spPr>
+        <p:style>
+          <a:lnRef idx="1">
+            <a:schemeClr val="accent1"/>
+          </a:lnRef>
+          <a:fillRef idx="3">
+            <a:schemeClr val="accent1"/>
+          </a:fillRef>
+          <a:effectRef idx="2">
+            <a:schemeClr val="accent1"/>
+          </a:effectRef>
+          <a:fontRef idx="minor">
+            <a:schemeClr val="lt1"/>
+          </a:fontRef>
+        </p:style>
+        <p:txBody>
+          <a:bodyPr rtlCol="0" anchor="ctr"/>
+          <a:lstStyle/>
+          <a:p>
+            <a:pPr algn="ctr"/>
           </a:p>
         </p:txBody>
       </p:sp>
@@ -7393,8 +7086,8 @@
         </p:nvSpPr>
         <p:spPr>
           <a:xfrm>
-            <a:off x="8366760" y="4379975"/>
-            <a:ext cx="2788920" cy="438912"/>
+            <a:off x="10469880" y="4526280"/>
+            <a:ext cx="1005840" cy="365760"/>
           </a:xfrm>
           <a:prstGeom prst="rect">
             <a:avLst/>
@@ -7411,15 +7104,15 @@
               <a:spcAft>
                 <a:spcPts val="800"/>
               </a:spcAft>
-              <a:defRPr sz="2700" b="1">
-                <a:solidFill>
-                  <a:srgbClr val="FFC177"/>
+              <a:defRPr sz="2200" b="1">
+                <a:solidFill>
+                  <a:srgbClr val="66E6CD"/>
                 </a:solidFill>
                 <a:latin typeface="DejaVu Sans"/>
               </a:defRPr>
             </a:pPr>
             <a:r>
-              <a:t>0.0</a:t>
+              <a:t>96/96</a:t>
             </a:r>
           </a:p>
         </p:txBody>
@@ -7432,8 +7125,8 @@
         </p:nvSpPr>
         <p:spPr>
           <a:xfrm>
-            <a:off x="713232" y="5440680"/>
-            <a:ext cx="10835640" cy="365760"/>
+            <a:off x="731520" y="5532120"/>
+            <a:ext cx="10789920" cy="365760"/>
           </a:xfrm>
           <a:prstGeom prst="rect">
             <a:avLst/>
@@ -7458,7 +7151,7 @@
               </a:defRPr>
             </a:pPr>
             <a:r>
-              <a:t>The same grounded response bank controls character variation. After branches diverge, later LLM proposals may differ.</a:t>
+              <a:t>48 practice setups and 48 separate test setups. Each test setup was evaluated twice, using the same kinds of practice problem.</a:t>
             </a:r>
           </a:p>
         </p:txBody>
@@ -7497,7 +7190,7 @@
               </a:defRPr>
             </a:pPr>
             <a:r>
-              <a:t>Small development comparison, not statistical superiority or the standard native-tool judging harness. Full trajectories retained.</a:t>
+              <a:t>These results measure choosing among prepared actions. They do not show that a model can solve any murder case.</a:t>
             </a:r>
           </a:p>
         </p:txBody>
@@ -7777,7 +7470,7 @@
               </a:defRPr>
             </a:pPr>
             <a:r>
-              <a:t>MERCY HOUSE  /  CONSISTENCY, SOURCE-ONLY SOLVABILITY AND ROBUSTNESS</a:t>
+              <a:t>MERCY HOUSE  /  FULL INVESTIGATIONS EXCLUDED FROM TRAINING</a:t>
             </a:r>
           </a:p>
         </p:txBody>
@@ -7816,14 +7509,53 @@
               </a:defRPr>
             </a:pPr>
             <a:r>
-              <a:t>Audit the case, not just the score.</a:t>
-            </a:r>
-          </a:p>
-        </p:txBody>
-      </p:sp>
-      <p:sp>
-        <p:nvSpPr>
-          <p:cNvPr id="9" name="Rectangle 8"/>
+              <a:t>The harder test exposed the gap.</a:t>
+            </a:r>
+          </a:p>
+        </p:txBody>
+      </p:sp>
+      <p:sp>
+        <p:nvSpPr>
+          <p:cNvPr id="9" name="TextBox 8"/>
+          <p:cNvSpPr txBox="1"/>
+          <p:nvPr/>
+        </p:nvSpPr>
+        <p:spPr>
+          <a:xfrm>
+            <a:off x="566928" y="1691640"/>
+            <a:ext cx="10972800" cy="594360"/>
+          </a:xfrm>
+          <a:prstGeom prst="rect">
+            <a:avLst/>
+          </a:prstGeom>
+          <a:noFill/>
+        </p:spPr>
+        <p:txBody>
+          <a:bodyPr wrap="square" lIns="13716" rIns="13716" tIns="0" bIns="0">
+            <a:spAutoFit/>
+          </a:bodyPr>
+          <a:lstStyle/>
+          <a:p>
+            <a:pPr>
+              <a:spcAft>
+                <a:spcPts val="800"/>
+              </a:spcAft>
+              <a:defRPr sz="1500" b="0">
+                <a:solidFill>
+                  <a:srgbClr val="A4B6CD"/>
+                </a:solidFill>
+                <a:latin typeface="DejaVu Sans"/>
+              </a:defRPr>
+            </a:pPr>
+            <a:r>
+              <a:t>We froze the new weights, then tested two tasks from the original Mercy House incident.</a:t>
+            </a:r>
+          </a:p>
+        </p:txBody>
+      </p:sp>
+      <p:sp>
+        <p:nvSpPr>
+          <p:cNvPr id="10" name="Rectangle 9"/>
           <p:cNvSpPr/>
           <p:nvPr/>
         </p:nvSpPr>
@@ -7866,7 +7598,7 @@
       </p:sp>
       <p:sp>
         <p:nvSpPr>
-          <p:cNvPr id="10" name="TextBox 9"/>
+          <p:cNvPr id="11" name="TextBox 10"/>
           <p:cNvSpPr txBox="1"/>
           <p:nvPr/>
         </p:nvSpPr>
@@ -7905,7 +7637,7 @@
       </p:sp>
       <p:sp>
         <p:nvSpPr>
-          <p:cNvPr id="11" name="TextBox 10"/>
+          <p:cNvPr id="12" name="TextBox 11"/>
           <p:cNvSpPr txBox="1"/>
           <p:nvPr/>
         </p:nvSpPr>
@@ -7944,14 +7676,14 @@
       </p:sp>
       <p:sp>
         <p:nvSpPr>
-          <p:cNvPr id="12" name="Rounded Rectangle 11"/>
+          <p:cNvPr id="13" name="Rounded Rectangle 12"/>
           <p:cNvSpPr/>
           <p:nvPr/>
         </p:nvSpPr>
         <p:spPr>
           <a:xfrm>
-            <a:off x="594360" y="2514600"/>
-            <a:ext cx="3520440" cy="2606040"/>
+            <a:off x="594360" y="2606040"/>
+            <a:ext cx="10972800" cy="1051560"/>
           </a:xfrm>
           <a:prstGeom prst="roundRect">
             <a:avLst>
@@ -7991,57 +7723,14 @@
       </p:sp>
       <p:sp>
         <p:nvSpPr>
-          <p:cNvPr id="13" name="Rectangle 12"/>
-          <p:cNvSpPr/>
-          <p:nvPr/>
-        </p:nvSpPr>
-        <p:spPr>
-          <a:xfrm>
-            <a:off x="758952" y="2697480"/>
-            <a:ext cx="45720" cy="310896"/>
-          </a:xfrm>
-          <a:prstGeom prst="rect">
-            <a:avLst/>
-          </a:prstGeom>
-          <a:solidFill>
-            <a:srgbClr val="66E6CD"/>
-          </a:solidFill>
-          <a:ln>
-            <a:noFill/>
-          </a:ln>
-        </p:spPr>
-        <p:style>
-          <a:lnRef idx="1">
-            <a:schemeClr val="accent1"/>
-          </a:lnRef>
-          <a:fillRef idx="3">
-            <a:schemeClr val="accent1"/>
-          </a:fillRef>
-          <a:effectRef idx="2">
-            <a:schemeClr val="accent1"/>
-          </a:effectRef>
-          <a:fontRef idx="minor">
-            <a:schemeClr val="lt1"/>
-          </a:fontRef>
-        </p:style>
-        <p:txBody>
-          <a:bodyPr rtlCol="0" anchor="ctr"/>
-          <a:lstStyle/>
-          <a:p>
-            <a:pPr algn="ctr"/>
-          </a:p>
-        </p:txBody>
-      </p:sp>
-      <p:sp>
-        <p:nvSpPr>
           <p:cNvPr id="14" name="TextBox 13"/>
           <p:cNvSpPr txBox="1"/>
           <p:nvPr/>
         </p:nvSpPr>
         <p:spPr>
           <a:xfrm>
-            <a:off x="923544" y="2724912"/>
-            <a:ext cx="3017520" cy="411480"/>
+            <a:off x="832104" y="2852928"/>
+            <a:ext cx="4434840" cy="502920"/>
           </a:xfrm>
           <a:prstGeom prst="rect">
             <a:avLst/>
@@ -8058,15 +7747,15 @@
               <a:spcAft>
                 <a:spcPts val="800"/>
               </a:spcAft>
-              <a:defRPr sz="1600" b="1">
-                <a:solidFill>
-                  <a:srgbClr val="66E6CD"/>
+              <a:defRPr sz="2000" b="1">
+                <a:solidFill>
+                  <a:srgbClr val="EDF4FF"/>
                 </a:solidFill>
                 <a:latin typeface="DejaVu Sans"/>
               </a:defRPr>
             </a:pPr>
             <a:r>
-              <a:t>FACT AND PROVENANCE FIXES</a:t>
+              <a:t>Establish the fatal assault</a:t>
             </a:r>
           </a:p>
         </p:txBody>
@@ -8079,8 +7768,8 @@
         </p:nvSpPr>
         <p:spPr>
           <a:xfrm>
-            <a:off x="804672" y="3355848"/>
-            <a:ext cx="3099816" cy="1645920"/>
+            <a:off x="5715000" y="2752344"/>
+            <a:ext cx="2651760" cy="256032"/>
           </a:xfrm>
           <a:prstGeom prst="rect">
             <a:avLst/>
@@ -8097,29 +7786,146 @@
               <a:spcAft>
                 <a:spcPts val="800"/>
               </a:spcAft>
-              <a:defRPr sz="1700" b="0">
-                <a:solidFill>
-                  <a:srgbClr val="EDF4FF"/>
+              <a:defRPr sz="1000" b="1">
+                <a:solidFill>
+                  <a:srgbClr val="A4B6CD"/>
                 </a:solidFill>
                 <a:latin typeface="DejaVu Sans"/>
               </a:defRPr>
             </a:pPr>
             <a:r>
-              <a:t>Distinguish payer from carrier. Authenticate the register writer independently. Correct what witnesses actually perceived.</a:t>
-            </a:r>
-          </a:p>
-        </p:txBody>
-      </p:sp>
-      <p:sp>
-        <p:nvSpPr>
-          <p:cNvPr id="16" name="Rounded Rectangle 15"/>
+              <a:t>MODEL’S FIRST CHOICE</a:t>
+            </a:r>
+          </a:p>
+        </p:txBody>
+      </p:sp>
+      <p:sp>
+        <p:nvSpPr>
+          <p:cNvPr id="16" name="TextBox 15"/>
+          <p:cNvSpPr txBox="1"/>
+          <p:nvPr/>
+        </p:nvSpPr>
+        <p:spPr>
+          <a:xfrm>
+            <a:off x="5715000" y="3081528"/>
+            <a:ext cx="2651760" cy="411480"/>
+          </a:xfrm>
+          <a:prstGeom prst="rect">
+            <a:avLst/>
+          </a:prstGeom>
+          <a:noFill/>
+        </p:spPr>
+        <p:txBody>
+          <a:bodyPr wrap="square" lIns="13716" rIns="13716" tIns="0" bIns="0">
+            <a:spAutoFit/>
+          </a:bodyPr>
+          <a:lstStyle/>
+          <a:p>
+            <a:pPr>
+              <a:spcAft>
+                <a:spcPts val="800"/>
+              </a:spcAft>
+              <a:defRPr sz="2500" b="1">
+                <a:solidFill>
+                  <a:srgbClr val="FFC177"/>
+                </a:solidFill>
+                <a:latin typeface="DejaVu Sans"/>
+              </a:defRPr>
+            </a:pPr>
+            <a:r>
+              <a:t>0.0</a:t>
+            </a:r>
+          </a:p>
+        </p:txBody>
+      </p:sp>
+      <p:sp>
+        <p:nvSpPr>
+          <p:cNvPr id="17" name="TextBox 16"/>
+          <p:cNvSpPr txBox="1"/>
+          <p:nvPr/>
+        </p:nvSpPr>
+        <p:spPr>
+          <a:xfrm>
+            <a:off x="8586216" y="2752344"/>
+            <a:ext cx="2651760" cy="256032"/>
+          </a:xfrm>
+          <a:prstGeom prst="rect">
+            <a:avLst/>
+          </a:prstGeom>
+          <a:noFill/>
+        </p:spPr>
+        <p:txBody>
+          <a:bodyPr wrap="square" lIns="13716" rIns="13716" tIns="0" bIns="0">
+            <a:spAutoFit/>
+          </a:bodyPr>
+          <a:lstStyle/>
+          <a:p>
+            <a:pPr>
+              <a:spcAft>
+                <a:spcPts val="800"/>
+              </a:spcAft>
+              <a:defRPr sz="1000" b="1">
+                <a:solidFill>
+                  <a:srgbClr val="A4B6CD"/>
+                </a:solidFill>
+                <a:latin typeface="DejaVu Sans"/>
+              </a:defRPr>
+            </a:pPr>
+            <a:r>
+              <a:t>TRAINED SELECTOR</a:t>
+            </a:r>
+          </a:p>
+        </p:txBody>
+      </p:sp>
+      <p:sp>
+        <p:nvSpPr>
+          <p:cNvPr id="18" name="TextBox 17"/>
+          <p:cNvSpPr txBox="1"/>
+          <p:nvPr/>
+        </p:nvSpPr>
+        <p:spPr>
+          <a:xfrm>
+            <a:off x="8586216" y="3081528"/>
+            <a:ext cx="2651760" cy="411480"/>
+          </a:xfrm>
+          <a:prstGeom prst="rect">
+            <a:avLst/>
+          </a:prstGeom>
+          <a:noFill/>
+        </p:spPr>
+        <p:txBody>
+          <a:bodyPr wrap="square" lIns="13716" rIns="13716" tIns="0" bIns="0">
+            <a:spAutoFit/>
+          </a:bodyPr>
+          <a:lstStyle/>
+          <a:p>
+            <a:pPr>
+              <a:spcAft>
+                <a:spcPts val="800"/>
+              </a:spcAft>
+              <a:defRPr sz="2500" b="1">
+                <a:solidFill>
+                  <a:srgbClr val="FFC177"/>
+                </a:solidFill>
+                <a:latin typeface="DejaVu Sans"/>
+              </a:defRPr>
+            </a:pPr>
+            <a:r>
+              <a:t>0.0</a:t>
+            </a:r>
+          </a:p>
+        </p:txBody>
+      </p:sp>
+      <p:sp>
+        <p:nvSpPr>
+          <p:cNvPr id="19" name="Rounded Rectangle 18"/>
           <p:cNvSpPr/>
           <p:nvPr/>
         </p:nvSpPr>
         <p:spPr>
           <a:xfrm>
-            <a:off x="4352544" y="2514600"/>
-            <a:ext cx="3520440" cy="2606040"/>
+            <a:off x="594360" y="3886200"/>
+            <a:ext cx="10972800" cy="1051560"/>
           </a:xfrm>
           <a:prstGeom prst="roundRect">
             <a:avLst>
@@ -8159,57 +7965,14 @@
       </p:sp>
       <p:sp>
         <p:nvSpPr>
-          <p:cNvPr id="17" name="Rectangle 16"/>
-          <p:cNvSpPr/>
-          <p:nvPr/>
-        </p:nvSpPr>
-        <p:spPr>
-          <a:xfrm>
-            <a:off x="4517136" y="2697480"/>
-            <a:ext cx="45720" cy="310896"/>
-          </a:xfrm>
-          <a:prstGeom prst="rect">
-            <a:avLst/>
-          </a:prstGeom>
-          <a:solidFill>
-            <a:srgbClr val="A2ADFF"/>
-          </a:solidFill>
-          <a:ln>
-            <a:noFill/>
-          </a:ln>
-        </p:spPr>
-        <p:style>
-          <a:lnRef idx="1">
-            <a:schemeClr val="accent1"/>
-          </a:lnRef>
-          <a:fillRef idx="3">
-            <a:schemeClr val="accent1"/>
-          </a:fillRef>
-          <a:effectRef idx="2">
-            <a:schemeClr val="accent1"/>
-          </a:effectRef>
-          <a:fontRef idx="minor">
-            <a:schemeClr val="lt1"/>
-          </a:fontRef>
-        </p:style>
-        <p:txBody>
-          <a:bodyPr rtlCol="0" anchor="ctr"/>
-          <a:lstStyle/>
-          <a:p>
-            <a:pPr algn="ctr"/>
-          </a:p>
-        </p:txBody>
-      </p:sp>
-      <p:sp>
-        <p:nvSpPr>
-          <p:cNvPr id="18" name="TextBox 17"/>
+          <p:cNvPr id="20" name="TextBox 19"/>
           <p:cNvSpPr txBox="1"/>
           <p:nvPr/>
         </p:nvSpPr>
         <p:spPr>
           <a:xfrm>
-            <a:off x="4681728" y="2724912"/>
-            <a:ext cx="3017520" cy="411480"/>
+            <a:off x="832104" y="4133087"/>
+            <a:ext cx="4434840" cy="502920"/>
           </a:xfrm>
           <a:prstGeom prst="rect">
             <a:avLst/>
@@ -8226,29 +7989,29 @@
               <a:spcAft>
                 <a:spcPts val="800"/>
               </a:spcAft>
-              <a:defRPr sz="1600" b="1">
-                <a:solidFill>
-                  <a:srgbClr val="A2ADFF"/>
+              <a:defRPr sz="2000" b="1">
+                <a:solidFill>
+                  <a:srgbClr val="EDF4FF"/>
                 </a:solidFill>
                 <a:latin typeface="DejaVu Sans"/>
               </a:defRPr>
             </a:pPr>
             <a:r>
-              <a:t>LEGAL PROOF ROUTES</a:t>
-            </a:r>
-          </a:p>
-        </p:txBody>
-      </p:sp>
-      <p:sp>
-        <p:nvSpPr>
-          <p:cNvPr id="19" name="TextBox 18"/>
+              <a:t>Explain all seven material acts</a:t>
+            </a:r>
+          </a:p>
+        </p:txBody>
+      </p:sp>
+      <p:sp>
+        <p:nvSpPr>
+          <p:cNvPr id="21" name="TextBox 20"/>
           <p:cNvSpPr txBox="1"/>
           <p:nvPr/>
         </p:nvSpPr>
         <p:spPr>
           <a:xfrm>
-            <a:off x="4562856" y="3355848"/>
-            <a:ext cx="3099816" cy="1645920"/>
+            <a:off x="5715000" y="4032504"/>
+            <a:ext cx="2651760" cy="256032"/>
           </a:xfrm>
           <a:prstGeom prst="rect">
             <a:avLst/>
@@ -8265,106 +8028,16 @@
               <a:spcAft>
                 <a:spcPts val="800"/>
               </a:spcAft>
-              <a:defRPr sz="1700" b="0">
-                <a:solidFill>
-                  <a:srgbClr val="EDF4FF"/>
+              <a:defRPr sz="1000" b="1">
+                <a:solidFill>
+                  <a:srgbClr val="A4B6CD"/>
                 </a:solidFill>
                 <a:latin typeface="DejaVu Sans"/>
               </a:defRPr>
             </a:pPr>
             <a:r>
-              <a:t>All eight reference/no-op pairs: 1 / 0. Public-information-only scripted probes solve all three new families with both culprit roles.</a:t>
-            </a:r>
-          </a:p>
-        </p:txBody>
-      </p:sp>
-      <p:sp>
-        <p:nvSpPr>
-          <p:cNvPr id="20" name="Rounded Rectangle 19"/>
-          <p:cNvSpPr/>
-          <p:nvPr/>
-        </p:nvSpPr>
-        <p:spPr>
-          <a:xfrm>
-            <a:off x="8110727" y="2514600"/>
-            <a:ext cx="3520440" cy="2606040"/>
-          </a:xfrm>
-          <a:prstGeom prst="roundRect">
-            <a:avLst>
-              <a:gd name="adj" fmla="val 8000"/>
-            </a:avLst>
-          </a:prstGeom>
-          <a:solidFill>
-            <a:srgbClr val="111D30"/>
-          </a:solidFill>
-          <a:ln>
-            <a:solidFill>
-              <a:srgbClr val="24354B"/>
-            </a:solidFill>
-          </a:ln>
-        </p:spPr>
-        <p:style>
-          <a:lnRef idx="1">
-            <a:schemeClr val="accent1"/>
-          </a:lnRef>
-          <a:fillRef idx="3">
-            <a:schemeClr val="accent1"/>
-          </a:fillRef>
-          <a:effectRef idx="2">
-            <a:schemeClr val="accent1"/>
-          </a:effectRef>
-          <a:fontRef idx="minor">
-            <a:schemeClr val="lt1"/>
-          </a:fontRef>
-        </p:style>
-        <p:txBody>
-          <a:bodyPr rtlCol="0" anchor="ctr"/>
-          <a:lstStyle/>
-          <a:p>
-            <a:pPr algn="ctr"/>
-          </a:p>
-        </p:txBody>
-      </p:sp>
-      <p:sp>
-        <p:nvSpPr>
-          <p:cNvPr id="21" name="Rectangle 20"/>
-          <p:cNvSpPr/>
-          <p:nvPr/>
-        </p:nvSpPr>
-        <p:spPr>
-          <a:xfrm>
-            <a:off x="8275319" y="2697480"/>
-            <a:ext cx="45720" cy="310896"/>
-          </a:xfrm>
-          <a:prstGeom prst="rect">
-            <a:avLst/>
-          </a:prstGeom>
-          <a:solidFill>
-            <a:srgbClr val="FFC177"/>
-          </a:solidFill>
-          <a:ln>
-            <a:noFill/>
-          </a:ln>
-        </p:spPr>
-        <p:style>
-          <a:lnRef idx="1">
-            <a:schemeClr val="accent1"/>
-          </a:lnRef>
-          <a:fillRef idx="3">
-            <a:schemeClr val="accent1"/>
-          </a:fillRef>
-          <a:effectRef idx="2">
-            <a:schemeClr val="accent1"/>
-          </a:effectRef>
-          <a:fontRef idx="minor">
-            <a:schemeClr val="lt1"/>
-          </a:fontRef>
-        </p:style>
-        <p:txBody>
-          <a:bodyPr rtlCol="0" anchor="ctr"/>
-          <a:lstStyle/>
-          <a:p>
-            <a:pPr algn="ctr"/>
+              <a:t>MODEL’S FIRST CHOICE</a:t>
+            </a:r>
           </a:p>
         </p:txBody>
       </p:sp>
@@ -8376,8 +8049,8 @@
         </p:nvSpPr>
         <p:spPr>
           <a:xfrm>
-            <a:off x="8439911" y="2724912"/>
-            <a:ext cx="3017520" cy="411480"/>
+            <a:off x="5715000" y="4361688"/>
+            <a:ext cx="2651760" cy="411480"/>
           </a:xfrm>
           <a:prstGeom prst="rect">
             <a:avLst/>
@@ -8394,7 +8067,7 @@
               <a:spcAft>
                 <a:spcPts val="800"/>
               </a:spcAft>
-              <a:defRPr sz="1600" b="1">
+              <a:defRPr sz="2500" b="1">
                 <a:solidFill>
                   <a:srgbClr val="FFC177"/>
                 </a:solidFill>
@@ -8402,7 +8075,7 @@
               </a:defRPr>
             </a:pPr>
             <a:r>
-              <a:t>EXECUTABLE CHECKS</a:t>
+              <a:t>0.0</a:t>
             </a:r>
           </a:p>
         </p:txBody>
@@ -8415,8 +8088,8 @@
         </p:nvSpPr>
         <p:spPr>
           <a:xfrm>
-            <a:off x="8321040" y="3355848"/>
-            <a:ext cx="3099816" cy="1645920"/>
+            <a:off x="8586216" y="4032504"/>
+            <a:ext cx="2651760" cy="256032"/>
           </a:xfrm>
           <a:prstGeom prst="rect">
             <a:avLst/>
@@ -8433,15 +8106,15 @@
               <a:spcAft>
                 <a:spcPts val="800"/>
               </a:spcAft>
-              <a:defRPr sz="1700" b="0">
-                <a:solidFill>
-                  <a:srgbClr val="EDF4FF"/>
+              <a:defRPr sz="1000" b="1">
+                <a:solidFill>
+                  <a:srgbClr val="A4B6CD"/>
                 </a:solidFill>
                 <a:latin typeface="DejaVu Sans"/>
               </a:defRPr>
             </a:pPr>
             <a:r>
-              <a:t>118 town + 9 legacy + 9 Node tests. Browser desktop/mobile reports, isolation probes, forged-source rejection and causal counterfactuals.</a:t>
+              <a:t>TRAINED SELECTOR</a:t>
             </a:r>
           </a:p>
         </p:txBody>
@@ -8449,6 +8122,84 @@
       <p:sp>
         <p:nvSpPr>
           <p:cNvPr id="24" name="TextBox 23"/>
+          <p:cNvSpPr txBox="1"/>
+          <p:nvPr/>
+        </p:nvSpPr>
+        <p:spPr>
+          <a:xfrm>
+            <a:off x="8586216" y="4361688"/>
+            <a:ext cx="2651760" cy="411480"/>
+          </a:xfrm>
+          <a:prstGeom prst="rect">
+            <a:avLst/>
+          </a:prstGeom>
+          <a:noFill/>
+        </p:spPr>
+        <p:txBody>
+          <a:bodyPr wrap="square" lIns="13716" rIns="13716" tIns="0" bIns="0">
+            <a:spAutoFit/>
+          </a:bodyPr>
+          <a:lstStyle/>
+          <a:p>
+            <a:pPr>
+              <a:spcAft>
+                <a:spcPts val="800"/>
+              </a:spcAft>
+              <a:defRPr sz="2500" b="1">
+                <a:solidFill>
+                  <a:srgbClr val="FFC177"/>
+                </a:solidFill>
+                <a:latin typeface="DejaVu Sans"/>
+              </a:defRPr>
+            </a:pPr>
+            <a:r>
+              <a:t>0.0</a:t>
+            </a:r>
+          </a:p>
+        </p:txBody>
+      </p:sp>
+      <p:sp>
+        <p:nvSpPr>
+          <p:cNvPr id="25" name="TextBox 24"/>
+          <p:cNvSpPr txBox="1"/>
+          <p:nvPr/>
+        </p:nvSpPr>
+        <p:spPr>
+          <a:xfrm>
+            <a:off x="731520" y="5440680"/>
+            <a:ext cx="10698480" cy="365760"/>
+          </a:xfrm>
+          <a:prstGeom prst="rect">
+            <a:avLst/>
+          </a:prstGeom>
+          <a:noFill/>
+        </p:spPr>
+        <p:txBody>
+          <a:bodyPr wrap="square" lIns="13716" rIns="13716" tIns="0" bIns="0">
+            <a:spAutoFit/>
+          </a:bodyPr>
+          <a:lstStyle/>
+          <a:p>
+            <a:pPr>
+              <a:spcAft>
+                <a:spcPts val="800"/>
+              </a:spcAft>
+              <a:defRPr sz="1800" b="0">
+                <a:solidFill>
+                  <a:srgbClr val="A4B6CD"/>
+                </a:solidFill>
+                <a:latin typeface="DejaVu Sans"/>
+              </a:defRPr>
+            </a:pPr>
+            <a:r>
+              <a:t>Neither method completed the two tasks. Full-case improvement remains unproven.</a:t>
+            </a:r>
+          </a:p>
+        </p:txBody>
+      </p:sp>
+      <p:sp>
+        <p:nvSpPr>
+          <p:cNvPr id="26" name="TextBox 25"/>
           <p:cNvSpPr txBox="1"/>
           <p:nvPr/>
         </p:nvSpPr>
@@ -8480,7 +8231,7 @@
               </a:defRPr>
             </a:pPr>
             <a:r>
-              <a:t>Scripted feasibility is not live cooperation. Canonical murder proof can depend on a reluctant witness or a supported admission.</a:t>
+              <a:t>Same proposal rules, fixed character responses and 40 choices per run. Four runs are a small comparison, not a broad performance claim.</a:t>
             </a:r>
           </a:p>
         </p:txBody>
@@ -8760,7 +8511,7 @@
               </a:defRPr>
             </a:pPr>
             <a:r>
-              <a:t>MERCY HOUSE  /  DEMONSTRATION AND HANDOFF</a:t>
+              <a:t>MERCY HOUSE  /  TESTING AND LIVE DEMONSTRATION</a:t>
             </a:r>
           </a:p>
         </p:txBody>
@@ -8799,7 +8550,7 @@
               </a:defRPr>
             </a:pPr>
             <a:r>
-              <a:t>A reviewable environment, with measured limits.</a:t>
+              <a:t>Checked, corrected and ready to inspect.</a:t>
             </a:r>
           </a:p>
         </p:txBody>
@@ -8933,8 +8684,8 @@
         </p:nvSpPr>
         <p:spPr>
           <a:xfrm>
-            <a:off x="594360" y="2468880"/>
-            <a:ext cx="5321808" cy="2587752"/>
+            <a:off x="594360" y="2560320"/>
+            <a:ext cx="3520440" cy="2560320"/>
           </a:xfrm>
           <a:prstGeom prst="roundRect">
             <a:avLst>
@@ -8980,7 +8731,7 @@
         </p:nvSpPr>
         <p:spPr>
           <a:xfrm>
-            <a:off x="758952" y="2651760"/>
+            <a:off x="758952" y="2743200"/>
             <a:ext cx="45720" cy="310896"/>
           </a:xfrm>
           <a:prstGeom prst="rect">
@@ -9023,8 +8774,8 @@
         </p:nvSpPr>
         <p:spPr>
           <a:xfrm>
-            <a:off x="923544" y="2679192"/>
-            <a:ext cx="4818888" cy="411480"/>
+            <a:off x="923544" y="2770632"/>
+            <a:ext cx="3017520" cy="411480"/>
           </a:xfrm>
           <a:prstGeom prst="rect">
             <a:avLst/>
@@ -9049,7 +8800,7 @@
               </a:defRPr>
             </a:pPr>
             <a:r>
-              <a:t>TRY THE INVESTIGATION</a:t>
+              <a:t>CASE CONSISTENCY</a:t>
             </a:r>
           </a:p>
         </p:txBody>
@@ -9062,8 +8813,8 @@
         </p:nvSpPr>
         <p:spPr>
           <a:xfrm>
-            <a:off x="804672" y="3310128"/>
-            <a:ext cx="4901184" cy="1627632"/>
+            <a:off x="804672" y="3401568"/>
+            <a:ext cx="3099816" cy="1600199"/>
           </a:xfrm>
           <a:prstGeom prst="rect">
             <a:avLst/>
@@ -9080,7 +8831,7 @@
               <a:spcAft>
                 <a:spcPts val="800"/>
               </a:spcAft>
-              <a:defRPr sz="1800" b="0">
+              <a:defRPr sz="1700" b="0">
                 <a:solidFill>
                   <a:srgbClr val="EDF4FF"/>
                 </a:solidFill>
@@ -9088,23 +8839,7 @@
               </a:defRPr>
             </a:pPr>
             <a:r>
-              <a:t>mercyhouse.abhi07.xyz → Sign in → New investigation → Lantern Room, seed7.</a:t>
-            </a:r>
-          </a:p>
-          <a:p>
-            <a:pPr>
-              <a:spcAft>
-                <a:spcPts val="800"/>
-              </a:spcAft>
-              <a:defRPr sz="1800" b="0">
-                <a:solidFill>
-                  <a:srgbClr val="EDF4FF"/>
-                </a:solidFill>
-                <a:latin typeface="DejaVu Sans"/>
-              </a:defRPr>
-            </a:pPr>
-            <a:r>
-              <a:t>Inspect the submitted report and acquired citations.</a:t>
+              <a:t>184 task-and-seed checks passed. We fixed mixed-up roles, weak document attribution and impossible witness details.</a:t>
             </a:r>
           </a:p>
         </p:txBody>
@@ -9117,8 +8852,8 @@
         </p:nvSpPr>
         <p:spPr>
           <a:xfrm>
-            <a:off x="6190488" y="2468880"/>
-            <a:ext cx="5321808" cy="2587752"/>
+            <a:off x="4352544" y="2560320"/>
+            <a:ext cx="3520440" cy="2560320"/>
           </a:xfrm>
           <a:prstGeom prst="roundRect">
             <a:avLst>
@@ -9164,7 +8899,223 @@
         </p:nvSpPr>
         <p:spPr>
           <a:xfrm>
-            <a:off x="6355079" y="2651760"/>
+            <a:off x="4517136" y="2743200"/>
+            <a:ext cx="45720" cy="310896"/>
+          </a:xfrm>
+          <a:prstGeom prst="rect">
+            <a:avLst/>
+          </a:prstGeom>
+          <a:solidFill>
+            <a:srgbClr val="A2ADFF"/>
+          </a:solidFill>
+          <a:ln>
+            <a:noFill/>
+          </a:ln>
+        </p:spPr>
+        <p:style>
+          <a:lnRef idx="1">
+            <a:schemeClr val="accent1"/>
+          </a:lnRef>
+          <a:fillRef idx="3">
+            <a:schemeClr val="accent1"/>
+          </a:fillRef>
+          <a:effectRef idx="2">
+            <a:schemeClr val="accent1"/>
+          </a:effectRef>
+          <a:fontRef idx="minor">
+            <a:schemeClr val="lt1"/>
+          </a:fontRef>
+        </p:style>
+        <p:txBody>
+          <a:bodyPr rtlCol="0" anchor="ctr"/>
+          <a:lstStyle/>
+          <a:p>
+            <a:pPr algn="ctr"/>
+          </a:p>
+        </p:txBody>
+      </p:sp>
+      <p:sp>
+        <p:nvSpPr>
+          <p:cNvPr id="18" name="TextBox 17"/>
+          <p:cNvSpPr txBox="1"/>
+          <p:nvPr/>
+        </p:nvSpPr>
+        <p:spPr>
+          <a:xfrm>
+            <a:off x="4681728" y="2770632"/>
+            <a:ext cx="3017520" cy="411480"/>
+          </a:xfrm>
+          <a:prstGeom prst="rect">
+            <a:avLst/>
+          </a:prstGeom>
+          <a:noFill/>
+        </p:spPr>
+        <p:txBody>
+          <a:bodyPr wrap="square" lIns="13716" rIns="13716" tIns="0" bIns="0">
+            <a:spAutoFit/>
+          </a:bodyPr>
+          <a:lstStyle/>
+          <a:p>
+            <a:pPr>
+              <a:spcAft>
+                <a:spcPts val="800"/>
+              </a:spcAft>
+              <a:defRPr sz="1600" b="1">
+                <a:solidFill>
+                  <a:srgbClr val="A2ADFF"/>
+                </a:solidFill>
+                <a:latin typeface="DejaVu Sans"/>
+              </a:defRPr>
+            </a:pPr>
+            <a:r>
+              <a:t>SOFTWARE CHECKS</a:t>
+            </a:r>
+          </a:p>
+        </p:txBody>
+      </p:sp>
+      <p:sp>
+        <p:nvSpPr>
+          <p:cNvPr id="19" name="TextBox 18"/>
+          <p:cNvSpPr txBox="1"/>
+          <p:nvPr/>
+        </p:nvSpPr>
+        <p:spPr>
+          <a:xfrm>
+            <a:off x="4562856" y="3401568"/>
+            <a:ext cx="3099816" cy="1600199"/>
+          </a:xfrm>
+          <a:prstGeom prst="rect">
+            <a:avLst/>
+          </a:prstGeom>
+          <a:noFill/>
+        </p:spPr>
+        <p:txBody>
+          <a:bodyPr wrap="square" lIns="13716" rIns="13716" tIns="0" bIns="0">
+            <a:spAutoFit/>
+          </a:bodyPr>
+          <a:lstStyle/>
+          <a:p>
+            <a:pPr>
+              <a:spcAft>
+                <a:spcPts val="800"/>
+              </a:spcAft>
+              <a:defRPr sz="1800" b="0">
+                <a:solidFill>
+                  <a:srgbClr val="EDF4FF"/>
+                </a:solidFill>
+                <a:latin typeface="DejaVu Sans"/>
+              </a:defRPr>
+            </a:pPr>
+            <a:r>
+              <a:t>120 world/runtime tests.</a:t>
+            </a:r>
+          </a:p>
+          <a:p>
+            <a:pPr>
+              <a:spcAft>
+                <a:spcPts val="800"/>
+              </a:spcAft>
+              <a:defRPr sz="1800" b="0">
+                <a:solidFill>
+                  <a:srgbClr val="EDF4FF"/>
+                </a:solidFill>
+                <a:latin typeface="DejaVu Sans"/>
+              </a:defRPr>
+            </a:pPr>
+            <a:r>
+              <a:t>9 earlier regression tests.</a:t>
+            </a:r>
+          </a:p>
+          <a:p>
+            <a:pPr>
+              <a:spcAft>
+                <a:spcPts val="800"/>
+              </a:spcAft>
+              <a:defRPr sz="1800" b="0">
+                <a:solidFill>
+                  <a:srgbClr val="EDF4FF"/>
+                </a:solidFill>
+                <a:latin typeface="DejaVu Sans"/>
+              </a:defRPr>
+            </a:pPr>
+            <a:r>
+              <a:t>9 viewer tests.</a:t>
+            </a:r>
+          </a:p>
+          <a:p>
+            <a:pPr>
+              <a:spcAft>
+                <a:spcPts val="800"/>
+              </a:spcAft>
+              <a:defRPr sz="1800" b="0">
+                <a:solidFill>
+                  <a:srgbClr val="EDF4FF"/>
+                </a:solidFill>
+                <a:latin typeface="DejaVu Sans"/>
+              </a:defRPr>
+            </a:pPr>
+            <a:r>
+              <a:t>Desktop and mobile checks.</a:t>
+            </a:r>
+          </a:p>
+        </p:txBody>
+      </p:sp>
+      <p:sp>
+        <p:nvSpPr>
+          <p:cNvPr id="20" name="Rounded Rectangle 19"/>
+          <p:cNvSpPr/>
+          <p:nvPr/>
+        </p:nvSpPr>
+        <p:spPr>
+          <a:xfrm>
+            <a:off x="8110727" y="2560320"/>
+            <a:ext cx="3520440" cy="2560320"/>
+          </a:xfrm>
+          <a:prstGeom prst="roundRect">
+            <a:avLst>
+              <a:gd name="adj" fmla="val 8000"/>
+            </a:avLst>
+          </a:prstGeom>
+          <a:solidFill>
+            <a:srgbClr val="111D30"/>
+          </a:solidFill>
+          <a:ln>
+            <a:solidFill>
+              <a:srgbClr val="24354B"/>
+            </a:solidFill>
+          </a:ln>
+        </p:spPr>
+        <p:style>
+          <a:lnRef idx="1">
+            <a:schemeClr val="accent1"/>
+          </a:lnRef>
+          <a:fillRef idx="3">
+            <a:schemeClr val="accent1"/>
+          </a:fillRef>
+          <a:effectRef idx="2">
+            <a:schemeClr val="accent1"/>
+          </a:effectRef>
+          <a:fontRef idx="minor">
+            <a:schemeClr val="lt1"/>
+          </a:fontRef>
+        </p:style>
+        <p:txBody>
+          <a:bodyPr rtlCol="0" anchor="ctr"/>
+          <a:lstStyle/>
+          <a:p>
+            <a:pPr algn="ctr"/>
+          </a:p>
+        </p:txBody>
+      </p:sp>
+      <p:sp>
+        <p:nvSpPr>
+          <p:cNvPr id="21" name="Rectangle 20"/>
+          <p:cNvSpPr/>
+          <p:nvPr/>
+        </p:nvSpPr>
+        <p:spPr>
+          <a:xfrm>
+            <a:off x="8275319" y="2743200"/>
             <a:ext cx="45720" cy="310896"/>
           </a:xfrm>
           <a:prstGeom prst="rect">
@@ -9201,14 +9152,14 @@
       </p:sp>
       <p:sp>
         <p:nvSpPr>
-          <p:cNvPr id="18" name="TextBox 17"/>
+          <p:cNvPr id="22" name="TextBox 21"/>
           <p:cNvSpPr txBox="1"/>
           <p:nvPr/>
         </p:nvSpPr>
         <p:spPr>
           <a:xfrm>
-            <a:off x="6519672" y="2679192"/>
-            <a:ext cx="4818888" cy="411480"/>
+            <a:off x="8439911" y="2770632"/>
+            <a:ext cx="3017520" cy="411480"/>
           </a:xfrm>
           <a:prstGeom prst="rect">
             <a:avLst/>
@@ -9233,21 +9184,21 @@
               </a:defRPr>
             </a:pPr>
             <a:r>
-              <a:t>WHAT IS ESTABLISHED</a:t>
-            </a:r>
-          </a:p>
-        </p:txBody>
-      </p:sp>
-      <p:sp>
-        <p:nvSpPr>
-          <p:cNvPr id="19" name="TextBox 18"/>
+              <a:t>TRY IT</a:t>
+            </a:r>
+          </a:p>
+        </p:txBody>
+      </p:sp>
+      <p:sp>
+        <p:nvSpPr>
+          <p:cNvPr id="23" name="TextBox 22"/>
           <p:cNvSpPr txBox="1"/>
           <p:nvPr/>
         </p:nvSpPr>
         <p:spPr>
           <a:xfrm>
-            <a:off x="6400800" y="3310128"/>
-            <a:ext cx="4901184" cy="1627632"/>
+            <a:off x="8321040" y="3401568"/>
+            <a:ext cx="3099816" cy="1600199"/>
           </a:xfrm>
           <a:prstGeom prst="rect">
             <a:avLst/>
@@ -9264,7 +9215,7 @@
               <a:spcAft>
                 <a:spcPts val="800"/>
               </a:spcAft>
-              <a:defRPr sz="1700" b="0">
+              <a:defRPr sz="1800" b="0">
                 <a:solidFill>
                   <a:srgbClr val="EDF4FF"/>
                 </a:solidFill>
@@ -9272,53 +9223,14 @@
               </a:defRPr>
             </a:pPr>
             <a:r>
-              <a:t>Four native beginner runs scored 1.0 with live character agents. Harder-case and RL results are reported separately. Continuous autonomous lives and scored ghost causes remain unfinished.</a:t>
-            </a:r>
-          </a:p>
-        </p:txBody>
-      </p:sp>
-      <p:sp>
-        <p:nvSpPr>
-          <p:cNvPr id="20" name="TextBox 19"/>
-          <p:cNvSpPr txBox="1"/>
-          <p:nvPr/>
-        </p:nvSpPr>
-        <p:spPr>
-          <a:xfrm>
-            <a:off x="685800" y="5330952"/>
-            <a:ext cx="10863072" cy="457200"/>
-          </a:xfrm>
-          <a:prstGeom prst="rect">
-            <a:avLst/>
-          </a:prstGeom>
-          <a:noFill/>
-        </p:spPr>
-        <p:txBody>
-          <a:bodyPr wrap="square" lIns="13716" rIns="13716" tIns="0" bIns="0">
-            <a:spAutoFit/>
-          </a:bodyPr>
-          <a:lstStyle/>
-          <a:p>
-            <a:pPr>
-              <a:spcAft>
-                <a:spcPts val="800"/>
-              </a:spcAft>
-              <a:defRPr sz="1600" b="0">
-                <a:solidFill>
-                  <a:srgbClr val="A2ADFF"/>
-                </a:solidFill>
-                <a:latin typeface="DejaVu Sans Mono"/>
-              </a:defRPr>
-            </a:pPr>
-            <a:r>
-              <a:t>docker compose up --build --abort-on-container-exit --exit-code-from harness</a:t>
-            </a:r>
-          </a:p>
-        </p:txBody>
-      </p:sp>
-      <p:sp>
-        <p:nvSpPr>
-          <p:cNvPr id="21" name="TextBox 20"/>
+              <a:t>Open the demo without signing in. Watch a recorded case, or enter your own API key to start a live investigation.</a:t>
+            </a:r>
+          </a:p>
+        </p:txBody>
+      </p:sp>
+      <p:sp>
+        <p:nvSpPr>
+          <p:cNvPr id="24" name="TextBox 23"/>
           <p:cNvSpPr txBox="1"/>
           <p:nvPr/>
         </p:nvSpPr>
@@ -9350,7 +9262,7 @@
               </a:defRPr>
             </a:pPr>
             <a:r>
-              <a:t>Source + baseline gates + raw runs + editable deck/PDF + security and audit evidence. Final character-model setup and submission are external.</a:t>
+              <a:t>A hosted beginner test scored 1.0. Difficult live cases remain unproven; a witness can refuse to disclose crucial evidence.</a:t>
             </a:r>
           </a:p>
         </p:txBody>
@@ -10058,7 +9970,7 @@
               </a:defRPr>
             </a:pPr>
             <a:r>
-              <a:t>Private repository · GitHub access required</a:t>
+              <a:t>Public source and project documentation</a:t>
             </a:r>
           </a:p>
         </p:txBody>
@@ -10249,7 +10161,7 @@
               </a:defRPr>
             </a:pPr>
             <a:r>
-              <a:t>Protected demo · sign-in required</a:t>
+              <a:t>Open access · no sign-in</a:t>
             </a:r>
           </a:p>
         </p:txBody>
@@ -10568,7 +10480,7 @@
               </a:defRPr>
             </a:pPr>
             <a:r>
-              <a:t>MERCY HOUSE  /  EVIDENCE-GROUNDED AGENT EVALUATION</a:t>
+              <a:t>MERCY HOUSE  /  THE IDEA</a:t>
             </a:r>
           </a:p>
         </p:txBody>
@@ -10607,7 +10519,7 @@
               </a:defRPr>
             </a:pPr>
             <a:r>
-              <a:t>Truth needs a chain of evidence.</a:t>
+              <a:t>A murder. Many accounts. One investigation.</a:t>
             </a:r>
           </a:p>
         </p:txBody>
@@ -10741,8 +10653,8 @@
         </p:nvSpPr>
         <p:spPr>
           <a:xfrm>
-            <a:off x="594360" y="1874519"/>
-            <a:ext cx="5486400" cy="1051560"/>
+            <a:off x="640080" y="1965960"/>
+            <a:ext cx="4937760" cy="1051560"/>
           </a:xfrm>
           <a:prstGeom prst="rect">
             <a:avLst/>
@@ -10767,7 +10679,7 @@
               </a:defRPr>
             </a:pPr>
             <a:r>
-              <a:t>An investigation world for language agents.</a:t>
+              <a:t>Bhairav’s Hollow, 1900.</a:t>
             </a:r>
           </a:p>
         </p:txBody>
@@ -10780,8 +10692,8 @@
         </p:nvSpPr>
         <p:spPr>
           <a:xfrm>
-            <a:off x="594360" y="3072384"/>
-            <a:ext cx="5212080" cy="1051560"/>
+            <a:off x="640080" y="2926080"/>
+            <a:ext cx="4892040" cy="1371600"/>
           </a:xfrm>
           <a:prstGeom prst="rect">
             <a:avLst/>
@@ -10798,7 +10710,7 @@
               <a:spcAft>
                 <a:spcPts val="800"/>
               </a:spcAft>
-              <a:defRPr sz="2000" b="0">
+              <a:defRPr sz="2100" b="0">
                 <a:solidFill>
                   <a:srgbClr val="EDF4FF"/>
                 </a:solidFill>
@@ -10806,7 +10718,7 @@
               </a:defRPr>
             </a:pPr>
             <a:r>
-              <a:t>A snowbound town in 1900. Private lives, limited witnesses and evidence that can point at the wrong person.</a:t>
+              <a:t>A physician dies while trying to expose old records. The detective knows the people involved. Some accounts are mistaken; some evidence was planted.</a:t>
             </a:r>
           </a:p>
         </p:txBody>
@@ -10827,8 +10739,8 @@
         </p:blipFill>
         <p:spPr>
           <a:xfrm>
-            <a:off x="6321769" y="1874519"/>
-            <a:ext cx="5141540" cy="3749039"/>
+            <a:off x="5819502" y="1828800"/>
+            <a:ext cx="5643154" cy="4114800"/>
           </a:xfrm>
           <a:prstGeom prst="rect">
             <a:avLst/>
@@ -10837,53 +10749,14 @@
       </p:pic>
       <p:sp>
         <p:nvSpPr>
-          <p:cNvPr id="15" name="TextBox 14"/>
-          <p:cNvSpPr txBox="1"/>
-          <p:nvPr/>
-        </p:nvSpPr>
-        <p:spPr>
-          <a:xfrm>
-            <a:off x="6355080" y="5660136"/>
-            <a:ext cx="5120640" cy="228600"/>
-          </a:xfrm>
-          <a:prstGeom prst="rect">
-            <a:avLst/>
-          </a:prstGeom>
-          <a:noFill/>
-        </p:spPr>
-        <p:txBody>
-          <a:bodyPr wrap="square" lIns="13716" rIns="13716" tIns="0" bIns="0">
-            <a:spAutoFit/>
-          </a:bodyPr>
-          <a:lstStyle/>
-          <a:p>
-            <a:pPr>
-              <a:spcAft>
-                <a:spcPts val="800"/>
-              </a:spcAft>
-              <a:defRPr sz="1000" b="0">
-                <a:solidFill>
-                  <a:srgbClr val="A4B6CD"/>
-                </a:solidFill>
-                <a:latin typeface="DejaVu Sans"/>
-              </a:defRPr>
-            </a:pPr>
-            <a:r>
-              <a:t>Shown: scripted inquest reference, not a live solve.</a:t>
-            </a:r>
-          </a:p>
-        </p:txBody>
-      </p:sp>
-      <p:sp>
-        <p:nvSpPr>
-          <p:cNvPr id="16" name="Rounded Rectangle 15"/>
+          <p:cNvPr id="15" name="Rounded Rectangle 14"/>
           <p:cNvSpPr/>
           <p:nvPr/>
         </p:nvSpPr>
         <p:spPr>
           <a:xfrm>
-            <a:off x="594360" y="4709160"/>
-            <a:ext cx="1554480" cy="1024128"/>
+            <a:off x="640080" y="4663440"/>
+            <a:ext cx="1572768" cy="1005840"/>
           </a:xfrm>
           <a:prstGeom prst="roundRect">
             <a:avLst>
@@ -10923,14 +10796,14 @@
       </p:sp>
       <p:sp>
         <p:nvSpPr>
-          <p:cNvPr id="17" name="TextBox 16"/>
+          <p:cNvPr id="16" name="TextBox 15"/>
           <p:cNvSpPr txBox="1"/>
           <p:nvPr/>
         </p:nvSpPr>
         <p:spPr>
           <a:xfrm>
-            <a:off x="740664" y="4791456"/>
-            <a:ext cx="1188720" cy="438912"/>
+            <a:off x="786384" y="4754880"/>
+            <a:ext cx="1280160" cy="411480"/>
           </a:xfrm>
           <a:prstGeom prst="rect">
             <a:avLst/>
@@ -10947,7 +10820,7 @@
               <a:spcAft>
                 <a:spcPts val="800"/>
               </a:spcAft>
-              <a:defRPr sz="2800" b="1">
+              <a:defRPr sz="2700" b="1">
                 <a:solidFill>
                   <a:srgbClr val="66E6CD"/>
                 </a:solidFill>
@@ -10962,14 +10835,14 @@
       </p:sp>
       <p:sp>
         <p:nvSpPr>
-          <p:cNvPr id="18" name="TextBox 17"/>
+          <p:cNvPr id="17" name="TextBox 16"/>
           <p:cNvSpPr txBox="1"/>
           <p:nvPr/>
         </p:nvSpPr>
         <p:spPr>
           <a:xfrm>
-            <a:off x="740664" y="5358384"/>
-            <a:ext cx="1280160" cy="274320"/>
+            <a:off x="786384" y="5294376"/>
+            <a:ext cx="1280160" cy="228600"/>
           </a:xfrm>
           <a:prstGeom prst="rect">
             <a:avLst/>
@@ -10986,7 +10859,7 @@
               <a:spcAft>
                 <a:spcPts val="800"/>
               </a:spcAft>
-              <a:defRPr sz="800" b="0">
+              <a:defRPr sz="900" b="0">
                 <a:solidFill>
                   <a:srgbClr val="A4B6CD"/>
                 </a:solidFill>
@@ -10994,21 +10867,21 @@
               </a:defRPr>
             </a:pPr>
             <a:r>
-              <a:t>PUBLIC TASKS</a:t>
-            </a:r>
-          </a:p>
-        </p:txBody>
-      </p:sp>
-      <p:sp>
-        <p:nvSpPr>
-          <p:cNvPr id="19" name="Rounded Rectangle 18"/>
+              <a:t>TASKS</a:t>
+            </a:r>
+          </a:p>
+        </p:txBody>
+      </p:sp>
+      <p:sp>
+        <p:nvSpPr>
+          <p:cNvPr id="18" name="Rounded Rectangle 17"/>
           <p:cNvSpPr/>
           <p:nvPr/>
         </p:nvSpPr>
         <p:spPr>
           <a:xfrm>
-            <a:off x="2377440" y="4709160"/>
-            <a:ext cx="1554480" cy="1024128"/>
+            <a:off x="2377440" y="4663440"/>
+            <a:ext cx="1572768" cy="1005840"/>
           </a:xfrm>
           <a:prstGeom prst="roundRect">
             <a:avLst>
@@ -11048,14 +10921,14 @@
       </p:sp>
       <p:sp>
         <p:nvSpPr>
-          <p:cNvPr id="20" name="TextBox 19"/>
+          <p:cNvPr id="19" name="TextBox 18"/>
           <p:cNvSpPr txBox="1"/>
           <p:nvPr/>
         </p:nvSpPr>
         <p:spPr>
           <a:xfrm>
-            <a:off x="2523744" y="4791456"/>
-            <a:ext cx="1188720" cy="438912"/>
+            <a:off x="2523744" y="4754880"/>
+            <a:ext cx="1280160" cy="411480"/>
           </a:xfrm>
           <a:prstGeom prst="rect">
             <a:avLst/>
@@ -11072,7 +10945,7 @@
               <a:spcAft>
                 <a:spcPts val="800"/>
               </a:spcAft>
-              <a:defRPr sz="2800" b="1">
+              <a:defRPr sz="2700" b="1">
                 <a:solidFill>
                   <a:srgbClr val="66E6CD"/>
                 </a:solidFill>
@@ -11087,14 +10960,14 @@
       </p:sp>
       <p:sp>
         <p:nvSpPr>
-          <p:cNvPr id="21" name="TextBox 20"/>
+          <p:cNvPr id="20" name="TextBox 19"/>
           <p:cNvSpPr txBox="1"/>
           <p:nvPr/>
         </p:nvSpPr>
         <p:spPr>
           <a:xfrm>
-            <a:off x="2523744" y="5358384"/>
-            <a:ext cx="1280160" cy="274320"/>
+            <a:off x="2523744" y="5294376"/>
+            <a:ext cx="1280160" cy="228600"/>
           </a:xfrm>
           <a:prstGeom prst="rect">
             <a:avLst/>
@@ -11111,7 +10984,7 @@
               <a:spcAft>
                 <a:spcPts val="800"/>
               </a:spcAft>
-              <a:defRPr sz="800" b="0">
+              <a:defRPr sz="900" b="0">
                 <a:solidFill>
                   <a:srgbClr val="A4B6CD"/>
                 </a:solidFill>
@@ -11126,14 +10999,14 @@
       </p:sp>
       <p:sp>
         <p:nvSpPr>
-          <p:cNvPr id="22" name="Rounded Rectangle 21"/>
+          <p:cNvPr id="21" name="Rounded Rectangle 20"/>
           <p:cNvSpPr/>
           <p:nvPr/>
         </p:nvSpPr>
         <p:spPr>
           <a:xfrm>
-            <a:off x="4160520" y="4709160"/>
-            <a:ext cx="1554480" cy="1024128"/>
+            <a:off x="4114800" y="4663440"/>
+            <a:ext cx="1572768" cy="1005840"/>
           </a:xfrm>
           <a:prstGeom prst="roundRect">
             <a:avLst>
@@ -11173,14 +11046,14 @@
       </p:sp>
       <p:sp>
         <p:nvSpPr>
-          <p:cNvPr id="23" name="TextBox 22"/>
+          <p:cNvPr id="22" name="TextBox 21"/>
           <p:cNvSpPr txBox="1"/>
           <p:nvPr/>
         </p:nvSpPr>
         <p:spPr>
           <a:xfrm>
-            <a:off x="4306824" y="4791456"/>
-            <a:ext cx="1188720" cy="438912"/>
+            <a:off x="4261104" y="4754880"/>
+            <a:ext cx="1280160" cy="411480"/>
           </a:xfrm>
           <a:prstGeom prst="rect">
             <a:avLst/>
@@ -11197,7 +11070,7 @@
               <a:spcAft>
                 <a:spcPts val="800"/>
               </a:spcAft>
-              <a:defRPr sz="2800" b="1">
+              <a:defRPr sz="2700" b="1">
                 <a:solidFill>
                   <a:srgbClr val="66E6CD"/>
                 </a:solidFill>
@@ -11212,14 +11085,14 @@
       </p:sp>
       <p:sp>
         <p:nvSpPr>
-          <p:cNvPr id="24" name="TextBox 23"/>
+          <p:cNvPr id="23" name="TextBox 22"/>
           <p:cNvSpPr txBox="1"/>
           <p:nvPr/>
         </p:nvSpPr>
         <p:spPr>
           <a:xfrm>
-            <a:off x="4306824" y="5358384"/>
-            <a:ext cx="1280160" cy="274320"/>
+            <a:off x="4261104" y="5294376"/>
+            <a:ext cx="1280160" cy="228600"/>
           </a:xfrm>
           <a:prstGeom prst="rect">
             <a:avLst/>
@@ -11236,7 +11109,7 @@
               <a:spcAft>
                 <a:spcPts val="800"/>
               </a:spcAft>
-              <a:defRPr sz="800" b="0">
+              <a:defRPr sz="900" b="0">
                 <a:solidFill>
                   <a:srgbClr val="A4B6CD"/>
                 </a:solidFill>
@@ -11244,14 +11117,14 @@
               </a:defRPr>
             </a:pPr>
             <a:r>
-              <a:t>DESIGNED LEVELS</a:t>
-            </a:r>
-          </a:p>
-        </p:txBody>
-      </p:sp>
-      <p:sp>
-        <p:nvSpPr>
-          <p:cNvPr id="25" name="TextBox 24"/>
+              <a:t>LEVELS</a:t>
+            </a:r>
+          </a:p>
+        </p:txBody>
+      </p:sp>
+      <p:sp>
+        <p:nvSpPr>
+          <p:cNvPr id="24" name="TextBox 23"/>
           <p:cNvSpPr txBox="1"/>
           <p:nvPr/>
         </p:nvSpPr>
@@ -11283,7 +11156,7 @@
               </a:defRPr>
             </a:pPr>
             <a:r>
-              <a:t>The competition deliverable is the environment. Judges supply their detective model.</a:t>
+              <a:t>Image: a labeled recorded reference investigation. It is a demonstration, not a model-performance result.</a:t>
             </a:r>
           </a:p>
         </p:txBody>
@@ -11563,7 +11436,7 @@
               </a:defRPr>
             </a:pPr>
             <a:r>
-              <a:t>MERCY HOUSE  /  WHAT THE ENVIRONMENT ASKS AN AGENT TO DO</a:t>
+              <a:t>MERCY HOUSE  /  HOW TO PLAY</a:t>
             </a:r>
           </a:p>
         </p:txBody>
@@ -11602,7 +11475,7 @@
               </a:defRPr>
             </a:pPr>
             <a:r>
-              <a:t>The agent controls the investigation.</a:t>
+              <a:t>The detective chooses every next step.</a:t>
             </a:r>
           </a:p>
         </p:txBody>
@@ -11641,7 +11514,7 @@
               </a:defRPr>
             </a:pPr>
             <a:r>
-              <a:t>It starts with its own biography and the local scene. The answer and hidden event journal remain private.</a:t>
+              <a:t>Start at the scene with a personal history and an assignment. No solution is supplied.</a:t>
             </a:r>
           </a:p>
         </p:txBody>
@@ -11775,8 +11648,8 @@
         </p:nvSpPr>
         <p:spPr>
           <a:xfrm>
-            <a:off x="594360" y="2468880"/>
-            <a:ext cx="2651760" cy="2331720"/>
+            <a:off x="594360" y="2542032"/>
+            <a:ext cx="2651760" cy="2286000"/>
           </a:xfrm>
           <a:prstGeom prst="roundRect">
             <a:avLst>
@@ -11822,7 +11695,7 @@
         </p:nvSpPr>
         <p:spPr>
           <a:xfrm>
-            <a:off x="758952" y="2651760"/>
+            <a:off x="758952" y="2724912"/>
             <a:ext cx="45720" cy="310896"/>
           </a:xfrm>
           <a:prstGeom prst="rect">
@@ -11865,7 +11738,7 @@
         </p:nvSpPr>
         <p:spPr>
           <a:xfrm>
-            <a:off x="923544" y="2679192"/>
+            <a:off x="923544" y="2752344"/>
             <a:ext cx="2148839" cy="411480"/>
           </a:xfrm>
           <a:prstGeom prst="rect">
@@ -11891,7 +11764,7 @@
               </a:defRPr>
             </a:pPr>
             <a:r>
-              <a:t>01  EXPLORE</a:t>
+              <a:t>EXPLORE</a:t>
             </a:r>
           </a:p>
         </p:txBody>
@@ -11904,8 +11777,8 @@
         </p:nvSpPr>
         <p:spPr>
           <a:xfrm>
-            <a:off x="804672" y="3310128"/>
-            <a:ext cx="2231136" cy="1371599"/>
+            <a:off x="804672" y="3383279"/>
+            <a:ext cx="2231136" cy="1325880"/>
           </a:xfrm>
           <a:prstGeom prst="rect">
             <a:avLst/>
@@ -11922,7 +11795,7 @@
               <a:spcAft>
                 <a:spcPts val="800"/>
               </a:spcAft>
-              <a:defRPr sz="1600" b="0">
+              <a:defRPr sz="1700" b="0">
                 <a:solidFill>
                   <a:srgbClr val="EDF4FF"/>
                 </a:solidFill>
@@ -11930,7 +11803,7 @@
               </a:defRPr>
             </a:pPr>
             <a:r>
-              <a:t>Choose a place and inspect visible features.</a:t>
+              <a:t>Choose where to go and what to search.</a:t>
             </a:r>
           </a:p>
         </p:txBody>
@@ -11943,8 +11816,8 @@
         </p:nvSpPr>
         <p:spPr>
           <a:xfrm>
-            <a:off x="3410712" y="2468880"/>
-            <a:ext cx="2651760" cy="2331720"/>
+            <a:off x="3410712" y="2542032"/>
+            <a:ext cx="2651760" cy="2286000"/>
           </a:xfrm>
           <a:prstGeom prst="roundRect">
             <a:avLst>
@@ -11990,7 +11863,7 @@
         </p:nvSpPr>
         <p:spPr>
           <a:xfrm>
-            <a:off x="3575304" y="2651760"/>
+            <a:off x="3575304" y="2724912"/>
             <a:ext cx="45720" cy="310896"/>
           </a:xfrm>
           <a:prstGeom prst="rect">
@@ -12033,7 +11906,7 @@
         </p:nvSpPr>
         <p:spPr>
           <a:xfrm>
-            <a:off x="3739896" y="2679192"/>
+            <a:off x="3739896" y="2752344"/>
             <a:ext cx="2148839" cy="411480"/>
           </a:xfrm>
           <a:prstGeom prst="rect">
@@ -12059,7 +11932,7 @@
               </a:defRPr>
             </a:pPr>
             <a:r>
-              <a:t>02  INTERVIEW</a:t>
+              <a:t>QUESTION</a:t>
             </a:r>
           </a:p>
         </p:txBody>
@@ -12072,8 +11945,8 @@
         </p:nvSpPr>
         <p:spPr>
           <a:xfrm>
-            <a:off x="3621024" y="3310128"/>
-            <a:ext cx="2231136" cy="1371599"/>
+            <a:off x="3621024" y="3383279"/>
+            <a:ext cx="2231136" cy="1325880"/>
           </a:xfrm>
           <a:prstGeom prst="rect">
             <a:avLst/>
@@ -12090,7 +11963,7 @@
               <a:spcAft>
                 <a:spcPts val="800"/>
               </a:spcAft>
-              <a:defRPr sz="1600" b="0">
+              <a:defRPr sz="1700" b="0">
                 <a:solidFill>
                   <a:srgbClr val="EDF4FF"/>
                 </a:solidFill>
@@ -12098,7 +11971,7 @@
               </a:defRPr>
             </a:pPr>
             <a:r>
-              <a:t>Question people; separate experience from hearsay.</a:t>
+              <a:t>Ask people what they saw, heard or believe.</a:t>
             </a:r>
           </a:p>
         </p:txBody>
@@ -12111,8 +11984,8 @@
         </p:nvSpPr>
         <p:spPr>
           <a:xfrm>
-            <a:off x="6227064" y="2468880"/>
-            <a:ext cx="2651760" cy="2331720"/>
+            <a:off x="6227064" y="2542032"/>
+            <a:ext cx="2651760" cy="2286000"/>
           </a:xfrm>
           <a:prstGeom prst="roundRect">
             <a:avLst>
@@ -12158,7 +12031,7 @@
         </p:nvSpPr>
         <p:spPr>
           <a:xfrm>
-            <a:off x="6391656" y="2651760"/>
+            <a:off x="6391656" y="2724912"/>
             <a:ext cx="45720" cy="310896"/>
           </a:xfrm>
           <a:prstGeom prst="rect">
@@ -12201,7 +12074,7 @@
         </p:nvSpPr>
         <p:spPr>
           <a:xfrm>
-            <a:off x="6556248" y="2679192"/>
+            <a:off x="6556248" y="2752344"/>
             <a:ext cx="2148839" cy="411480"/>
           </a:xfrm>
           <a:prstGeom prst="rect">
@@ -12227,7 +12100,7 @@
               </a:defRPr>
             </a:pPr>
             <a:r>
-              <a:t>03  TEST</a:t>
+              <a:t>CHECK</a:t>
             </a:r>
           </a:p>
         </p:txBody>
@@ -12240,8 +12113,8 @@
         </p:nvSpPr>
         <p:spPr>
           <a:xfrm>
-            <a:off x="6437376" y="3310128"/>
-            <a:ext cx="2231136" cy="1371599"/>
+            <a:off x="6437376" y="3383279"/>
+            <a:ext cx="2231136" cy="1325880"/>
           </a:xfrm>
           <a:prstGeom prst="rect">
             <a:avLst/>
@@ -12258,7 +12131,7 @@
               <a:spcAft>
                 <a:spcPts val="800"/>
               </a:spcAft>
-              <a:defRPr sz="1600" b="0">
+              <a:defRPr sz="1700" b="0">
                 <a:solidFill>
                   <a:srgbClr val="EDF4FF"/>
                 </a:solidFill>
@@ -12266,7 +12139,7 @@
               </a:defRPr>
             </a:pPr>
             <a:r>
-              <a:t>Compare acquired documents and physical traces.</a:t>
+              <a:t>Compare documents and physical evidence.</a:t>
             </a:r>
           </a:p>
         </p:txBody>
@@ -12279,8 +12152,8 @@
         </p:nvSpPr>
         <p:spPr>
           <a:xfrm>
-            <a:off x="9043416" y="2468880"/>
-            <a:ext cx="2651760" cy="2331720"/>
+            <a:off x="9043416" y="2542032"/>
+            <a:ext cx="2651760" cy="2286000"/>
           </a:xfrm>
           <a:prstGeom prst="roundRect">
             <a:avLst>
@@ -12326,7 +12199,7 @@
         </p:nvSpPr>
         <p:spPr>
           <a:xfrm>
-            <a:off x="9208008" y="2651760"/>
+            <a:off x="9208008" y="2724912"/>
             <a:ext cx="45720" cy="310896"/>
           </a:xfrm>
           <a:prstGeom prst="rect">
@@ -12369,7 +12242,7 @@
         </p:nvSpPr>
         <p:spPr>
           <a:xfrm>
-            <a:off x="9372600" y="2679192"/>
+            <a:off x="9372600" y="2752344"/>
             <a:ext cx="2148839" cy="411480"/>
           </a:xfrm>
           <a:prstGeom prst="rect">
@@ -12395,7 +12268,7 @@
               </a:defRPr>
             </a:pPr>
             <a:r>
-              <a:t>04  REPORT</a:t>
+              <a:t>REPORT</a:t>
             </a:r>
           </a:p>
         </p:txBody>
@@ -12408,47 +12281,8 @@
         </p:nvSpPr>
         <p:spPr>
           <a:xfrm>
-            <a:off x="9253728" y="3310128"/>
-            <a:ext cx="2231136" cy="1371599"/>
-          </a:xfrm>
-          <a:prstGeom prst="rect">
-            <a:avLst/>
-          </a:prstGeom>
-          <a:noFill/>
-        </p:spPr>
-        <p:txBody>
-          <a:bodyPr wrap="square" lIns="13716" rIns="13716" tIns="0" bIns="0">
-            <a:spAutoFit/>
-          </a:bodyPr>
-          <a:lstStyle/>
-          <a:p>
-            <a:pPr>
-              <a:spcAft>
-                <a:spcPts val="800"/>
-              </a:spcAft>
-              <a:defRPr sz="1600" b="0">
-                <a:solidFill>
-                  <a:srgbClr val="EDF4FF"/>
-                </a:solidFill>
-                <a:latin typeface="DejaVu Sans"/>
-              </a:defRPr>
-            </a:pPr>
-            <a:r>
-              <a:t>Cite sources for each conclusion; retain uncertainty.</a:t>
-            </a:r>
-          </a:p>
-        </p:txBody>
-      </p:sp>
-      <p:sp>
-        <p:nvSpPr>
-          <p:cNvPr id="29" name="TextBox 28"/>
-          <p:cNvSpPr txBox="1"/>
-          <p:nvPr/>
-        </p:nvSpPr>
-        <p:spPr>
-          <a:xfrm>
-            <a:off x="658368" y="5166360"/>
-            <a:ext cx="10881360" cy="658368"/>
+            <a:off x="9253728" y="3383279"/>
+            <a:ext cx="2231136" cy="1325880"/>
           </a:xfrm>
           <a:prstGeom prst="rect">
             <a:avLst/>
@@ -12467,13 +12301,52 @@
               </a:spcAft>
               <a:defRPr sz="1700" b="0">
                 <a:solidFill>
+                  <a:srgbClr val="EDF4FF"/>
+                </a:solidFill>
+                <a:latin typeface="DejaVu Sans"/>
+              </a:defRPr>
+            </a:pPr>
+            <a:r>
+              <a:t>Make conclusions and cite the records behind them.</a:t>
+            </a:r>
+          </a:p>
+        </p:txBody>
+      </p:sp>
+      <p:sp>
+        <p:nvSpPr>
+          <p:cNvPr id="29" name="TextBox 28"/>
+          <p:cNvSpPr txBox="1"/>
+          <p:nvPr/>
+        </p:nvSpPr>
+        <p:spPr>
+          <a:xfrm>
+            <a:off x="685800" y="5212080"/>
+            <a:ext cx="10789920" cy="548640"/>
+          </a:xfrm>
+          <a:prstGeom prst="rect">
+            <a:avLst/>
+          </a:prstGeom>
+          <a:noFill/>
+        </p:spPr>
+        <p:txBody>
+          <a:bodyPr wrap="square" lIns="13716" rIns="13716" tIns="0" bIns="0">
+            <a:spAutoFit/>
+          </a:bodyPr>
+          <a:lstStyle/>
+          <a:p>
+            <a:pPr>
+              <a:spcAft>
+                <a:spcPts val="800"/>
+              </a:spcAft>
+              <a:defRPr sz="1900" b="0">
+                <a:solidFill>
                   <a:srgbClr val="A4B6CD"/>
                 </a:solidFill>
                 <a:latin typeface="DejaVu Sans"/>
               </a:defRPr>
             </a:pPr>
             <a:r>
-              <a:t>In the flagship case, physician Mira Sen dies while exposing old institutional records. The detective’s sister, former partner and trusted constable connect him to the inquiry, putting loyalty in conflict with proof.</a:t>
+              <a:t>The detective can be wrong, follow a false lead, change its mind or finish with unanswered questions.</a:t>
             </a:r>
           </a:p>
         </p:txBody>
@@ -12512,7 +12385,7 @@
               </a:defRPr>
             </a:pPr>
             <a:r>
-              <a:t>Eight task scopes across four causal families; difficulty labels describe design complexity, not measured success bands.</a:t>
+              <a:t>Judges bring their detective model. Our submission provides the world, tools, characters and scoring.</a:t>
             </a:r>
           </a:p>
         </p:txBody>
@@ -12792,7 +12665,7 @@
               </a:defRPr>
             </a:pPr>
             <a:r>
-              <a:t>MERCY HOUSE  /  WORLD STATE AND CAUSAL TRACES</a:t>
+              <a:t>MERCY HOUSE  /  WHAT HAPPENS BEFORE THE DETECTIVE ARRIVES</a:t>
             </a:r>
           </a:p>
         </p:txBody>
@@ -12831,7 +12704,7 @@
               </a:defRPr>
             </a:pPr>
             <a:r>
-              <a:t>The incident executes before arrival.</a:t>
+              <a:t>Actions create the clues.</a:t>
             </a:r>
           </a:p>
         </p:txBody>
@@ -12870,7 +12743,7 @@
               </a:defRPr>
             </a:pPr>
             <a:r>
-              <a:t>Validated transitions produce the injury, objects and local recollections that the detective can investigate.</a:t>
+              <a:t>The engine checks who was present, what they could do and what they could actually observe.</a:t>
             </a:r>
           </a:p>
         </p:txBody>
@@ -13004,8 +12877,8 @@
         </p:nvSpPr>
         <p:spPr>
           <a:xfrm>
-            <a:off x="594360" y="2514600"/>
-            <a:ext cx="2651760" cy="1874519"/>
+            <a:off x="594360" y="2560320"/>
+            <a:ext cx="3575304" cy="2148840"/>
           </a:xfrm>
           <a:prstGeom prst="roundRect">
             <a:avLst>
@@ -13051,7 +12924,7 @@
         </p:nvSpPr>
         <p:spPr>
           <a:xfrm>
-            <a:off x="758952" y="2697480"/>
+            <a:off x="758952" y="2743200"/>
             <a:ext cx="45720" cy="310896"/>
           </a:xfrm>
           <a:prstGeom prst="rect">
@@ -13094,8 +12967,8 @@
         </p:nvSpPr>
         <p:spPr>
           <a:xfrm>
-            <a:off x="923544" y="2724912"/>
-            <a:ext cx="2148839" cy="411480"/>
+            <a:off x="923544" y="2770632"/>
+            <a:ext cx="3072384" cy="411480"/>
           </a:xfrm>
           <a:prstGeom prst="rect">
             <a:avLst/>
@@ -13120,7 +12993,7 @@
               </a:defRPr>
             </a:pPr>
             <a:r>
-              <a:t>ACTION TAPE</a:t>
+              <a:t>THE INCIDENT</a:t>
             </a:r>
           </a:p>
         </p:txBody>
@@ -13133,8 +13006,8 @@
         </p:nvSpPr>
         <p:spPr>
           <a:xfrm>
-            <a:off x="804672" y="3355848"/>
-            <a:ext cx="2231136" cy="914399"/>
+            <a:off x="804672" y="3401568"/>
+            <a:ext cx="3154680" cy="1188720"/>
           </a:xfrm>
           <a:prstGeom prst="rect">
             <a:avLst/>
@@ -13151,7 +13024,7 @@
               <a:spcAft>
                 <a:spcPts val="800"/>
               </a:spcAft>
-              <a:defRPr sz="1500" b="0">
+              <a:defRPr sz="1800" b="0">
                 <a:solidFill>
                   <a:srgbClr val="EDF4FF"/>
                 </a:solidFill>
@@ -13159,23 +13032,7 @@
               </a:defRPr>
             </a:pPr>
             <a:r>
-              <a:t>Recorded or authored</a:t>
-            </a:r>
-          </a:p>
-          <a:p>
-            <a:pPr>
-              <a:spcAft>
-                <a:spcPts val="800"/>
-              </a:spcAft>
-              <a:defRPr sz="1500" b="0">
-                <a:solidFill>
-                  <a:srgbClr val="EDF4FF"/>
-                </a:solidFill>
-                <a:latin typeface="DejaVu Sans"/>
-              </a:defRPr>
-            </a:pPr>
-            <a:r>
-              <a:t>seeded decisions</a:t>
+              <a:t>Characters move, act and handle objects.</a:t>
             </a:r>
           </a:p>
         </p:txBody>
@@ -13188,8 +13045,8 @@
         </p:nvSpPr>
         <p:spPr>
           <a:xfrm>
-            <a:off x="3410712" y="2514600"/>
-            <a:ext cx="2651760" cy="1874519"/>
+            <a:off x="4370832" y="2560320"/>
+            <a:ext cx="3575304" cy="2148840"/>
           </a:xfrm>
           <a:prstGeom prst="roundRect">
             <a:avLst>
@@ -13235,14 +13092,14 @@
         </p:nvSpPr>
         <p:spPr>
           <a:xfrm>
-            <a:off x="3575304" y="2697480"/>
+            <a:off x="4535424" y="2743200"/>
             <a:ext cx="45720" cy="310896"/>
           </a:xfrm>
           <a:prstGeom prst="rect">
             <a:avLst/>
           </a:prstGeom>
           <a:solidFill>
-            <a:srgbClr val="66E6CD"/>
+            <a:srgbClr val="A2ADFF"/>
           </a:solidFill>
           <a:ln>
             <a:noFill/>
@@ -13278,8 +13135,8 @@
         </p:nvSpPr>
         <p:spPr>
           <a:xfrm>
-            <a:off x="3739896" y="2724912"/>
-            <a:ext cx="2148839" cy="411480"/>
+            <a:off x="4700016" y="2770632"/>
+            <a:ext cx="3072384" cy="411480"/>
           </a:xfrm>
           <a:prstGeom prst="rect">
             <a:avLst/>
@@ -13298,13 +13155,13 @@
               </a:spcAft>
               <a:defRPr sz="1600" b="1">
                 <a:solidFill>
-                  <a:srgbClr val="66E6CD"/>
+                  <a:srgbClr val="A2ADFF"/>
                 </a:solidFill>
                 <a:latin typeface="DejaVu Sans"/>
               </a:defRPr>
             </a:pPr>
             <a:r>
-              <a:t>WORLD ENGINE</a:t>
+              <a:t>THE CONSEQUENCES</a:t>
             </a:r>
           </a:p>
         </p:txBody>
@@ -13317,8 +13174,8 @@
         </p:nvSpPr>
         <p:spPr>
           <a:xfrm>
-            <a:off x="3621024" y="3355848"/>
-            <a:ext cx="2231136" cy="914399"/>
+            <a:off x="4581144" y="3401568"/>
+            <a:ext cx="3154680" cy="1188720"/>
           </a:xfrm>
           <a:prstGeom prst="rect">
             <a:avLst/>
@@ -13335,7 +13192,7 @@
               <a:spcAft>
                 <a:spcPts val="800"/>
               </a:spcAft>
-              <a:defRPr sz="1500" b="0">
+              <a:defRPr sz="1800" b="0">
                 <a:solidFill>
                   <a:srgbClr val="EDF4FF"/>
                 </a:solidFill>
@@ -13343,23 +13200,7 @@
               </a:defRPr>
             </a:pPr>
             <a:r>
-              <a:t>Movement, possession,</a:t>
-            </a:r>
-          </a:p>
-          <a:p>
-            <a:pPr>
-              <a:spcAft>
-                <a:spcPts val="800"/>
-              </a:spcAft>
-              <a:defRPr sz="1500" b="0">
-                <a:solidFill>
-                  <a:srgbClr val="EDF4FF"/>
-                </a:solidFill>
-                <a:latin typeface="DejaVu Sans"/>
-              </a:defRPr>
-            </a:pPr>
-            <a:r>
-              <a:t>attack and delivery</a:t>
+              <a:t>The engine records injuries and physical changes.</a:t>
             </a:r>
           </a:p>
         </p:txBody>
@@ -13372,8 +13213,8 @@
         </p:nvSpPr>
         <p:spPr>
           <a:xfrm>
-            <a:off x="6227064" y="2514600"/>
-            <a:ext cx="2651760" cy="1874519"/>
+            <a:off x="8147304" y="2560320"/>
+            <a:ext cx="3575304" cy="2148840"/>
           </a:xfrm>
           <a:prstGeom prst="roundRect">
             <a:avLst>
@@ -13419,375 +13260,7 @@
         </p:nvSpPr>
         <p:spPr>
           <a:xfrm>
-            <a:off x="6391656" y="2697480"/>
-            <a:ext cx="45720" cy="310896"/>
-          </a:xfrm>
-          <a:prstGeom prst="rect">
-            <a:avLst/>
-          </a:prstGeom>
-          <a:solidFill>
-            <a:srgbClr val="66E6CD"/>
-          </a:solidFill>
-          <a:ln>
-            <a:noFill/>
-          </a:ln>
-        </p:spPr>
-        <p:style>
-          <a:lnRef idx="1">
-            <a:schemeClr val="accent1"/>
-          </a:lnRef>
-          <a:fillRef idx="3">
-            <a:schemeClr val="accent1"/>
-          </a:fillRef>
-          <a:effectRef idx="2">
-            <a:schemeClr val="accent1"/>
-          </a:effectRef>
-          <a:fontRef idx="minor">
-            <a:schemeClr val="lt1"/>
-          </a:fontRef>
-        </p:style>
-        <p:txBody>
-          <a:bodyPr rtlCol="0" anchor="ctr"/>
-          <a:lstStyle/>
-          <a:p>
-            <a:pPr algn="ctr"/>
-          </a:p>
-        </p:txBody>
-      </p:sp>
-      <p:sp>
-        <p:nvSpPr>
-          <p:cNvPr id="23" name="TextBox 22"/>
-          <p:cNvSpPr txBox="1"/>
-          <p:nvPr/>
-        </p:nvSpPr>
-        <p:spPr>
-          <a:xfrm>
-            <a:off x="6556248" y="2724912"/>
-            <a:ext cx="2148839" cy="411480"/>
-          </a:xfrm>
-          <a:prstGeom prst="rect">
-            <a:avLst/>
-          </a:prstGeom>
-          <a:noFill/>
-        </p:spPr>
-        <p:txBody>
-          <a:bodyPr wrap="square" lIns="13716" rIns="13716" tIns="0" bIns="0">
-            <a:spAutoFit/>
-          </a:bodyPr>
-          <a:lstStyle/>
-          <a:p>
-            <a:pPr>
-              <a:spcAft>
-                <a:spcPts val="800"/>
-              </a:spcAft>
-              <a:defRPr sz="1600" b="1">
-                <a:solidFill>
-                  <a:srgbClr val="66E6CD"/>
-                </a:solidFill>
-                <a:latin typeface="DejaVu Sans"/>
-              </a:defRPr>
-            </a:pPr>
-            <a:r>
-              <a:t>LOCAL EFFECTS</a:t>
-            </a:r>
-          </a:p>
-        </p:txBody>
-      </p:sp>
-      <p:sp>
-        <p:nvSpPr>
-          <p:cNvPr id="24" name="TextBox 23"/>
-          <p:cNvSpPr txBox="1"/>
-          <p:nvPr/>
-        </p:nvSpPr>
-        <p:spPr>
-          <a:xfrm>
-            <a:off x="6437376" y="3355848"/>
-            <a:ext cx="2231136" cy="914399"/>
-          </a:xfrm>
-          <a:prstGeom prst="rect">
-            <a:avLst/>
-          </a:prstGeom>
-          <a:noFill/>
-        </p:spPr>
-        <p:txBody>
-          <a:bodyPr wrap="square" lIns="13716" rIns="13716" tIns="0" bIns="0">
-            <a:spAutoFit/>
-          </a:bodyPr>
-          <a:lstStyle/>
-          <a:p>
-            <a:pPr>
-              <a:spcAft>
-                <a:spcPts val="800"/>
-              </a:spcAft>
-              <a:defRPr sz="1500" b="0">
-                <a:solidFill>
-                  <a:srgbClr val="EDF4FF"/>
-                </a:solidFill>
-                <a:latin typeface="DejaVu Sans"/>
-              </a:defRPr>
-            </a:pPr>
-            <a:r>
-              <a:t>Physical traces +</a:t>
-            </a:r>
-          </a:p>
-          <a:p>
-            <a:pPr>
-              <a:spcAft>
-                <a:spcPts val="800"/>
-              </a:spcAft>
-              <a:defRPr sz="1500" b="0">
-                <a:solidFill>
-                  <a:srgbClr val="EDF4FF"/>
-                </a:solidFill>
-                <a:latin typeface="DejaVu Sans"/>
-              </a:defRPr>
-            </a:pPr>
-            <a:r>
-              <a:t>limited perception</a:t>
-            </a:r>
-          </a:p>
-        </p:txBody>
-      </p:sp>
-      <p:sp>
-        <p:nvSpPr>
-          <p:cNvPr id="25" name="Rounded Rectangle 24"/>
-          <p:cNvSpPr/>
-          <p:nvPr/>
-        </p:nvSpPr>
-        <p:spPr>
-          <a:xfrm>
-            <a:off x="9043416" y="2514600"/>
-            <a:ext cx="2651760" cy="1874519"/>
-          </a:xfrm>
-          <a:prstGeom prst="roundRect">
-            <a:avLst>
-              <a:gd name="adj" fmla="val 8000"/>
-            </a:avLst>
-          </a:prstGeom>
-          <a:solidFill>
-            <a:srgbClr val="111D30"/>
-          </a:solidFill>
-          <a:ln>
-            <a:solidFill>
-              <a:srgbClr val="24354B"/>
-            </a:solidFill>
-          </a:ln>
-        </p:spPr>
-        <p:style>
-          <a:lnRef idx="1">
-            <a:schemeClr val="accent1"/>
-          </a:lnRef>
-          <a:fillRef idx="3">
-            <a:schemeClr val="accent1"/>
-          </a:fillRef>
-          <a:effectRef idx="2">
-            <a:schemeClr val="accent1"/>
-          </a:effectRef>
-          <a:fontRef idx="minor">
-            <a:schemeClr val="lt1"/>
-          </a:fontRef>
-        </p:style>
-        <p:txBody>
-          <a:bodyPr rtlCol="0" anchor="ctr"/>
-          <a:lstStyle/>
-          <a:p>
-            <a:pPr algn="ctr"/>
-          </a:p>
-        </p:txBody>
-      </p:sp>
-      <p:sp>
-        <p:nvSpPr>
-          <p:cNvPr id="26" name="Rectangle 25"/>
-          <p:cNvSpPr/>
-          <p:nvPr/>
-        </p:nvSpPr>
-        <p:spPr>
-          <a:xfrm>
-            <a:off x="9208008" y="2697480"/>
-            <a:ext cx="45720" cy="310896"/>
-          </a:xfrm>
-          <a:prstGeom prst="rect">
-            <a:avLst/>
-          </a:prstGeom>
-          <a:solidFill>
-            <a:srgbClr val="66E6CD"/>
-          </a:solidFill>
-          <a:ln>
-            <a:noFill/>
-          </a:ln>
-        </p:spPr>
-        <p:style>
-          <a:lnRef idx="1">
-            <a:schemeClr val="accent1"/>
-          </a:lnRef>
-          <a:fillRef idx="3">
-            <a:schemeClr val="accent1"/>
-          </a:fillRef>
-          <a:effectRef idx="2">
-            <a:schemeClr val="accent1"/>
-          </a:effectRef>
-          <a:fontRef idx="minor">
-            <a:schemeClr val="lt1"/>
-          </a:fontRef>
-        </p:style>
-        <p:txBody>
-          <a:bodyPr rtlCol="0" anchor="ctr"/>
-          <a:lstStyle/>
-          <a:p>
-            <a:pPr algn="ctr"/>
-          </a:p>
-        </p:txBody>
-      </p:sp>
-      <p:sp>
-        <p:nvSpPr>
-          <p:cNvPr id="27" name="TextBox 26"/>
-          <p:cNvSpPr txBox="1"/>
-          <p:nvPr/>
-        </p:nvSpPr>
-        <p:spPr>
-          <a:xfrm>
-            <a:off x="9372600" y="2724912"/>
-            <a:ext cx="2148839" cy="411480"/>
-          </a:xfrm>
-          <a:prstGeom prst="rect">
-            <a:avLst/>
-          </a:prstGeom>
-          <a:noFill/>
-        </p:spPr>
-        <p:txBody>
-          <a:bodyPr wrap="square" lIns="13716" rIns="13716" tIns="0" bIns="0">
-            <a:spAutoFit/>
-          </a:bodyPr>
-          <a:lstStyle/>
-          <a:p>
-            <a:pPr>
-              <a:spcAft>
-                <a:spcPts val="800"/>
-              </a:spcAft>
-              <a:defRPr sz="1600" b="1">
-                <a:solidFill>
-                  <a:srgbClr val="66E6CD"/>
-                </a:solidFill>
-                <a:latin typeface="DejaVu Sans"/>
-              </a:defRPr>
-            </a:pPr>
-            <a:r>
-              <a:t>INVESTIGATION</a:t>
-            </a:r>
-          </a:p>
-        </p:txBody>
-      </p:sp>
-      <p:sp>
-        <p:nvSpPr>
-          <p:cNvPr id="28" name="TextBox 27"/>
-          <p:cNvSpPr txBox="1"/>
-          <p:nvPr/>
-        </p:nvSpPr>
-        <p:spPr>
-          <a:xfrm>
-            <a:off x="9253728" y="3355848"/>
-            <a:ext cx="2231136" cy="914399"/>
-          </a:xfrm>
-          <a:prstGeom prst="rect">
-            <a:avLst/>
-          </a:prstGeom>
-          <a:noFill/>
-        </p:spPr>
-        <p:txBody>
-          <a:bodyPr wrap="square" lIns="13716" rIns="13716" tIns="0" bIns="0">
-            <a:spAutoFit/>
-          </a:bodyPr>
-          <a:lstStyle/>
-          <a:p>
-            <a:pPr>
-              <a:spcAft>
-                <a:spcPts val="800"/>
-              </a:spcAft>
-              <a:defRPr sz="1500" b="0">
-                <a:solidFill>
-                  <a:srgbClr val="EDF4FF"/>
-                </a:solidFill>
-                <a:latin typeface="DejaVu Sans"/>
-              </a:defRPr>
-            </a:pPr>
-            <a:r>
-              <a:t>Persistent tools,</a:t>
-            </a:r>
-          </a:p>
-          <a:p>
-            <a:pPr>
-              <a:spcAft>
-                <a:spcPts val="800"/>
-              </a:spcAft>
-              <a:defRPr sz="1500" b="0">
-                <a:solidFill>
-                  <a:srgbClr val="EDF4FF"/>
-                </a:solidFill>
-                <a:latin typeface="DejaVu Sans"/>
-              </a:defRPr>
-            </a:pPr>
-            <a:r>
-              <a:t>receipts and dialogue</a:t>
-            </a:r>
-          </a:p>
-        </p:txBody>
-      </p:sp>
-      <p:sp>
-        <p:nvSpPr>
-          <p:cNvPr id="29" name="Rounded Rectangle 28"/>
-          <p:cNvSpPr/>
-          <p:nvPr/>
-        </p:nvSpPr>
-        <p:spPr>
-          <a:xfrm>
-            <a:off x="594360" y="4599432"/>
-            <a:ext cx="3429000" cy="1124712"/>
-          </a:xfrm>
-          <a:prstGeom prst="roundRect">
-            <a:avLst>
-              <a:gd name="adj" fmla="val 8000"/>
-            </a:avLst>
-          </a:prstGeom>
-          <a:solidFill>
-            <a:srgbClr val="111D30"/>
-          </a:solidFill>
-          <a:ln>
-            <a:solidFill>
-              <a:srgbClr val="24354B"/>
-            </a:solidFill>
-          </a:ln>
-        </p:spPr>
-        <p:style>
-          <a:lnRef idx="1">
-            <a:schemeClr val="accent1"/>
-          </a:lnRef>
-          <a:fillRef idx="3">
-            <a:schemeClr val="accent1"/>
-          </a:fillRef>
-          <a:effectRef idx="2">
-            <a:schemeClr val="accent1"/>
-          </a:effectRef>
-          <a:fontRef idx="minor">
-            <a:schemeClr val="lt1"/>
-          </a:fontRef>
-        </p:style>
-        <p:txBody>
-          <a:bodyPr rtlCol="0" anchor="ctr"/>
-          <a:lstStyle/>
-          <a:p>
-            <a:pPr algn="ctr"/>
-          </a:p>
-        </p:txBody>
-      </p:sp>
-      <p:sp>
-        <p:nvSpPr>
-          <p:cNvPr id="30" name="Rectangle 29"/>
-          <p:cNvSpPr/>
-          <p:nvPr/>
-        </p:nvSpPr>
-        <p:spPr>
-          <a:xfrm>
-            <a:off x="758952" y="4782312"/>
+            <a:off x="8311896" y="2743200"/>
             <a:ext cx="45720" cy="310896"/>
           </a:xfrm>
           <a:prstGeom prst="rect">
@@ -13824,14 +13297,14 @@
       </p:sp>
       <p:sp>
         <p:nvSpPr>
-          <p:cNvPr id="31" name="TextBox 30"/>
+          <p:cNvPr id="23" name="TextBox 22"/>
           <p:cNvSpPr txBox="1"/>
           <p:nvPr/>
         </p:nvSpPr>
         <p:spPr>
           <a:xfrm>
-            <a:off x="923544" y="4809744"/>
-            <a:ext cx="2926080" cy="411480"/>
+            <a:off x="8476488" y="2770632"/>
+            <a:ext cx="3072384" cy="411480"/>
           </a:xfrm>
           <a:prstGeom prst="rect">
             <a:avLst/>
@@ -13856,21 +13329,21 @@
               </a:defRPr>
             </a:pPr>
             <a:r>
-              <a:t>NO ASSAULT</a:t>
-            </a:r>
-          </a:p>
-        </p:txBody>
-      </p:sp>
-      <p:sp>
-        <p:nvSpPr>
-          <p:cNvPr id="32" name="TextBox 31"/>
+              <a:t>THE WITNESSES</a:t>
+            </a:r>
+          </a:p>
+        </p:txBody>
+      </p:sp>
+      <p:sp>
+        <p:nvSpPr>
+          <p:cNvPr id="24" name="TextBox 23"/>
           <p:cNvSpPr txBox="1"/>
           <p:nvPr/>
         </p:nvSpPr>
         <p:spPr>
           <a:xfrm>
-            <a:off x="804672" y="5440680"/>
-            <a:ext cx="3008376" cy="164591"/>
+            <a:off x="8357616" y="3401568"/>
+            <a:ext cx="3154680" cy="1188720"/>
           </a:xfrm>
           <a:prstGeom prst="rect">
             <a:avLst/>
@@ -13887,7 +13360,7 @@
               <a:spcAft>
                 <a:spcPts val="800"/>
               </a:spcAft>
-              <a:defRPr sz="1200" b="0">
+              <a:defRPr sz="1800" b="0">
                 <a:solidFill>
                   <a:srgbClr val="EDF4FF"/>
                 </a:solidFill>
@@ -13895,111 +13368,21 @@
               </a:defRPr>
             </a:pPr>
             <a:r>
-              <a:t>No fatal lamp injury.</a:t>
-            </a:r>
-          </a:p>
-        </p:txBody>
-      </p:sp>
-      <p:sp>
-        <p:nvSpPr>
-          <p:cNvPr id="33" name="Rounded Rectangle 32"/>
-          <p:cNvSpPr/>
-          <p:nvPr/>
-        </p:nvSpPr>
-        <p:spPr>
-          <a:xfrm>
-            <a:off x="4389120" y="4599432"/>
-            <a:ext cx="3429000" cy="1124712"/>
-          </a:xfrm>
-          <a:prstGeom prst="roundRect">
-            <a:avLst>
-              <a:gd name="adj" fmla="val 8000"/>
-            </a:avLst>
-          </a:prstGeom>
-          <a:solidFill>
-            <a:srgbClr val="111D30"/>
-          </a:solidFill>
-          <a:ln>
-            <a:solidFill>
-              <a:srgbClr val="24354B"/>
-            </a:solidFill>
-          </a:ln>
-        </p:spPr>
-        <p:style>
-          <a:lnRef idx="1">
-            <a:schemeClr val="accent1"/>
-          </a:lnRef>
-          <a:fillRef idx="3">
-            <a:schemeClr val="accent1"/>
-          </a:fillRef>
-          <a:effectRef idx="2">
-            <a:schemeClr val="accent1"/>
-          </a:effectRef>
-          <a:fontRef idx="minor">
-            <a:schemeClr val="lt1"/>
-          </a:fontRef>
-        </p:style>
-        <p:txBody>
-          <a:bodyPr rtlCol="0" anchor="ctr"/>
-          <a:lstStyle/>
-          <a:p>
-            <a:pPr algn="ctr"/>
-          </a:p>
-        </p:txBody>
-      </p:sp>
-      <p:sp>
-        <p:nvSpPr>
-          <p:cNvPr id="34" name="Rectangle 33"/>
-          <p:cNvSpPr/>
-          <p:nvPr/>
-        </p:nvSpPr>
-        <p:spPr>
-          <a:xfrm>
-            <a:off x="4553712" y="4782312"/>
-            <a:ext cx="45720" cy="310896"/>
-          </a:xfrm>
-          <a:prstGeom prst="rect">
-            <a:avLst/>
-          </a:prstGeom>
-          <a:solidFill>
-            <a:srgbClr val="FFC177"/>
-          </a:solidFill>
-          <a:ln>
-            <a:noFill/>
-          </a:ln>
-        </p:spPr>
-        <p:style>
-          <a:lnRef idx="1">
-            <a:schemeClr val="accent1"/>
-          </a:lnRef>
-          <a:fillRef idx="3">
-            <a:schemeClr val="accent1"/>
-          </a:fillRef>
-          <a:effectRef idx="2">
-            <a:schemeClr val="accent1"/>
-          </a:effectRef>
-          <a:fontRef idx="minor">
-            <a:schemeClr val="lt1"/>
-          </a:fontRef>
-        </p:style>
-        <p:txBody>
-          <a:bodyPr rtlCol="0" anchor="ctr"/>
-          <a:lstStyle/>
-          <a:p>
-            <a:pPr algn="ctr"/>
-          </a:p>
-        </p:txBody>
-      </p:sp>
-      <p:sp>
-        <p:nvSpPr>
-          <p:cNvPr id="35" name="TextBox 34"/>
+              <a:t>Each person remembers only their own experience.</a:t>
+            </a:r>
+          </a:p>
+        </p:txBody>
+      </p:sp>
+      <p:sp>
+        <p:nvSpPr>
+          <p:cNvPr id="25" name="TextBox 24"/>
           <p:cNvSpPr txBox="1"/>
           <p:nvPr/>
         </p:nvSpPr>
         <p:spPr>
           <a:xfrm>
-            <a:off x="4718304" y="4809744"/>
-            <a:ext cx="2926080" cy="411480"/>
+            <a:off x="713232" y="5065776"/>
+            <a:ext cx="10789920" cy="731520"/>
           </a:xfrm>
           <a:prstGeom prst="rect">
             <a:avLst/>
@@ -14016,229 +13399,22 @@
               <a:spcAft>
                 <a:spcPts val="800"/>
               </a:spcAft>
-              <a:defRPr sz="1600" b="1">
-                <a:solidFill>
-                  <a:srgbClr val="FFC177"/>
+              <a:defRPr sz="1900" b="0">
+                <a:solidFill>
+                  <a:srgbClr val="A4B6CD"/>
                 </a:solidFill>
                 <a:latin typeface="DejaVu Sans"/>
               </a:defRPr>
             </a:pPr>
             <a:r>
-              <a:t>INTACT BRAKE</a:t>
-            </a:r>
-          </a:p>
-        </p:txBody>
-      </p:sp>
-      <p:sp>
-        <p:nvSpPr>
-          <p:cNvPr id="36" name="TextBox 35"/>
-          <p:cNvSpPr txBox="1"/>
-          <p:nvPr/>
-        </p:nvSpPr>
-        <p:spPr>
-          <a:xfrm>
-            <a:off x="4599432" y="5440680"/>
-            <a:ext cx="3008376" cy="164591"/>
-          </a:xfrm>
-          <a:prstGeom prst="rect">
-            <a:avLst/>
-          </a:prstGeom>
-          <a:noFill/>
-        </p:spPr>
-        <p:txBody>
-          <a:bodyPr wrap="square" lIns="13716" rIns="13716" tIns="0" bIns="0">
-            <a:spAutoFit/>
-          </a:bodyPr>
-          <a:lstStyle/>
-          <a:p>
-            <a:pPr>
-              <a:spcAft>
-                <a:spcPts val="800"/>
-              </a:spcAft>
-              <a:defRPr sz="1200" b="0">
-                <a:solidFill>
-                  <a:srgbClr val="EDF4FF"/>
-                </a:solidFill>
-                <a:latin typeface="DejaVu Sans"/>
-              </a:defRPr>
-            </a:pPr>
-            <a:r>
-              <a:t>No sabotage-caused coach deaths.</a:t>
-            </a:r>
-          </a:p>
-        </p:txBody>
-      </p:sp>
-      <p:sp>
-        <p:nvSpPr>
-          <p:cNvPr id="37" name="Rounded Rectangle 36"/>
-          <p:cNvSpPr/>
-          <p:nvPr/>
-        </p:nvSpPr>
-        <p:spPr>
-          <a:xfrm>
-            <a:off x="8183879" y="4599432"/>
-            <a:ext cx="3429000" cy="1124712"/>
-          </a:xfrm>
-          <a:prstGeom prst="roundRect">
-            <a:avLst>
-              <a:gd name="adj" fmla="val 8000"/>
-            </a:avLst>
-          </a:prstGeom>
-          <a:solidFill>
-            <a:srgbClr val="111D30"/>
-          </a:solidFill>
-          <a:ln>
-            <a:solidFill>
-              <a:srgbClr val="24354B"/>
-            </a:solidFill>
-          </a:ln>
-        </p:spPr>
-        <p:style>
-          <a:lnRef idx="1">
-            <a:schemeClr val="accent1"/>
-          </a:lnRef>
-          <a:fillRef idx="3">
-            <a:schemeClr val="accent1"/>
-          </a:fillRef>
-          <a:effectRef idx="2">
-            <a:schemeClr val="accent1"/>
-          </a:effectRef>
-          <a:fontRef idx="minor">
-            <a:schemeClr val="lt1"/>
-          </a:fontRef>
-        </p:style>
-        <p:txBody>
-          <a:bodyPr rtlCol="0" anchor="ctr"/>
-          <a:lstStyle/>
-          <a:p>
-            <a:pPr algn="ctr"/>
-          </a:p>
-        </p:txBody>
-      </p:sp>
-      <p:sp>
-        <p:nvSpPr>
-          <p:cNvPr id="38" name="Rectangle 37"/>
-          <p:cNvSpPr/>
-          <p:nvPr/>
-        </p:nvSpPr>
-        <p:spPr>
-          <a:xfrm>
-            <a:off x="8348471" y="4782312"/>
-            <a:ext cx="45720" cy="310896"/>
-          </a:xfrm>
-          <a:prstGeom prst="rect">
-            <a:avLst/>
-          </a:prstGeom>
-          <a:solidFill>
-            <a:srgbClr val="FFC177"/>
-          </a:solidFill>
-          <a:ln>
-            <a:noFill/>
-          </a:ln>
-        </p:spPr>
-        <p:style>
-          <a:lnRef idx="1">
-            <a:schemeClr val="accent1"/>
-          </a:lnRef>
-          <a:fillRef idx="3">
-            <a:schemeClr val="accent1"/>
-          </a:fillRef>
-          <a:effectRef idx="2">
-            <a:schemeClr val="accent1"/>
-          </a:effectRef>
-          <a:fontRef idx="minor">
-            <a:schemeClr val="lt1"/>
-          </a:fontRef>
-        </p:style>
-        <p:txBody>
-          <a:bodyPr rtlCol="0" anchor="ctr"/>
-          <a:lstStyle/>
-          <a:p>
-            <a:pPr algn="ctr"/>
-          </a:p>
-        </p:txBody>
-      </p:sp>
-      <p:sp>
-        <p:nvSpPr>
-          <p:cNvPr id="39" name="TextBox 38"/>
-          <p:cNvSpPr txBox="1"/>
-          <p:nvPr/>
-        </p:nvSpPr>
-        <p:spPr>
-          <a:xfrm>
-            <a:off x="8513063" y="4809744"/>
-            <a:ext cx="2926080" cy="411480"/>
-          </a:xfrm>
-          <a:prstGeom prst="rect">
-            <a:avLst/>
-          </a:prstGeom>
-          <a:noFill/>
-        </p:spPr>
-        <p:txBody>
-          <a:bodyPr wrap="square" lIns="13716" rIns="13716" tIns="0" bIns="0">
-            <a:spAutoFit/>
-          </a:bodyPr>
-          <a:lstStyle/>
-          <a:p>
-            <a:pPr>
-              <a:spcAft>
-                <a:spcPts val="800"/>
-              </a:spcAft>
-              <a:defRPr sz="1600" b="1">
-                <a:solidFill>
-                  <a:srgbClr val="FFC177"/>
-                </a:solidFill>
-                <a:latin typeface="DejaVu Sans"/>
-              </a:defRPr>
-            </a:pPr>
-            <a:r>
-              <a:t>ORDINARY CORDIAL</a:t>
-            </a:r>
-          </a:p>
-        </p:txBody>
-      </p:sp>
-      <p:sp>
-        <p:nvSpPr>
-          <p:cNvPr id="40" name="TextBox 39"/>
-          <p:cNvSpPr txBox="1"/>
-          <p:nvPr/>
-        </p:nvSpPr>
-        <p:spPr>
-          <a:xfrm>
-            <a:off x="8394192" y="5440680"/>
-            <a:ext cx="3008376" cy="164591"/>
-          </a:xfrm>
-          <a:prstGeom prst="rect">
-            <a:avLst/>
-          </a:prstGeom>
-          <a:noFill/>
-        </p:spPr>
-        <p:txBody>
-          <a:bodyPr wrap="square" lIns="13716" rIns="13716" tIns="0" bIns="0">
-            <a:spAutoFit/>
-          </a:bodyPr>
-          <a:lstStyle/>
-          <a:p>
-            <a:pPr>
-              <a:spcAft>
-                <a:spcPts val="800"/>
-              </a:spcAft>
-              <a:defRPr sz="1200" b="0">
-                <a:solidFill>
-                  <a:srgbClr val="EDF4FF"/>
-                </a:solidFill>
-                <a:latin typeface="DejaVu Sans"/>
-              </a:defRPr>
-            </a:pPr>
-            <a:r>
-              <a:t>No adulteration-caused death.</a:t>
-            </a:r>
-          </a:p>
-        </p:txBody>
-      </p:sp>
-      <p:sp>
-        <p:nvSpPr>
-          <p:cNvPr id="41" name="TextBox 40"/>
+              <a:t>Remove the assault: no fatal injury. Keep the brake intact: no coach deaths. Leave the drink unchanged: no poisoning death.</a:t>
+            </a:r>
+          </a:p>
+        </p:txBody>
+      </p:sp>
+      <p:sp>
+        <p:nvSpPr>
+          <p:cNvPr id="26" name="TextBox 25"/>
           <p:cNvSpPr txBox="1"/>
           <p:nvPr/>
         </p:nvSpPr>
@@ -14270,7 +13446,7 @@
               </a:defRPr>
             </a:pPr>
             <a:r>
-              <a:t>Mercy House replays recorded LLM actions. New cases execute authored seeded tapes. Continuous offstage lives are unfinished.</a:t>
+              <a:t>Starting incidents replay recorded or authored actions for repeatable tests. A continuously autonomous town is not implemented.</a:t>
             </a:r>
           </a:p>
         </p:txBody>
@@ -14550,7 +13726,7 @@
               </a:defRPr>
             </a:pPr>
             <a:r>
-              <a:t>MERCY HOUSE  /  CHARACTER MODEL ARCHITECTURE</a:t>
+              <a:t>MERCY HOUSE  /  CHARACTER CONVERSATIONS</a:t>
             </a:r>
           </a:p>
         </p:txBody>
@@ -14589,7 +13765,7 @@
               </a:defRPr>
             </a:pPr>
             <a:r>
-              <a:t>Each character owns its memories.</a:t>
+              <a:t>Each person has a life beyond the question.</a:t>
             </a:r>
           </a:p>
         </p:txBody>
@@ -14628,7 +13804,7 @@
               </a:defRPr>
             </a:pPr>
             <a:r>
-              <a:t>Private planning and public speech use separate contexts; physical truth stays in the engine.</a:t>
+              <a:t>Family, work, relationships and private memories shape what a character is willing to say.</a:t>
             </a:r>
           </a:p>
         </p:txBody>
@@ -14762,8 +13938,8 @@
         </p:nvSpPr>
         <p:spPr>
           <a:xfrm>
-            <a:off x="594360" y="2514600"/>
-            <a:ext cx="3383280" cy="2377440"/>
+            <a:off x="594360" y="2606040"/>
+            <a:ext cx="3520440" cy="2359152"/>
           </a:xfrm>
           <a:prstGeom prst="roundRect">
             <a:avLst>
@@ -14809,7 +13985,7 @@
         </p:nvSpPr>
         <p:spPr>
           <a:xfrm>
-            <a:off x="758952" y="2697480"/>
+            <a:off x="758952" y="2788920"/>
             <a:ext cx="45720" cy="310896"/>
           </a:xfrm>
           <a:prstGeom prst="rect">
@@ -14852,8 +14028,8 @@
         </p:nvSpPr>
         <p:spPr>
           <a:xfrm>
-            <a:off x="923544" y="2724912"/>
-            <a:ext cx="2880360" cy="411480"/>
+            <a:off x="923544" y="2816352"/>
+            <a:ext cx="3017520" cy="411480"/>
           </a:xfrm>
           <a:prstGeom prst="rect">
             <a:avLst/>
@@ -14878,7 +14054,7 @@
               </a:defRPr>
             </a:pPr>
             <a:r>
-              <a:t>PRIVATE PLANNER</a:t>
+              <a:t>WHAT THEY KNOW</a:t>
             </a:r>
           </a:p>
         </p:txBody>
@@ -14891,8 +14067,8 @@
         </p:nvSpPr>
         <p:spPr>
           <a:xfrm>
-            <a:off x="804672" y="3355848"/>
-            <a:ext cx="2962656" cy="1417320"/>
+            <a:off x="804672" y="3447288"/>
+            <a:ext cx="3099816" cy="1399032"/>
           </a:xfrm>
           <a:prstGeom prst="rect">
             <a:avLst/>
@@ -14909,7 +14085,7 @@
               <a:spcAft>
                 <a:spcPts val="800"/>
               </a:spcAft>
-              <a:defRPr sz="1700" b="0">
+              <a:defRPr sz="1800" b="0">
                 <a:solidFill>
                   <a:srgbClr val="EDF4FF"/>
                 </a:solidFill>
@@ -14917,7 +14093,7 @@
               </a:defRPr>
             </a:pPr>
             <a:r>
-              <a:t>Own life, local memories and legal choices. The raw detective question is replaced by derived topics.</a:t>
+              <a:t>Their own history and local experiences. They cannot inspect another person’s memories.</a:t>
             </a:r>
           </a:p>
         </p:txBody>
@@ -14930,8 +14106,8 @@
         </p:nvSpPr>
         <p:spPr>
           <a:xfrm>
-            <a:off x="4407408" y="2514600"/>
-            <a:ext cx="3383280" cy="2377440"/>
+            <a:off x="4352544" y="2606040"/>
+            <a:ext cx="3520440" cy="2359152"/>
           </a:xfrm>
           <a:prstGeom prst="roundRect">
             <a:avLst>
@@ -14977,7 +14153,7 @@
         </p:nvSpPr>
         <p:spPr>
           <a:xfrm>
-            <a:off x="4572000" y="2697480"/>
+            <a:off x="4517136" y="2788920"/>
             <a:ext cx="45720" cy="310896"/>
           </a:xfrm>
           <a:prstGeom prst="rect">
@@ -15020,8 +14196,8 @@
         </p:nvSpPr>
         <p:spPr>
           <a:xfrm>
-            <a:off x="4736592" y="2724912"/>
-            <a:ext cx="2880360" cy="411480"/>
+            <a:off x="4681728" y="2816352"/>
+            <a:ext cx="3017520" cy="411480"/>
           </a:xfrm>
           <a:prstGeom prst="rect">
             <a:avLst/>
@@ -15046,7 +14222,7 @@
               </a:defRPr>
             </a:pPr>
             <a:r>
-              <a:t>DISCLOSURE GATE</a:t>
+              <a:t>WHAT THEY SHARE</a:t>
             </a:r>
           </a:p>
         </p:txBody>
@@ -15059,8 +14235,8 @@
         </p:nvSpPr>
         <p:spPr>
           <a:xfrm>
-            <a:off x="4617720" y="3355848"/>
-            <a:ext cx="2962656" cy="1417320"/>
+            <a:off x="4562856" y="3447288"/>
+            <a:ext cx="3099816" cy="1399032"/>
           </a:xfrm>
           <a:prstGeom prst="rect">
             <a:avLst/>
@@ -15077,7 +14253,7 @@
               <a:spcAft>
                 <a:spcPts val="800"/>
               </a:spcAft>
-              <a:defRPr sz="1700" b="0">
+              <a:defRPr sz="1800" b="0">
                 <a:solidFill>
                   <a:srgbClr val="EDF4FF"/>
                 </a:solidFill>
@@ -15085,7 +14261,7 @@
               </a:defRPr>
             </a:pPr>
             <a:r>
-              <a:t>Trust, relevant acquired evidence and memory sensitivity determine which recollections may be released.</a:t>
+              <a:t>Reassurance and relevant evidence can unlock a reluctant account. A character may still refuse.</a:t>
             </a:r>
           </a:p>
         </p:txBody>
@@ -15098,8 +14274,8 @@
         </p:nvSpPr>
         <p:spPr>
           <a:xfrm>
-            <a:off x="8220456" y="2514600"/>
-            <a:ext cx="3383280" cy="2377440"/>
+            <a:off x="8110727" y="2606040"/>
+            <a:ext cx="3520440" cy="2359152"/>
           </a:xfrm>
           <a:prstGeom prst="roundRect">
             <a:avLst>
@@ -15145,7 +14321,7 @@
         </p:nvSpPr>
         <p:spPr>
           <a:xfrm>
-            <a:off x="8385048" y="2697480"/>
+            <a:off x="8275319" y="2788920"/>
             <a:ext cx="45720" cy="310896"/>
           </a:xfrm>
           <a:prstGeom prst="rect">
@@ -15188,8 +14364,8 @@
         </p:nvSpPr>
         <p:spPr>
           <a:xfrm>
-            <a:off x="8549640" y="2724912"/>
-            <a:ext cx="2880360" cy="411480"/>
+            <a:off x="8439911" y="2816352"/>
+            <a:ext cx="3017520" cy="411480"/>
           </a:xfrm>
           <a:prstGeom prst="rect">
             <a:avLst/>
@@ -15214,7 +14390,7 @@
               </a:defRPr>
             </a:pPr>
             <a:r>
-              <a:t>PUBLIC SPEAKER</a:t>
+              <a:t>WHAT THEY SAY</a:t>
             </a:r>
           </a:p>
         </p:txBody>
@@ -15227,8 +14403,8 @@
         </p:nvSpPr>
         <p:spPr>
           <a:xfrm>
-            <a:off x="8430768" y="3355848"/>
-            <a:ext cx="2962656" cy="1417320"/>
+            <a:off x="8321040" y="3447288"/>
+            <a:ext cx="3099816" cy="1399032"/>
           </a:xfrm>
           <a:prstGeom prst="rect">
             <a:avLst/>
@@ -15245,7 +14421,7 @@
               <a:spcAft>
                 <a:spcPts val="800"/>
               </a:spcAft>
-              <a:defRPr sz="1700" b="0">
+              <a:defRPr sz="1800" b="0">
                 <a:solidFill>
                   <a:srgbClr val="EDF4FF"/>
                 </a:solidFill>
@@ -15253,7 +14429,7 @@
               </a:defRPr>
             </a:pPr>
             <a:r>
-              <a:t>Only released recollections and public context become the spoken answer. Dialogue cannot create objects.</a:t>
+              <a:t>A separate model call writes the spoken reply using only the released recollections.</a:t>
             </a:r>
           </a:p>
         </p:txBody>
@@ -15266,8 +14442,8 @@
         </p:nvSpPr>
         <p:spPr>
           <a:xfrm>
-            <a:off x="658368" y="5248656"/>
-            <a:ext cx="10881360" cy="548640"/>
+            <a:off x="594360" y="5980176"/>
+            <a:ext cx="10972800" cy="320040"/>
           </a:xfrm>
           <a:prstGeom prst="rect">
             <a:avLst/>
@@ -15284,7 +14460,7 @@
               <a:spcAft>
                 <a:spcPts val="800"/>
               </a:spcAft>
-              <a:defRPr sz="1700" b="0">
+              <a:defRPr sz="1100" b="0">
                 <a:solidFill>
                   <a:srgbClr val="A4B6CD"/>
                 </a:solidFill>
@@ -15292,7 +14468,7 @@
               </a:defRPr>
             </a:pPr>
             <a:r>
-              <a:t>The viewer streams observed actions, actual dialogue and stated notes. It excludes private character memories and provider reasoning.</a:t>
+              <a:t>Witnesses do not receive the answer file. Conversation alone cannot create evidence or change what happened.</a:t>
             </a:r>
           </a:p>
         </p:txBody>
@@ -15572,7 +14748,7 @@
               </a:defRPr>
             </a:pPr>
             <a:r>
-              <a:t>MERCY HOUSE  /  OBSERVABLE RESULTS AND OFFICIAL SCORING</a:t>
+              <a:t>MERCY HOUSE  /  THE FINISHED INVESTIGATION</a:t>
             </a:r>
           </a:p>
         </p:txBody>
@@ -15611,7 +14787,7 @@
               </a:defRPr>
             </a:pPr>
             <a:r>
-              <a:t>The submitted report stays visible.</a:t>
+              <a:t>Read the report—and why it passed or failed.</a:t>
             </a:r>
           </a:p>
         </p:txBody>
@@ -15753,8 +14929,8 @@
         </p:blipFill>
         <p:spPr>
           <a:xfrm>
-            <a:off x="1033272" y="1828800"/>
-            <a:ext cx="5705855" cy="4160520"/>
+            <a:off x="1087482" y="1828800"/>
+            <a:ext cx="5643154" cy="4114800"/>
           </a:xfrm>
           <a:prstGeom prst="rect">
             <a:avLst/>
@@ -15769,8 +14945,8 @@
         </p:nvSpPr>
         <p:spPr>
           <a:xfrm>
-            <a:off x="7360920" y="1965960"/>
-            <a:ext cx="4206240" cy="3639312"/>
+            <a:off x="7452360" y="2057400"/>
+            <a:ext cx="4069080" cy="3520440"/>
           </a:xfrm>
           <a:prstGeom prst="roundRect">
             <a:avLst>
@@ -15810,14 +14986,57 @@
       </p:sp>
       <p:sp>
         <p:nvSpPr>
-          <p:cNvPr id="14" name="TextBox 13"/>
+          <p:cNvPr id="14" name="Rectangle 13"/>
+          <p:cNvSpPr/>
+          <p:nvPr/>
+        </p:nvSpPr>
+        <p:spPr>
+          <a:xfrm>
+            <a:off x="7616952" y="2240280"/>
+            <a:ext cx="45720" cy="310896"/>
+          </a:xfrm>
+          <a:prstGeom prst="rect">
+            <a:avLst/>
+          </a:prstGeom>
+          <a:solidFill>
+            <a:srgbClr val="66E6CD"/>
+          </a:solidFill>
+          <a:ln>
+            <a:noFill/>
+          </a:ln>
+        </p:spPr>
+        <p:style>
+          <a:lnRef idx="1">
+            <a:schemeClr val="accent1"/>
+          </a:lnRef>
+          <a:fillRef idx="3">
+            <a:schemeClr val="accent1"/>
+          </a:fillRef>
+          <a:effectRef idx="2">
+            <a:schemeClr val="accent1"/>
+          </a:effectRef>
+          <a:fontRef idx="minor">
+            <a:schemeClr val="lt1"/>
+          </a:fontRef>
+        </p:style>
+        <p:txBody>
+          <a:bodyPr rtlCol="0" anchor="ctr"/>
+          <a:lstStyle/>
+          <a:p>
+            <a:pPr algn="ctr"/>
+          </a:p>
+        </p:txBody>
+      </p:sp>
+      <p:sp>
+        <p:nvSpPr>
+          <p:cNvPr id="15" name="TextBox 14"/>
           <p:cNvSpPr txBox="1"/>
           <p:nvPr/>
         </p:nvSpPr>
         <p:spPr>
           <a:xfrm>
-            <a:off x="7589520" y="2194560"/>
-            <a:ext cx="3749039" cy="365760"/>
+            <a:off x="7781544" y="2267712"/>
+            <a:ext cx="3566160" cy="411480"/>
           </a:xfrm>
           <a:prstGeom prst="rect">
             <a:avLst/>
@@ -15834,7 +15053,7 @@
               <a:spcAft>
                 <a:spcPts val="800"/>
               </a:spcAft>
-              <a:defRPr sz="1500" b="1">
+              <a:defRPr sz="1600" b="1">
                 <a:solidFill>
                   <a:srgbClr val="66E6CD"/>
                 </a:solidFill>
@@ -15842,21 +15061,21 @@
               </a:defRPr>
             </a:pPr>
             <a:r>
-              <a:t>PROGRAMMATIC VERIFIER</a:t>
-            </a:r>
-          </a:p>
-        </p:txBody>
-      </p:sp>
-      <p:sp>
-        <p:nvSpPr>
-          <p:cNvPr id="15" name="TextBox 14"/>
+              <a:t>VISIBLE RESULTS</a:t>
+            </a:r>
+          </a:p>
+        </p:txBody>
+      </p:sp>
+      <p:sp>
+        <p:nvSpPr>
+          <p:cNvPr id="16" name="TextBox 15"/>
           <p:cNvSpPr txBox="1"/>
           <p:nvPr/>
         </p:nvSpPr>
         <p:spPr>
           <a:xfrm>
-            <a:off x="7589520" y="2761488"/>
-            <a:ext cx="3703320" cy="704088"/>
+            <a:off x="7662672" y="2898648"/>
+            <a:ext cx="3648456" cy="2560320"/>
           </a:xfrm>
           <a:prstGeom prst="rect">
             <a:avLst/>
@@ -15873,7 +15092,7 @@
               <a:spcAft>
                 <a:spcPts val="800"/>
               </a:spcAft>
-              <a:defRPr sz="2100" b="1">
+              <a:defRPr sz="1800" b="0">
                 <a:solidFill>
                   <a:srgbClr val="EDF4FF"/>
                 </a:solidFill>
@@ -15881,38 +15100,15 @@
               </a:defRPr>
             </a:pPr>
             <a:r>
-              <a:t>R = clamp(C − .20F − .10U, 0, 1)</a:t>
-            </a:r>
-          </a:p>
-        </p:txBody>
-      </p:sp>
-      <p:sp>
-        <p:nvSpPr>
-          <p:cNvPr id="16" name="TextBox 15"/>
-          <p:cNvSpPr txBox="1"/>
-          <p:nvPr/>
-        </p:nvSpPr>
-        <p:spPr>
-          <a:xfrm>
-            <a:off x="7589520" y="3685032"/>
-            <a:ext cx="3675887" cy="1709928"/>
-          </a:xfrm>
-          <a:prstGeom prst="rect">
-            <a:avLst/>
-          </a:prstGeom>
-          <a:noFill/>
-        </p:spPr>
-        <p:txBody>
-          <a:bodyPr wrap="square" lIns="13716" rIns="13716" tIns="0" bIns="0">
-            <a:spAutoFit/>
-          </a:bodyPr>
-          <a:lstStyle/>
+              <a:t>The submitted conclusions.</a:t>
+            </a:r>
+          </a:p>
           <a:p>
             <a:pPr>
               <a:spcAft>
                 <a:spcPts val="800"/>
               </a:spcAft>
-              <a:defRPr sz="1600" b="0">
+              <a:defRPr sz="1800" b="0">
                 <a:solidFill>
                   <a:srgbClr val="EDF4FF"/>
                 </a:solidFill>
@@ -15920,7 +15116,7 @@
               </a:defRPr>
             </a:pPr>
             <a:r>
-              <a:t>C: supported target coverage</a:t>
+              <a:t>Links to acquired evidence.</a:t>
             </a:r>
           </a:p>
           <a:p>
@@ -15928,7 +15124,7 @@
               <a:spcAft>
                 <a:spcPts val="800"/>
               </a:spcAft>
-              <a:defRPr sz="1600" b="0">
+              <a:defRPr sz="1800" b="0">
                 <a:solidFill>
                   <a:srgbClr val="EDF4FF"/>
                 </a:solidFill>
@@ -15936,7 +15132,7 @@
               </a:defRPr>
             </a:pPr>
             <a:r>
-              <a:t>F: distinct false findings</a:t>
+              <a:t>Supported and unsupported findings.</a:t>
             </a:r>
           </a:p>
           <a:p>
@@ -15944,7 +15140,7 @@
               <a:spcAft>
                 <a:spcPts val="800"/>
               </a:spcAft>
-              <a:defRPr sz="1600" b="0">
+              <a:defRPr sz="1800" b="0">
                 <a:solidFill>
                   <a:srgbClr val="EDF4FF"/>
                 </a:solidFill>
@@ -15952,23 +15148,7 @@
               </a:defRPr>
             </a:pPr>
             <a:r>
-              <a:t>U: distinct unsupported findings</a:t>
-            </a:r>
-          </a:p>
-          <a:p>
-            <a:pPr>
-              <a:spcAft>
-                <a:spcPts val="800"/>
-              </a:spcAft>
-              <a:defRPr sz="1600" b="0">
-                <a:solidFill>
-                  <a:srgbClr val="EDF4FF"/>
-                </a:solidFill>
-                <a:latin typeface="DejaVu Sans"/>
-              </a:defRPr>
-            </a:pPr>
-            <a:r>
-              <a:t>A correct guess without proof earns zero.</a:t>
+              <a:t>The score and its explanation.</a:t>
             </a:r>
           </a:p>
         </p:txBody>
@@ -16007,7 +15187,7 @@
               </a:defRPr>
             </a:pPr>
             <a:r>
-              <a:t>Screenshot: actual native detective success, Lantern Room seed211. Narrative is unscored. Optional author-review LLM cannot assign rewards.</a:t>
+              <a:t>Image: an actual beginner investigation that scored 1.0. The written narrative is shown, but is not automatically fact-checked.</a:t>
             </a:r>
           </a:p>
         </p:txBody>
@@ -16287,7 +15467,7 @@
               </a:defRPr>
             </a:pPr>
             <a:r>
-              <a:t>MERCY HOUSE  /  IMPLEMENTATION AND ISOLATION</a:t>
+              <a:t>MERCY HOUSE  /  THE SOFTWARE</a:t>
             </a:r>
           </a:p>
         </p:txBody>
@@ -16326,53 +15506,14 @@
               </a:defRPr>
             </a:pPr>
             <a:r>
-              <a:t>A small stack with explicit boundaries.</a:t>
-            </a:r>
-          </a:p>
-        </p:txBody>
-      </p:sp>
-      <p:sp>
-        <p:nvSpPr>
-          <p:cNvPr id="9" name="TextBox 8"/>
-          <p:cNvSpPr txBox="1"/>
-          <p:nvPr/>
-        </p:nvSpPr>
-        <p:spPr>
-          <a:xfrm>
-            <a:off x="566928" y="1691640"/>
-            <a:ext cx="10972800" cy="594360"/>
-          </a:xfrm>
-          <a:prstGeom prst="rect">
-            <a:avLst/>
-          </a:prstGeom>
-          <a:noFill/>
-        </p:spPr>
-        <p:txBody>
-          <a:bodyPr wrap="square" lIns="13716" rIns="13716" tIns="0" bIns="0">
-            <a:spAutoFit/>
-          </a:bodyPr>
-          <a:lstStyle/>
-          <a:p>
-            <a:pPr>
-              <a:spcAft>
-                <a:spcPts val="800"/>
-              </a:spcAft>
-              <a:defRPr sz="1500" b="0">
-                <a:solidFill>
-                  <a:srgbClr val="A4B6CD"/>
-                </a:solidFill>
-                <a:latin typeface="DejaVu Sans"/>
-              </a:defRPr>
-            </a:pPr>
-            <a:r>
-              <a:t>Python standard-library runtime • Vanilla JavaScript, CSS and original SVG • Docker Compose • HTTPS model APIs</a:t>
-            </a:r>
-          </a:p>
-        </p:txBody>
-      </p:sp>
-      <p:sp>
-        <p:nvSpPr>
-          <p:cNvPr id="10" name="Rectangle 9"/>
+              <a:t>What we built.</a:t>
+            </a:r>
+          </a:p>
+        </p:txBody>
+      </p:sp>
+      <p:sp>
+        <p:nvSpPr>
+          <p:cNvPr id="9" name="Rectangle 8"/>
           <p:cNvSpPr/>
           <p:nvPr/>
         </p:nvSpPr>
@@ -16415,7 +15556,7 @@
       </p:sp>
       <p:sp>
         <p:nvSpPr>
-          <p:cNvPr id="11" name="TextBox 10"/>
+          <p:cNvPr id="10" name="TextBox 9"/>
           <p:cNvSpPr txBox="1"/>
           <p:nvPr/>
         </p:nvSpPr>
@@ -16454,7 +15595,7 @@
       </p:sp>
       <p:sp>
         <p:nvSpPr>
-          <p:cNvPr id="12" name="TextBox 11"/>
+          <p:cNvPr id="11" name="TextBox 10"/>
           <p:cNvSpPr txBox="1"/>
           <p:nvPr/>
         </p:nvSpPr>
@@ -16493,14 +15634,14 @@
       </p:sp>
       <p:sp>
         <p:nvSpPr>
-          <p:cNvPr id="13" name="Rounded Rectangle 12"/>
+          <p:cNvPr id="12" name="Rounded Rectangle 11"/>
           <p:cNvSpPr/>
           <p:nvPr/>
         </p:nvSpPr>
         <p:spPr>
           <a:xfrm>
-            <a:off x="594360" y="2514600"/>
-            <a:ext cx="2560320" cy="2423160"/>
+            <a:off x="594360" y="2560320"/>
+            <a:ext cx="2651760" cy="2606040"/>
           </a:xfrm>
           <a:prstGeom prst="roundRect">
             <a:avLst>
@@ -16540,13 +15681,13 @@
       </p:sp>
       <p:sp>
         <p:nvSpPr>
-          <p:cNvPr id="14" name="Rectangle 13"/>
+          <p:cNvPr id="13" name="Rectangle 12"/>
           <p:cNvSpPr/>
           <p:nvPr/>
         </p:nvSpPr>
         <p:spPr>
           <a:xfrm>
-            <a:off x="758952" y="2697480"/>
+            <a:off x="758952" y="2743200"/>
             <a:ext cx="45720" cy="310896"/>
           </a:xfrm>
           <a:prstGeom prst="rect">
@@ -16583,14 +15724,14 @@
       </p:sp>
       <p:sp>
         <p:nvSpPr>
-          <p:cNvPr id="15" name="TextBox 14"/>
+          <p:cNvPr id="14" name="TextBox 13"/>
           <p:cNvSpPr txBox="1"/>
           <p:nvPr/>
         </p:nvSpPr>
         <p:spPr>
           <a:xfrm>
-            <a:off x="923544" y="2724912"/>
-            <a:ext cx="2057400" cy="411480"/>
+            <a:off x="923544" y="2770632"/>
+            <a:ext cx="2148839" cy="411480"/>
           </a:xfrm>
           <a:prstGeom prst="rect">
             <a:avLst/>
@@ -16615,21 +15756,21 @@
               </a:defRPr>
             </a:pPr>
             <a:r>
-              <a:t>PROTECTED WORLD</a:t>
-            </a:r>
-          </a:p>
-        </p:txBody>
-      </p:sp>
-      <p:sp>
-        <p:nvSpPr>
-          <p:cNvPr id="16" name="TextBox 15"/>
+              <a:t>PYTHON</a:t>
+            </a:r>
+          </a:p>
+        </p:txBody>
+      </p:sp>
+      <p:sp>
+        <p:nvSpPr>
+          <p:cNvPr id="15" name="TextBox 14"/>
           <p:cNvSpPr txBox="1"/>
           <p:nvPr/>
         </p:nvSpPr>
         <p:spPr>
           <a:xfrm>
-            <a:off x="804672" y="3355848"/>
-            <a:ext cx="2139696" cy="1463039"/>
+            <a:off x="804672" y="3401568"/>
+            <a:ext cx="2231136" cy="1645920"/>
           </a:xfrm>
           <a:prstGeom prst="rect">
             <a:avLst/>
@@ -16646,7 +15787,7 @@
               <a:spcAft>
                 <a:spcPts val="800"/>
               </a:spcAft>
-              <a:defRPr sz="1500" b="0">
+              <a:defRPr sz="1600" b="0">
                 <a:solidFill>
                   <a:srgbClr val="EDF4FF"/>
                 </a:solidFill>
@@ -16654,21 +15795,21 @@
               </a:defRPr>
             </a:pPr>
             <a:r>
-              <a:t>Python state engine, receipts, proof routes and deterministic verifier.</a:t>
-            </a:r>
-          </a:p>
-        </p:txBody>
-      </p:sp>
-      <p:sp>
-        <p:nvSpPr>
-          <p:cNvPr id="17" name="Rounded Rectangle 16"/>
+              <a:t>Runs the world, checks actions, stores evidence and scores reports.</a:t>
+            </a:r>
+          </a:p>
+        </p:txBody>
+      </p:sp>
+      <p:sp>
+        <p:nvSpPr>
+          <p:cNvPr id="16" name="Rounded Rectangle 15"/>
           <p:cNvSpPr/>
           <p:nvPr/>
         </p:nvSpPr>
         <p:spPr>
           <a:xfrm>
-            <a:off x="3410712" y="2514600"/>
-            <a:ext cx="2560320" cy="2423160"/>
+            <a:off x="3410712" y="2560320"/>
+            <a:ext cx="2651760" cy="2606040"/>
           </a:xfrm>
           <a:prstGeom prst="roundRect">
             <a:avLst>
@@ -16708,13 +15849,13 @@
       </p:sp>
       <p:sp>
         <p:nvSpPr>
-          <p:cNvPr id="18" name="Rectangle 17"/>
+          <p:cNvPr id="17" name="Rectangle 16"/>
           <p:cNvSpPr/>
           <p:nvPr/>
         </p:nvSpPr>
         <p:spPr>
           <a:xfrm>
-            <a:off x="3575304" y="2697480"/>
+            <a:off x="3575304" y="2743200"/>
             <a:ext cx="45720" cy="310896"/>
           </a:xfrm>
           <a:prstGeom prst="rect">
@@ -16751,14 +15892,14 @@
       </p:sp>
       <p:sp>
         <p:nvSpPr>
-          <p:cNvPr id="19" name="TextBox 18"/>
+          <p:cNvPr id="18" name="TextBox 17"/>
           <p:cNvSpPr txBox="1"/>
           <p:nvPr/>
         </p:nvSpPr>
         <p:spPr>
           <a:xfrm>
-            <a:off x="3739896" y="2724912"/>
-            <a:ext cx="2057400" cy="411480"/>
+            <a:off x="3739896" y="2770632"/>
+            <a:ext cx="2148839" cy="411480"/>
           </a:xfrm>
           <a:prstGeom prst="rect">
             <a:avLst/>
@@ -16783,21 +15924,21 @@
               </a:defRPr>
             </a:pPr>
             <a:r>
-              <a:t>TRUSTED HARNESS</a:t>
-            </a:r>
-          </a:p>
-        </p:txBody>
-      </p:sp>
-      <p:sp>
-        <p:nvSpPr>
-          <p:cNvPr id="20" name="TextBox 19"/>
+              <a:t>JAVASCRIPT + SVG</a:t>
+            </a:r>
+          </a:p>
+        </p:txBody>
+      </p:sp>
+      <p:sp>
+        <p:nvSpPr>
+          <p:cNvPr id="19" name="TextBox 18"/>
           <p:cNvSpPr txBox="1"/>
           <p:nvPr/>
         </p:nvSpPr>
         <p:spPr>
           <a:xfrm>
-            <a:off x="3621024" y="3355848"/>
-            <a:ext cx="2139696" cy="1463039"/>
+            <a:off x="3621024" y="3401568"/>
+            <a:ext cx="2231136" cy="1645920"/>
           </a:xfrm>
           <a:prstGeom prst="rect">
             <a:avLst/>
@@ -16814,7 +15955,7 @@
               <a:spcAft>
                 <a:spcPts val="800"/>
               </a:spcAft>
-              <a:defRPr sz="1500" b="0">
+              <a:defRPr sz="1600" b="0">
                 <a:solidFill>
                   <a:srgbClr val="EDF4FF"/>
                 </a:solidFill>
@@ -16822,21 +15963,21 @@
               </a:defRPr>
             </a:pPr>
             <a:r>
-              <a:t>Model-independent parsing, step/time budgets, private HTTP tool requests and JSONL logs.</a:t>
-            </a:r>
-          </a:p>
-        </p:txBody>
-      </p:sp>
-      <p:sp>
-        <p:nvSpPr>
-          <p:cNvPr id="21" name="Rounded Rectangle 20"/>
+              <a:t>Shows places, characters, dialogue, evidence and the final report.</a:t>
+            </a:r>
+          </a:p>
+        </p:txBody>
+      </p:sp>
+      <p:sp>
+        <p:nvSpPr>
+          <p:cNvPr id="20" name="Rounded Rectangle 19"/>
           <p:cNvSpPr/>
           <p:nvPr/>
         </p:nvSpPr>
         <p:spPr>
           <a:xfrm>
-            <a:off x="6227064" y="2514600"/>
-            <a:ext cx="2560320" cy="2423160"/>
+            <a:off x="6227064" y="2560320"/>
+            <a:ext cx="2651760" cy="2606040"/>
           </a:xfrm>
           <a:prstGeom prst="roundRect">
             <a:avLst>
@@ -16876,13 +16017,13 @@
       </p:sp>
       <p:sp>
         <p:nvSpPr>
-          <p:cNvPr id="22" name="Rectangle 21"/>
+          <p:cNvPr id="21" name="Rectangle 20"/>
           <p:cNvSpPr/>
           <p:nvPr/>
         </p:nvSpPr>
         <p:spPr>
           <a:xfrm>
-            <a:off x="6391655" y="2697480"/>
+            <a:off x="6391656" y="2743200"/>
             <a:ext cx="45720" cy="310896"/>
           </a:xfrm>
           <a:prstGeom prst="rect">
@@ -16919,14 +16060,14 @@
       </p:sp>
       <p:sp>
         <p:nvSpPr>
-          <p:cNvPr id="23" name="TextBox 22"/>
+          <p:cNvPr id="22" name="TextBox 21"/>
           <p:cNvSpPr txBox="1"/>
           <p:nvPr/>
         </p:nvSpPr>
         <p:spPr>
           <a:xfrm>
-            <a:off x="6556248" y="2724912"/>
-            <a:ext cx="2057400" cy="411480"/>
+            <a:off x="6556248" y="2770632"/>
+            <a:ext cx="2148839" cy="411480"/>
           </a:xfrm>
           <a:prstGeom prst="rect">
             <a:avLst/>
@@ -16951,21 +16092,21 @@
               </a:defRPr>
             </a:pPr>
             <a:r>
-              <a:t>MODEL GATEWAY</a:t>
-            </a:r>
-          </a:p>
-        </p:txBody>
-      </p:sp>
-      <p:sp>
-        <p:nvSpPr>
-          <p:cNvPr id="24" name="TextBox 23"/>
+              <a:t>DOCKER</a:t>
+            </a:r>
+          </a:p>
+        </p:txBody>
+      </p:sp>
+      <p:sp>
+        <p:nvSpPr>
+          <p:cNvPr id="23" name="TextBox 22"/>
           <p:cNvSpPr txBox="1"/>
           <p:nvPr/>
         </p:nvSpPr>
         <p:spPr>
           <a:xfrm>
-            <a:off x="6437376" y="3355848"/>
-            <a:ext cx="2139696" cy="1463039"/>
+            <a:off x="6437376" y="3401568"/>
+            <a:ext cx="2231136" cy="1645920"/>
           </a:xfrm>
           <a:prstGeom prst="rect">
             <a:avLst/>
@@ -16982,7 +16123,7 @@
               <a:spcAft>
                 <a:spcPts val="800"/>
               </a:spcAft>
-              <a:defRPr sz="1500" b="0">
+              <a:defRPr sz="1600" b="0">
                 <a:solidFill>
                   <a:srgbClr val="EDF4FF"/>
                 </a:solidFill>
@@ -16990,21 +16131,21 @@
               </a:defRPr>
             </a:pPr>
             <a:r>
-              <a:t>Configured endpoints, credential isolation, deadlines and request limits.</a:t>
-            </a:r>
-          </a:p>
-        </p:txBody>
-      </p:sp>
-      <p:sp>
-        <p:nvSpPr>
-          <p:cNvPr id="25" name="Rounded Rectangle 24"/>
+              <a:t>Separates the hidden world, model access, run controller and detective’s shell.</a:t>
+            </a:r>
+          </a:p>
+        </p:txBody>
+      </p:sp>
+      <p:sp>
+        <p:nvSpPr>
+          <p:cNvPr id="24" name="Rounded Rectangle 23"/>
           <p:cNvSpPr/>
           <p:nvPr/>
         </p:nvSpPr>
         <p:spPr>
           <a:xfrm>
-            <a:off x="9043416" y="2514600"/>
-            <a:ext cx="2560320" cy="2423160"/>
+            <a:off x="9043416" y="2560320"/>
+            <a:ext cx="2651760" cy="2606040"/>
           </a:xfrm>
           <a:prstGeom prst="roundRect">
             <a:avLst>
@@ -17044,13 +16185,13 @@
       </p:sp>
       <p:sp>
         <p:nvSpPr>
-          <p:cNvPr id="26" name="Rectangle 25"/>
+          <p:cNvPr id="25" name="Rectangle 24"/>
           <p:cNvSpPr/>
           <p:nvPr/>
         </p:nvSpPr>
         <p:spPr>
           <a:xfrm>
-            <a:off x="9208008" y="2697480"/>
+            <a:off x="9208008" y="2743200"/>
             <a:ext cx="45720" cy="310896"/>
           </a:xfrm>
           <a:prstGeom prst="rect">
@@ -17087,14 +16228,14 @@
       </p:sp>
       <p:sp>
         <p:nvSpPr>
-          <p:cNvPr id="27" name="TextBox 26"/>
+          <p:cNvPr id="26" name="TextBox 25"/>
           <p:cNvSpPr txBox="1"/>
           <p:nvPr/>
         </p:nvSpPr>
         <p:spPr>
           <a:xfrm>
-            <a:off x="9372600" y="2724912"/>
-            <a:ext cx="2057400" cy="411480"/>
+            <a:off x="9372600" y="2770632"/>
+            <a:ext cx="2148839" cy="411480"/>
           </a:xfrm>
           <a:prstGeom prst="rect">
             <a:avLst/>
@@ -17119,21 +16260,21 @@
               </a:defRPr>
             </a:pPr>
             <a:r>
-              <a:t>AGENT WORKSPACE</a:t>
-            </a:r>
-          </a:p>
-        </p:txBody>
-      </p:sp>
-      <p:sp>
-        <p:nvSpPr>
-          <p:cNvPr id="28" name="TextBox 27"/>
+              <a:t>MODEL APIs</a:t>
+            </a:r>
+          </a:p>
+        </p:txBody>
+      </p:sp>
+      <p:sp>
+        <p:nvSpPr>
+          <p:cNvPr id="27" name="TextBox 26"/>
           <p:cNvSpPr txBox="1"/>
           <p:nvPr/>
         </p:nvSpPr>
         <p:spPr>
           <a:xfrm>
-            <a:off x="9253728" y="3355848"/>
-            <a:ext cx="2139696" cy="1463039"/>
+            <a:off x="9253728" y="3401568"/>
+            <a:ext cx="2231136" cy="1645920"/>
           </a:xfrm>
           <a:prstGeom prst="rect">
             <a:avLst/>
@@ -17150,7 +16291,7 @@
               <a:spcAft>
                 <a:spcPts val="800"/>
               </a:spcAft>
-              <a:defRPr sz="1500" b="0">
+              <a:defRPr sz="1600" b="0">
                 <a:solidFill>
                   <a:srgbClr val="EDF4FF"/>
                 </a:solidFill>
@@ -17158,53 +16299,14 @@
               </a:defRPr>
             </a:pPr>
             <a:r>
-              <a:t>Real shell plus public town CLI; no keys, truth files or external route.</a:t>
-            </a:r>
-          </a:p>
-        </p:txBody>
-      </p:sp>
-      <p:sp>
-        <p:nvSpPr>
-          <p:cNvPr id="29" name="TextBox 28"/>
-          <p:cNvSpPr txBox="1"/>
-          <p:nvPr/>
-        </p:nvSpPr>
-        <p:spPr>
-          <a:xfrm>
-            <a:off x="658368" y="5257800"/>
-            <a:ext cx="10881360" cy="585216"/>
-          </a:xfrm>
-          <a:prstGeom prst="rect">
-            <a:avLst/>
-          </a:prstGeom>
-          <a:noFill/>
-        </p:spPr>
-        <p:txBody>
-          <a:bodyPr wrap="square" lIns="13716" rIns="13716" tIns="0" bIns="0">
-            <a:spAutoFit/>
-          </a:bodyPr>
-          <a:lstStyle/>
-          <a:p>
-            <a:pPr>
-              <a:spcAft>
-                <a:spcPts val="800"/>
-              </a:spcAft>
-              <a:defRPr sz="1700" b="0">
-                <a:solidFill>
-                  <a:srgbClr val="A4B6CD"/>
-                </a:solidFill>
-                <a:latin typeface="DejaVu Sans"/>
-              </a:defRPr>
-            </a:pPr>
-            <a:r>
-              <a:t>Presentation UI: local Python HTTP server + server-sent events. Policy training: CPU REINFORCE over a linear softmax selector; no GPU or LLM fine-tuning.</a:t>
-            </a:r>
-          </a:p>
-        </p:txBody>
-      </p:sp>
-      <p:sp>
-        <p:nvSpPr>
-          <p:cNvPr id="30" name="TextBox 29"/>
+              <a:t>Power the detective and character conversations. The viewer streams their public actions.</a:t>
+            </a:r>
+          </a:p>
+        </p:txBody>
+      </p:sp>
+      <p:sp>
+        <p:nvSpPr>
+          <p:cNvPr id="28" name="TextBox 27"/>
           <p:cNvSpPr txBox="1"/>
           <p:nvPr/>
         </p:nvSpPr>
@@ -17236,7 +16338,7 @@
               </a:defRPr>
             </a:pPr>
             <a:r>
-              <a:t>Workspace has no Docker socket, private mounts or control token. Security assumes a trusted host and Docker daemon.</a:t>
+              <a:t>Hosted on Google Cloud with Terraform, Cloudflare DNS and Caddy HTTPS. The public website needs no account.</a:t>
             </a:r>
           </a:p>
         </p:txBody>
@@ -17516,7 +16618,7 @@
               </a:defRPr>
             </a:pPr>
             <a:r>
-              <a:t>MERCY HOUSE  /  THE TRAINED POLICY</a:t>
+              <a:t>MERCY HOUSE  /  LEARNING WHICH ACTION TO CHOOSE</a:t>
             </a:r>
           </a:p>
         </p:txBody>
@@ -17555,7 +16657,7 @@
               </a:defRPr>
             </a:pPr>
             <a:r>
-              <a:t>RL learns which proposed action to execute.</a:t>
+              <a:t>What did we train?</a:t>
             </a:r>
           </a:p>
         </p:txBody>
@@ -17594,7 +16696,7 @@
               </a:defRPr>
             </a:pPr>
             <a:r>
-              <a:t>Optional research policy: a compact learned selector ranks actions using public features. The native UI/judging detective remains independent.</a:t>
+              <a:t>We trained a small action selector. We did not change the language model’s weights.</a:t>
             </a:r>
           </a:p>
         </p:txBody>
@@ -17728,8 +16830,8 @@
         </p:nvSpPr>
         <p:spPr>
           <a:xfrm>
-            <a:off x="594360" y="2514600"/>
-            <a:ext cx="3575304" cy="2423160"/>
+            <a:off x="594360" y="2560320"/>
+            <a:ext cx="3575304" cy="2377440"/>
           </a:xfrm>
           <a:prstGeom prst="roundRect">
             <a:avLst>
@@ -17775,7 +16877,7 @@
         </p:nvSpPr>
         <p:spPr>
           <a:xfrm>
-            <a:off x="758952" y="2697480"/>
+            <a:off x="758952" y="2743200"/>
             <a:ext cx="45720" cy="310896"/>
           </a:xfrm>
           <a:prstGeom prst="rect">
@@ -17818,7 +16920,7 @@
         </p:nvSpPr>
         <p:spPr>
           <a:xfrm>
-            <a:off x="923544" y="2724912"/>
+            <a:off x="923544" y="2770632"/>
             <a:ext cx="3072384" cy="411480"/>
           </a:xfrm>
           <a:prstGeom prst="rect">
@@ -17844,7 +16946,7 @@
               </a:defRPr>
             </a:pPr>
             <a:r>
-              <a:t>OBSERVED STATE</a:t>
+              <a:t>1  READ THE PROGRESS</a:t>
             </a:r>
           </a:p>
         </p:txBody>
@@ -17857,8 +16959,8 @@
         </p:nvSpPr>
         <p:spPr>
           <a:xfrm>
-            <a:off x="804672" y="3355848"/>
-            <a:ext cx="3154680" cy="1463039"/>
+            <a:off x="804672" y="3401568"/>
+            <a:ext cx="3154680" cy="1417320"/>
           </a:xfrm>
           <a:prstGeom prst="rect">
             <a:avLst/>
@@ -17875,7 +16977,7 @@
               <a:spcAft>
                 <a:spcPts val="800"/>
               </a:spcAft>
-              <a:defRPr sz="1700" b="0">
+              <a:defRPr sz="1800" b="0">
                 <a:solidFill>
                   <a:srgbClr val="EDF4FF"/>
                 </a:solidFill>
@@ -17883,7 +16985,7 @@
               </a:defRPr>
             </a:pPr>
             <a:r>
-              <a:t>Acquired records, comparisons, interviews, repeat attempts and steps left.</a:t>
+              <a:t>Use acquired records, past actions and remaining steps.</a:t>
             </a:r>
           </a:p>
         </p:txBody>
@@ -17896,8 +16998,8 @@
         </p:nvSpPr>
         <p:spPr>
           <a:xfrm>
-            <a:off x="4370832" y="2514600"/>
-            <a:ext cx="3575304" cy="2423160"/>
+            <a:off x="4370832" y="2560320"/>
+            <a:ext cx="3575304" cy="2377440"/>
           </a:xfrm>
           <a:prstGeom prst="roundRect">
             <a:avLst>
@@ -17943,7 +17045,7 @@
         </p:nvSpPr>
         <p:spPr>
           <a:xfrm>
-            <a:off x="4535424" y="2697480"/>
+            <a:off x="4535424" y="2743200"/>
             <a:ext cx="45720" cy="310896"/>
           </a:xfrm>
           <a:prstGeom prst="rect">
@@ -17986,7 +17088,7 @@
         </p:nvSpPr>
         <p:spPr>
           <a:xfrm>
-            <a:off x="4700016" y="2724912"/>
+            <a:off x="4700016" y="2770632"/>
             <a:ext cx="3072384" cy="411480"/>
           </a:xfrm>
           <a:prstGeom prst="rect">
@@ -18012,7 +17114,7 @@
               </a:defRPr>
             </a:pPr>
             <a:r>
-              <a:t>CANDIDATE ACTIONS</a:t>
+              <a:t>2  CONSIDER CHOICES</a:t>
             </a:r>
           </a:p>
         </p:txBody>
@@ -18025,8 +17127,8 @@
         </p:nvSpPr>
         <p:spPr>
           <a:xfrm>
-            <a:off x="4581144" y="3355848"/>
-            <a:ext cx="3154680" cy="1463039"/>
+            <a:off x="4581144" y="3401568"/>
+            <a:ext cx="3154680" cy="1417320"/>
           </a:xfrm>
           <a:prstGeom prst="rect">
             <a:avLst/>
@@ -18043,7 +17145,7 @@
               <a:spcAft>
                 <a:spcPts val="800"/>
               </a:spcAft>
-              <a:defRPr sz="1700" b="0">
+              <a:defRPr sz="1800" b="0">
                 <a:solidFill>
                   <a:srgbClr val="EDF4FF"/>
                 </a:solidFill>
@@ -18051,7 +17153,7 @@
               </a:defRPr>
             </a:pPr>
             <a:r>
-              <a:t>An authored public proposer during CPU training; an LLM proposer during transfer tests.</a:t>
+              <a:t>Receive several possible searches, questions, comparisons or reports.</a:t>
             </a:r>
           </a:p>
         </p:txBody>
@@ -18064,8 +17166,8 @@
         </p:nvSpPr>
         <p:spPr>
           <a:xfrm>
-            <a:off x="8147304" y="2514600"/>
-            <a:ext cx="3575304" cy="2423160"/>
+            <a:off x="8147304" y="2560320"/>
+            <a:ext cx="3575304" cy="2377440"/>
           </a:xfrm>
           <a:prstGeom prst="roundRect">
             <a:avLst>
@@ -18111,7 +17213,7 @@
         </p:nvSpPr>
         <p:spPr>
           <a:xfrm>
-            <a:off x="8311896" y="2697480"/>
+            <a:off x="8311896" y="2743200"/>
             <a:ext cx="45720" cy="310896"/>
           </a:xfrm>
           <a:prstGeom prst="rect">
@@ -18154,7 +17256,7 @@
         </p:nvSpPr>
         <p:spPr>
           <a:xfrm>
-            <a:off x="8476488" y="2724912"/>
+            <a:off x="8476488" y="2770632"/>
             <a:ext cx="3072384" cy="411480"/>
           </a:xfrm>
           <a:prstGeom prst="rect">
@@ -18180,7 +17282,7 @@
               </a:defRPr>
             </a:pPr>
             <a:r>
-              <a:t>LEARNED SELECTOR</a:t>
+              <a:t>3  PICK AN ACTION</a:t>
             </a:r>
           </a:p>
         </p:txBody>
@@ -18193,47 +17295,8 @@
         </p:nvSpPr>
         <p:spPr>
           <a:xfrm>
-            <a:off x="8357616" y="3355848"/>
-            <a:ext cx="3154680" cy="1463039"/>
-          </a:xfrm>
-          <a:prstGeom prst="rect">
-            <a:avLst/>
-          </a:prstGeom>
-          <a:noFill/>
-        </p:spPr>
-        <p:txBody>
-          <a:bodyPr wrap="square" lIns="13716" rIns="13716" tIns="0" bIns="0">
-            <a:spAutoFit/>
-          </a:bodyPr>
-          <a:lstStyle/>
-          <a:p>
-            <a:pPr>
-              <a:spcAft>
-                <a:spcPts val="800"/>
-              </a:spcAft>
-              <a:defRPr sz="1700" b="0">
-                <a:solidFill>
-                  <a:srgbClr val="EDF4FF"/>
-                </a:solidFill>
-                <a:latin typeface="DejaVu Sans"/>
-              </a:defRPr>
-            </a:pPr>
-            <a:r>
-              <a:t>Scores features, produces action probabilities, and executes one choice.</a:t>
-            </a:r>
-          </a:p>
-        </p:txBody>
-      </p:sp>
-      <p:sp>
-        <p:nvSpPr>
-          <p:cNvPr id="25" name="TextBox 24"/>
-          <p:cNvSpPr txBox="1"/>
-          <p:nvPr/>
-        </p:nvSpPr>
-        <p:spPr>
-          <a:xfrm>
-            <a:off x="667512" y="5303520"/>
-            <a:ext cx="10835640" cy="521207"/>
+            <a:off x="8357616" y="3401568"/>
+            <a:ext cx="3154680" cy="1417320"/>
           </a:xfrm>
           <a:prstGeom prst="rect">
             <a:avLst/>
@@ -18252,13 +17315,52 @@
               </a:spcAft>
               <a:defRPr sz="1800" b="0">
                 <a:solidFill>
+                  <a:srgbClr val="EDF4FF"/>
+                </a:solidFill>
+                <a:latin typeface="DejaVu Sans"/>
+              </a:defRPr>
+            </a:pPr>
+            <a:r>
+              <a:t>Learn which choices tend to lead to a supported conclusion.</a:t>
+            </a:r>
+          </a:p>
+        </p:txBody>
+      </p:sp>
+      <p:sp>
+        <p:nvSpPr>
+          <p:cNvPr id="25" name="TextBox 24"/>
+          <p:cNvSpPr txBox="1"/>
+          <p:nvPr/>
+        </p:nvSpPr>
+        <p:spPr>
+          <a:xfrm>
+            <a:off x="713232" y="5285232"/>
+            <a:ext cx="10835640" cy="475488"/>
+          </a:xfrm>
+          <a:prstGeom prst="rect">
+            <a:avLst/>
+          </a:prstGeom>
+          <a:noFill/>
+        </p:spPr>
+        <p:txBody>
+          <a:bodyPr wrap="square" lIns="13716" rIns="13716" tIns="0" bIns="0">
+            <a:spAutoFit/>
+          </a:bodyPr>
+          <a:lstStyle/>
+          <a:p>
+            <a:pPr>
+              <a:spcAft>
+                <a:spcPts val="800"/>
+              </a:spcAft>
+              <a:defRPr sz="1800" b="0">
+                <a:solidFill>
                   <a:srgbClr val="A4B6CD"/>
                 </a:solidFill>
                 <a:latin typeface="DejaVu Sans"/>
               </a:defRPr>
             </a:pPr>
             <a:r>
-              <a:t>REINFORCE raises the probability of action sequences that earn a valid terminal exercise reward, relative to a running baseline.</a:t>
+              <a:t>After repeated practice, successful action sequences become more likely. This is the reinforcement-learning part.</a:t>
             </a:r>
           </a:p>
         </p:txBody>
@@ -18297,7 +17399,7 @@
               </a:defRPr>
             </a:pPr>
             <a:r>
-              <a:t>Earlier prototype: 20,000 episodes / 460 weights. Fresh source curriculum: 6,000 episodes / 132 weights. Language-model weights stay fixed.</a:t>
+              <a:t>The method is REINFORCE. Training used written rules to propose choices; the full-case test used language-model proposals.</a:t>
             </a:r>
           </a:p>
         </p:txBody>
@@ -18577,7 +17679,7 @@
               </a:defRPr>
             </a:pPr>
             <a:r>
-              <a:t>MERCY HOUSE  /  SOURCED INSPIRATION, ORIGINAL INTERACTIVE TRAINING</a:t>
+              <a:t>MERCY HOUSE  /  THE TRAINING EXAMPLES</a:t>
             </a:r>
           </a:p>
         </p:txBody>
@@ -18616,7 +17718,7 @@
               </a:defRPr>
             </a:pPr>
             <a:r>
-              <a:t>Three mechanisms become practice exercises.</a:t>
+              <a:t>Three story ideas became practice problems.</a:t>
             </a:r>
           </a:p>
         </p:txBody>
@@ -18655,7 +17757,7 @@
               </a:defRPr>
             </a:pPr>
             <a:r>
-              <a:t>Original renamed checkpoint scenarios reuse the tested world mechanics. They do not reproduce TV scripts or complete episodes.</a:t>
+              <a:t>We wrote new interactive exercises inspired by these stories. We did not train on complete episode scripts.</a:t>
             </a:r>
           </a:p>
         </p:txBody>
@@ -18789,8 +17891,8 @@
         </p:nvSpPr>
         <p:spPr>
           <a:xfrm>
-            <a:off x="594360" y="2514600"/>
-            <a:ext cx="3575304" cy="2377440"/>
+            <a:off x="594360" y="2560320"/>
+            <a:ext cx="3575304" cy="2542032"/>
           </a:xfrm>
           <a:prstGeom prst="roundRect">
             <a:avLst>
@@ -18836,7 +17938,7 @@
         </p:nvSpPr>
         <p:spPr>
           <a:xfrm>
-            <a:off x="758952" y="2697480"/>
+            <a:off x="758952" y="2743200"/>
             <a:ext cx="45720" cy="310896"/>
           </a:xfrm>
           <a:prstGeom prst="rect">
@@ -18879,7 +17981,7 @@
         </p:nvSpPr>
         <p:spPr>
           <a:xfrm>
-            <a:off x="923544" y="2724912"/>
+            <a:off x="923544" y="2770632"/>
             <a:ext cx="3072384" cy="411480"/>
           </a:xfrm>
           <a:prstGeom prst="rect">
@@ -18905,7 +18007,7 @@
               </a:defRPr>
             </a:pPr>
             <a:r>
-              <a:t>INTENDED TARGET</a:t>
+              <a:t>THE MENTALIST · S1E8</a:t>
             </a:r>
           </a:p>
         </p:txBody>
@@ -18918,8 +18020,8 @@
         </p:nvSpPr>
         <p:spPr>
           <a:xfrm>
-            <a:off x="804672" y="3355848"/>
-            <a:ext cx="3154680" cy="1417320"/>
+            <a:off x="804672" y="3401568"/>
+            <a:ext cx="3154680" cy="1581911"/>
           </a:xfrm>
           <a:prstGeom prst="rect">
             <a:avLst/>
@@ -18944,23 +18046,7 @@
               </a:defRPr>
             </a:pPr>
             <a:r>
-              <a:t>The Mentalist S1E8</a:t>
-            </a:r>
-          </a:p>
-          <a:p>
-            <a:pPr>
-              <a:spcAft>
-                <a:spcPts val="800"/>
-              </a:spcAft>
-              <a:defRPr sz="1700" b="0">
-                <a:solidFill>
-                  <a:srgbClr val="EDF4FF"/>
-                </a:solidFill>
-                <a:latin typeface="DejaVu Sans"/>
-              </a:defRPr>
-            </a:pPr>
-            <a:r>
-              <a:t>Separate the person targeted from the other casualty.</a:t>
+              <a:t>Two people died. Which one was the intended target? Check the instruction and passenger records.</a:t>
             </a:r>
           </a:p>
         </p:txBody>
@@ -18973,8 +18059,8 @@
         </p:nvSpPr>
         <p:spPr>
           <a:xfrm>
-            <a:off x="4370832" y="2514600"/>
-            <a:ext cx="3575304" cy="2377440"/>
+            <a:off x="4370832" y="2560320"/>
+            <a:ext cx="3575304" cy="2542032"/>
           </a:xfrm>
           <a:prstGeom prst="roundRect">
             <a:avLst>
@@ -19020,7 +18106,7 @@
         </p:nvSpPr>
         <p:spPr>
           <a:xfrm>
-            <a:off x="4535424" y="2697480"/>
+            <a:off x="4535424" y="2743200"/>
             <a:ext cx="45720" cy="310896"/>
           </a:xfrm>
           <a:prstGeom prst="rect">
@@ -19063,7 +18149,7 @@
         </p:nvSpPr>
         <p:spPr>
           <a:xfrm>
-            <a:off x="4700016" y="2724912"/>
+            <a:off x="4700016" y="2770632"/>
             <a:ext cx="3072384" cy="411480"/>
           </a:xfrm>
           <a:prstGeom prst="rect">
@@ -19089,7 +18175,7 @@
               </a:defRPr>
             </a:pPr>
             <a:r>
-              <a:t>APPARENT FOREKNOWLEDGE</a:t>
+              <a:t>THE MENTALIST · S1E7</a:t>
             </a:r>
           </a:p>
         </p:txBody>
@@ -19102,8 +18188,8 @@
         </p:nvSpPr>
         <p:spPr>
           <a:xfrm>
-            <a:off x="4581144" y="3355848"/>
-            <a:ext cx="3154680" cy="1417320"/>
+            <a:off x="4581144" y="3401568"/>
+            <a:ext cx="3154680" cy="1581911"/>
           </a:xfrm>
           <a:prstGeom prst="rect">
             <a:avLst/>
@@ -19128,23 +18214,7 @@
               </a:defRPr>
             </a:pPr>
             <a:r>
-              <a:t>The Mentalist S1E7</a:t>
-            </a:r>
-          </a:p>
-          <a:p>
-            <a:pPr>
-              <a:spcAft>
-                <a:spcPts val="800"/>
-              </a:spcAft>
-              <a:defRPr sz="1700" b="0">
-                <a:solidFill>
-                  <a:srgbClr val="EDF4FF"/>
-                </a:solidFill>
-                <a:latin typeface="DejaVu Sans"/>
-              </a:defRPr>
-            </a:pPr>
-            <a:r>
-              <a:t>Test authorship; prediction alone does not establish murder.</a:t>
+              <a:t>Someone predicted a death. That does not prove murder. Check who wrote the warning.</a:t>
             </a:r>
           </a:p>
         </p:txBody>
@@ -19157,8 +18227,8 @@
         </p:nvSpPr>
         <p:spPr>
           <a:xfrm>
-            <a:off x="8147304" y="2514600"/>
-            <a:ext cx="3575304" cy="2377440"/>
+            <a:off x="8147304" y="2560320"/>
+            <a:ext cx="3575304" cy="2542032"/>
           </a:xfrm>
           <a:prstGeom prst="roundRect">
             <a:avLst>
@@ -19204,7 +18274,7 @@
         </p:nvSpPr>
         <p:spPr>
           <a:xfrm>
-            <a:off x="8311896" y="2697480"/>
+            <a:off x="8311896" y="2743200"/>
             <a:ext cx="45720" cy="310896"/>
           </a:xfrm>
           <a:prstGeom prst="rect">
@@ -19247,7 +18317,7 @@
         </p:nvSpPr>
         <p:spPr>
           <a:xfrm>
-            <a:off x="8476488" y="2724912"/>
+            <a:off x="8476488" y="2770632"/>
             <a:ext cx="3072384" cy="411480"/>
           </a:xfrm>
           <a:prstGeom prst="rect">
@@ -19273,7 +18343,7 @@
               </a:defRPr>
             </a:pPr>
             <a:r>
-              <a:t>TRUSTED RELATIVE</a:t>
+              <a:t>HIS &amp; HERS</a:t>
             </a:r>
           </a:p>
         </p:txBody>
@@ -19286,8 +18356,8 @@
         </p:nvSpPr>
         <p:spPr>
           <a:xfrm>
-            <a:off x="8357616" y="3355848"/>
-            <a:ext cx="3154680" cy="1417320"/>
+            <a:off x="8357616" y="3401568"/>
+            <a:ext cx="3154680" cy="1581911"/>
           </a:xfrm>
           <a:prstGeom prst="rect">
             <a:avLst/>
@@ -19312,23 +18382,7 @@
               </a:defRPr>
             </a:pPr>
             <a:r>
-              <a:t>His &amp; Hers</a:t>
-            </a:r>
-          </a:p>
-          <a:p>
-            <a:pPr>
-              <a:spcAft>
-                <a:spcPts val="800"/>
-              </a:spcAft>
-              <a:defRPr sz="1700" b="0">
-                <a:solidFill>
-                  <a:srgbClr val="EDF4FF"/>
-                </a:solidFill>
-                <a:latin typeface="DejaVu Sans"/>
-              </a:defRPr>
-            </a:pPr>
-            <a:r>
-              <a:t>Check a familiar parent against evidence rather than loyalty or rumour.</a:t>
+              <a:t>A familiar relative can be guilty or innocent. Use a first-hand account and physical evidence, not loyalty or gossip.</a:t>
             </a:r>
           </a:p>
         </p:txBody>
@@ -19336,45 +18390,6 @@
       <p:sp>
         <p:nvSpPr>
           <p:cNvPr id="25" name="TextBox 24"/>
-          <p:cNvSpPr txBox="1"/>
-          <p:nvPr/>
-        </p:nvSpPr>
-        <p:spPr>
-          <a:xfrm>
-            <a:off x="658368" y="5285232"/>
-            <a:ext cx="10881360" cy="566928"/>
-          </a:xfrm>
-          <a:prstGeom prst="rect">
-            <a:avLst/>
-          </a:prstGeom>
-          <a:noFill/>
-        </p:spPr>
-        <p:txBody>
-          <a:bodyPr wrap="square" lIns="13716" rIns="13716" tIns="0" bIns="0">
-            <a:spAutoFit/>
-          </a:bodyPr>
-          <a:lstStyle/>
-          <a:p>
-            <a:pPr>
-              <a:spcAft>
-                <a:spcPts val="800"/>
-              </a:spcAft>
-              <a:defRPr sz="1700" b="0">
-                <a:solidFill>
-                  <a:srgbClr val="A4B6CD"/>
-                </a:solidFill>
-                <a:latin typeface="DejaVu Sans"/>
-              </a:defRPr>
-            </a:pPr>
-            <a:r>
-              <a:t>Both culprit assignments occur. Training starts from zero; the elite Mercy House cases are excluded from this new curriculum.</a:t>
-            </a:r>
-          </a:p>
-        </p:txBody>
-      </p:sp>
-      <p:sp>
-        <p:nvSpPr>
-          <p:cNvPr id="26" name="TextBox 25"/>
           <p:cNvSpPr txBox="1"/>
           <p:nvPr/>
         </p:nvSpPr>
@@ -19406,7 +18421,7 @@
               </a:defRPr>
             </a:pPr>
             <a:r>
-              <a:t>Sources credited in SOURCE_TRAINING_REPORT.md. Some materials are acquired before these checkpoints begin; this is skill training.</a:t>
+              <a:t>Both culprit assignments appear. Some evidence is already acquired when practice begins. The original full inquest is excluded from this new training.</a:t>
             </a:r>
           </a:p>
         </p:txBody>

--- a/docs/deck.pptx
+++ b/docs/deck.pptx
@@ -9007,7 +9007,7 @@
               </a:defRPr>
             </a:pPr>
             <a:r>
-              <a:t>120 world/runtime tests.</a:t>
+              <a:t>124 world/runtime tests.</a:t>
             </a:r>
           </a:p>
           <a:p>
@@ -9039,7 +9039,7 @@
               </a:defRPr>
             </a:pPr>
             <a:r>
-              <a:t>9 viewer tests.</a:t>
+              <a:t>14 viewer tests.</a:t>
             </a:r>
           </a:p>
           <a:p>

--- a/docs/deck.pptx
+++ b/docs/deck.pptx
@@ -9007,7 +9007,7 @@
               </a:defRPr>
             </a:pPr>
             <a:r>
-              <a:t>124 world/runtime tests.</a:t>
+              <a:t>127 world/runtime tests.</a:t>
             </a:r>
           </a:p>
           <a:p>
@@ -9039,7 +9039,7 @@
               </a:defRPr>
             </a:pPr>
             <a:r>
-              <a:t>14 viewer tests.</a:t>
+              <a:t>15 viewer tests.</a:t>
             </a:r>
           </a:p>
           <a:p>
@@ -9223,7 +9223,7 @@
               </a:defRPr>
             </a:pPr>
             <a:r>
-              <a:t>Open the demo without signing in. Watch a recorded case, or enter your own API key to start a live investigation.</a:t>
+              <a:t>Take the guided tour. Watch recorded cases, or choose a provider and bring your API key. Optional speech follows each exchange.</a:t>
             </a:r>
           </a:p>
         </p:txBody>
@@ -16299,7 +16299,7 @@
               </a:defRPr>
             </a:pPr>
             <a:r>
-              <a:t>Power the detective and character conversations. The viewer streams their public actions.</a:t>
+              <a:t>Power the detective and character conversations. Provider presets and custom HTTPS endpoints. Public actions stream to the viewer.</a:t>
             </a:r>
           </a:p>
         </p:txBody>

--- a/docs/deck.pptx
+++ b/docs/deck.pptx
@@ -9007,7 +9007,7 @@
               </a:defRPr>
             </a:pPr>
             <a:r>
-              <a:t>127 world/runtime tests.</a:t>
+              <a:t>137 world/runtime tests.</a:t>
             </a:r>
           </a:p>
           <a:p>
@@ -9262,7 +9262,7 @@
               </a:defRPr>
             </a:pPr>
             <a:r>
-              <a:t>A hosted beginner test scored 1.0. Difficult live cases remain unproven; a witness can refuse to disclose crucial evidence.</a:t>
+              <a:t>A hosted beginner test scored 1.0. Difficult live cases remain unproven; repeated corroborated questions now have bounded cooperation.</a:t>
             </a:r>
           </a:p>
         </p:txBody>
@@ -14261,7 +14261,7 @@
               </a:defRPr>
             </a:pPr>
             <a:r>
-              <a:t>Reassurance and relevant evidence can unlock a reluctant account. A character may still refuse.</a:t>
+              <a:t>Reassurance and evidence unlock eligible observations. Repeated legitimate requests have bounded cooperation.</a:t>
             </a:r>
           </a:p>
         </p:txBody>
@@ -14429,7 +14429,7 @@
               </a:defRPr>
             </a:pPr>
             <a:r>
-              <a:t>A separate model call writes the spoken reply using only the released recollections.</a:t>
+              <a:t>A separate model voices released recollections. A formal-account fallback records exact eligible facts.</a:t>
             </a:r>
           </a:p>
         </p:txBody>
